--- a/output/wordlabs-legal-3day.pptx
+++ b/output/wordlabs-legal-3day.pptx
@@ -6071,7 +6071,7 @@
                 <a:ea typeface="Calibri" pitchFamily="34" charset="-122"/>
                 <a:cs typeface="Calibri" pitchFamily="34" charset="-120"/>
               </a:rPr>
-              <a:t> to park there, so we must find a </a:t>
+              <a:t> to park there, so the driver was asked to move </a:t>
             </a:r>
             <a:pPr algn="l" indent="0" marL="0">
               <a:buNone/>
@@ -6088,7 +6088,7 @@
                 <a:ea typeface="Calibri" pitchFamily="34" charset="-122"/>
                 <a:cs typeface="Calibri" pitchFamily="34" charset="-120"/>
               </a:rPr>
-              <a:t>legal</a:t>
+              <a:t>legally</a:t>
             </a:r>
             <a:pPr algn="l" indent="0" marL="0">
               <a:buNone/>
@@ -6102,7 +6102,7 @@
                 <a:ea typeface="Calibri" pitchFamily="34" charset="-122"/>
                 <a:cs typeface="Calibri" pitchFamily="34" charset="-120"/>
               </a:rPr>
-              <a:t> space.</a:t>
+              <a:t>.</a:t>
             </a:r>
             <a:endParaRPr lang="en-US" sz="1800" dirty="0"/>
           </a:p>
@@ -6385,7 +6385,7 @@
                 <a:ea typeface="Trebuchet MS" pitchFamily="34" charset="-122"/>
                 <a:cs typeface="Trebuchet MS" pitchFamily="34" charset="-120"/>
               </a:rPr>
-              <a:t>legal</a:t>
+              <a:t>legally</a:t>
             </a:r>
             <a:endParaRPr lang="en-US" sz="1400" dirty="0"/>
           </a:p>
@@ -11585,7 +11585,7 @@
                 <a:ea typeface="Trebuchet MS" pitchFamily="34" charset="-122"/>
                 <a:cs typeface="Trebuchet MS" pitchFamily="34" charset="-120"/>
               </a:rPr>
-              <a:t>legal</a:t>
+              <a:t>legally</a:t>
             </a:r>
             <a:endParaRPr lang="en-US" sz="2800" dirty="0"/>
           </a:p>
@@ -12412,7 +12412,7 @@
                 <a:ea typeface="Trebuchet MS" pitchFamily="34" charset="-122"/>
                 <a:cs typeface="Trebuchet MS" pitchFamily="34" charset="-120"/>
               </a:rPr>
-              <a:t>legal</a:t>
+              <a:t>legally</a:t>
             </a:r>
             <a:endParaRPr lang="en-US" sz="2800" dirty="0"/>
           </a:p>
@@ -12492,7 +12492,7 @@
         </p:nvSpPr>
         <p:spPr>
           <a:xfrm>
-            <a:off x="4370832" y="2258568"/>
+            <a:off x="2938272" y="2258568"/>
             <a:ext cx="1828800" cy="292608"/>
           </a:xfrm>
           <a:prstGeom prst="rect">
@@ -12526,7 +12526,7 @@
         </p:nvSpPr>
         <p:spPr>
           <a:xfrm>
-            <a:off x="4370832" y="2258568"/>
+            <a:off x="2938272" y="2258568"/>
             <a:ext cx="1828800" cy="292608"/>
           </a:xfrm>
           <a:prstGeom prst="rect">
@@ -12565,7 +12565,7 @@
         </p:nvSpPr>
         <p:spPr>
           <a:xfrm>
-            <a:off x="4370832" y="2569464"/>
+            <a:off x="2938272" y="2569464"/>
             <a:ext cx="1828800" cy="201168"/>
           </a:xfrm>
           <a:prstGeom prst="rect">
@@ -12604,6 +12604,118 @@
         </p:nvSpPr>
         <p:spPr>
           <a:xfrm>
+            <a:off x="5803392" y="2258568"/>
+            <a:ext cx="1828800" cy="292608"/>
+          </a:xfrm>
+          <a:prstGeom prst="rect">
+            <a:avLst>
+              <a:gd name="adj" fmla="val 25000"/>
+            </a:avLst>
+          </a:prstGeom>
+          <a:solidFill>
+            <a:srgbClr val="FCE7F3"/>
+          </a:solidFill>
+          <a:ln w="19050">
+            <a:solidFill>
+              <a:srgbClr val="DB2777"/>
+            </a:solidFill>
+            <a:prstDash val="solid"/>
+          </a:ln>
+          <a:effectLst>
+            <a:outerShdw sx="100000" sy="100000" kx="0" ky="0" algn="bl" rotWithShape="0" blurRad="101600" dist="38100" dir="8100000">
+              <a:srgbClr val="000000">
+                <a:alpha val="12000"/>
+              </a:srgbClr>
+            </a:outerShdw>
+          </a:effectLst>
+        </p:spPr>
+      </p:sp>
+      <p:sp>
+        <p:nvSpPr>
+          <p:cNvPr id="20" name="Text 18"/>
+          <p:cNvSpPr/>
+          <p:nvPr/>
+        </p:nvSpPr>
+        <p:spPr>
+          <a:xfrm>
+            <a:off x="5803392" y="2258568"/>
+            <a:ext cx="1828800" cy="292608"/>
+          </a:xfrm>
+          <a:prstGeom prst="rect">
+            <a:avLst/>
+          </a:prstGeom>
+          <a:noFill/>
+          <a:ln/>
+        </p:spPr>
+        <p:txBody>
+          <a:bodyPr wrap="square" lIns="0" tIns="0" rIns="0" bIns="0" rtlCol="0" anchor="ctr"/>
+          <a:lstStyle/>
+          <a:p>
+            <a:pPr algn="ctr" indent="0" marL="0">
+              <a:buNone/>
+            </a:pPr>
+            <a:r>
+              <a:rPr lang="en-US" sz="1300" b="1" dirty="0">
+                <a:solidFill>
+                  <a:srgbClr val="9D174D"/>
+                </a:solidFill>
+                <a:latin typeface="Trebuchet MS" pitchFamily="34" charset="0"/>
+                <a:ea typeface="Trebuchet MS" pitchFamily="34" charset="-122"/>
+                <a:cs typeface="Trebuchet MS" pitchFamily="34" charset="-120"/>
+              </a:rPr>
+              <a:t>ly</a:t>
+            </a:r>
+            <a:endParaRPr lang="en-US" sz="1300" dirty="0"/>
+          </a:p>
+        </p:txBody>
+      </p:sp>
+      <p:sp>
+        <p:nvSpPr>
+          <p:cNvPr id="21" name="Text 19"/>
+          <p:cNvSpPr/>
+          <p:nvPr/>
+        </p:nvSpPr>
+        <p:spPr>
+          <a:xfrm>
+            <a:off x="5803392" y="2569464"/>
+            <a:ext cx="1828800" cy="201168"/>
+          </a:xfrm>
+          <a:prstGeom prst="rect">
+            <a:avLst/>
+          </a:prstGeom>
+          <a:noFill/>
+          <a:ln/>
+        </p:spPr>
+        <p:txBody>
+          <a:bodyPr wrap="square" lIns="0" tIns="0" rIns="0" bIns="0" rtlCol="0" anchor="t"/>
+          <a:lstStyle/>
+          <a:p>
+            <a:pPr algn="ctr" indent="0" marL="0">
+              <a:buNone/>
+            </a:pPr>
+            <a:r>
+              <a:rPr lang="en-US" sz="850" dirty="0">
+                <a:solidFill>
+                  <a:srgbClr val="475569"/>
+                </a:solidFill>
+                <a:latin typeface="Calibri" pitchFamily="34" charset="0"/>
+                <a:ea typeface="Calibri" pitchFamily="34" charset="-122"/>
+                <a:cs typeface="Calibri" pitchFamily="34" charset="-120"/>
+              </a:rPr>
+              <a:t>in a certain way</a:t>
+            </a:r>
+            <a:endParaRPr lang="en-US" sz="850" dirty="0"/>
+          </a:p>
+        </p:txBody>
+      </p:sp>
+      <p:sp>
+        <p:nvSpPr>
+          <p:cNvPr id="22" name="Shape 20"/>
+          <p:cNvSpPr/>
+          <p:nvPr/>
+        </p:nvSpPr>
+        <p:spPr>
+          <a:xfrm>
             <a:off x="365760" y="3273552"/>
             <a:ext cx="1371600" cy="658368"/>
           </a:xfrm>
@@ -12625,7 +12737,7 @@
       </p:sp>
       <p:sp>
         <p:nvSpPr>
-          <p:cNvPr id="20" name="Text 18"/>
+          <p:cNvPr id="23" name="Text 21"/>
           <p:cNvSpPr/>
           <p:nvPr/>
         </p:nvSpPr>
@@ -12664,7 +12776,7 @@
       </p:sp>
       <p:sp>
         <p:nvSpPr>
-          <p:cNvPr id="21" name="Shape 19"/>
+          <p:cNvPr id="24" name="Shape 22"/>
           <p:cNvSpPr/>
           <p:nvPr/>
         </p:nvSpPr>
@@ -12691,7 +12803,7 @@
       </p:sp>
       <p:sp>
         <p:nvSpPr>
-          <p:cNvPr id="22" name="Text 20"/>
+          <p:cNvPr id="25" name="Text 23"/>
           <p:cNvSpPr/>
           <p:nvPr/>
         </p:nvSpPr>
@@ -12730,7 +12842,7 @@
       </p:sp>
       <p:sp>
         <p:nvSpPr>
-          <p:cNvPr id="23" name="Shape 21"/>
+          <p:cNvPr id="26" name="Shape 24"/>
           <p:cNvSpPr/>
           <p:nvPr/>
         </p:nvSpPr>
@@ -12757,7 +12869,7 @@
       </p:sp>
       <p:sp>
         <p:nvSpPr>
-          <p:cNvPr id="24" name="Text 22"/>
+          <p:cNvPr id="27" name="Text 25"/>
           <p:cNvSpPr/>
           <p:nvPr/>
         </p:nvSpPr>
@@ -12796,7 +12908,7 @@
       </p:sp>
       <p:sp>
         <p:nvSpPr>
-          <p:cNvPr id="25" name="Shape 23"/>
+          <p:cNvPr id="28" name="Shape 26"/>
           <p:cNvSpPr/>
           <p:nvPr/>
         </p:nvSpPr>
@@ -12823,7 +12935,7 @@
       </p:sp>
       <p:sp>
         <p:nvSpPr>
-          <p:cNvPr id="26" name="Text 24"/>
+          <p:cNvPr id="29" name="Text 27"/>
           <p:cNvSpPr/>
           <p:nvPr/>
         </p:nvSpPr>
@@ -13285,7 +13397,7 @@
                 <a:ea typeface="Trebuchet MS" pitchFamily="34" charset="-122"/>
                 <a:cs typeface="Trebuchet MS" pitchFamily="34" charset="-120"/>
               </a:rPr>
-              <a:t>legal</a:t>
+              <a:t>legally</a:t>
             </a:r>
             <a:endParaRPr lang="en-US" sz="2800" dirty="0"/>
           </a:p>
@@ -13365,7 +13477,7 @@
         </p:nvSpPr>
         <p:spPr>
           <a:xfrm>
-            <a:off x="4370832" y="2258568"/>
+            <a:off x="2938272" y="2258568"/>
             <a:ext cx="1828800" cy="292608"/>
           </a:xfrm>
           <a:prstGeom prst="rect">
@@ -13399,7 +13511,7 @@
         </p:nvSpPr>
         <p:spPr>
           <a:xfrm>
-            <a:off x="4370832" y="2258568"/>
+            <a:off x="2938272" y="2258568"/>
             <a:ext cx="1828800" cy="292608"/>
           </a:xfrm>
           <a:prstGeom prst="rect">
@@ -13438,7 +13550,7 @@
         </p:nvSpPr>
         <p:spPr>
           <a:xfrm>
-            <a:off x="4370832" y="2569464"/>
+            <a:off x="2938272" y="2569464"/>
             <a:ext cx="1828800" cy="201168"/>
           </a:xfrm>
           <a:prstGeom prst="rect">
@@ -13477,6 +13589,118 @@
         </p:nvSpPr>
         <p:spPr>
           <a:xfrm>
+            <a:off x="5803392" y="2258568"/>
+            <a:ext cx="1828800" cy="292608"/>
+          </a:xfrm>
+          <a:prstGeom prst="rect">
+            <a:avLst>
+              <a:gd name="adj" fmla="val 25000"/>
+            </a:avLst>
+          </a:prstGeom>
+          <a:solidFill>
+            <a:srgbClr val="FCE7F3"/>
+          </a:solidFill>
+          <a:ln w="19050">
+            <a:solidFill>
+              <a:srgbClr val="DB2777"/>
+            </a:solidFill>
+            <a:prstDash val="solid"/>
+          </a:ln>
+          <a:effectLst>
+            <a:outerShdw sx="100000" sy="100000" kx="0" ky="0" algn="bl" rotWithShape="0" blurRad="101600" dist="38100" dir="8100000">
+              <a:srgbClr val="000000">
+                <a:alpha val="12000"/>
+              </a:srgbClr>
+            </a:outerShdw>
+          </a:effectLst>
+        </p:spPr>
+      </p:sp>
+      <p:sp>
+        <p:nvSpPr>
+          <p:cNvPr id="20" name="Text 18"/>
+          <p:cNvSpPr/>
+          <p:nvPr/>
+        </p:nvSpPr>
+        <p:spPr>
+          <a:xfrm>
+            <a:off x="5803392" y="2258568"/>
+            <a:ext cx="1828800" cy="292608"/>
+          </a:xfrm>
+          <a:prstGeom prst="rect">
+            <a:avLst/>
+          </a:prstGeom>
+          <a:noFill/>
+          <a:ln/>
+        </p:spPr>
+        <p:txBody>
+          <a:bodyPr wrap="square" lIns="0" tIns="0" rIns="0" bIns="0" rtlCol="0" anchor="ctr"/>
+          <a:lstStyle/>
+          <a:p>
+            <a:pPr algn="ctr" indent="0" marL="0">
+              <a:buNone/>
+            </a:pPr>
+            <a:r>
+              <a:rPr lang="en-US" sz="1300" b="1" dirty="0">
+                <a:solidFill>
+                  <a:srgbClr val="9D174D"/>
+                </a:solidFill>
+                <a:latin typeface="Trebuchet MS" pitchFamily="34" charset="0"/>
+                <a:ea typeface="Trebuchet MS" pitchFamily="34" charset="-122"/>
+                <a:cs typeface="Trebuchet MS" pitchFamily="34" charset="-120"/>
+              </a:rPr>
+              <a:t>ly</a:t>
+            </a:r>
+            <a:endParaRPr lang="en-US" sz="1300" dirty="0"/>
+          </a:p>
+        </p:txBody>
+      </p:sp>
+      <p:sp>
+        <p:nvSpPr>
+          <p:cNvPr id="21" name="Text 19"/>
+          <p:cNvSpPr/>
+          <p:nvPr/>
+        </p:nvSpPr>
+        <p:spPr>
+          <a:xfrm>
+            <a:off x="5803392" y="2569464"/>
+            <a:ext cx="1828800" cy="201168"/>
+          </a:xfrm>
+          <a:prstGeom prst="rect">
+            <a:avLst/>
+          </a:prstGeom>
+          <a:noFill/>
+          <a:ln/>
+        </p:spPr>
+        <p:txBody>
+          <a:bodyPr wrap="square" lIns="0" tIns="0" rIns="0" bIns="0" rtlCol="0" anchor="t"/>
+          <a:lstStyle/>
+          <a:p>
+            <a:pPr algn="ctr" indent="0" marL="0">
+              <a:buNone/>
+            </a:pPr>
+            <a:r>
+              <a:rPr lang="en-US" sz="850" dirty="0">
+                <a:solidFill>
+                  <a:srgbClr val="475569"/>
+                </a:solidFill>
+                <a:latin typeface="Calibri" pitchFamily="34" charset="0"/>
+                <a:ea typeface="Calibri" pitchFamily="34" charset="-122"/>
+                <a:cs typeface="Calibri" pitchFamily="34" charset="-120"/>
+              </a:rPr>
+              <a:t>in a certain way</a:t>
+            </a:r>
+            <a:endParaRPr lang="en-US" sz="850" dirty="0"/>
+          </a:p>
+        </p:txBody>
+      </p:sp>
+      <p:sp>
+        <p:nvSpPr>
+          <p:cNvPr id="22" name="Shape 20"/>
+          <p:cNvSpPr/>
+          <p:nvPr/>
+        </p:nvSpPr>
+        <p:spPr>
+          <a:xfrm>
             <a:off x="365760" y="3273552"/>
             <a:ext cx="1371600" cy="658368"/>
           </a:xfrm>
@@ -13498,7 +13722,7 @@
       </p:sp>
       <p:sp>
         <p:nvSpPr>
-          <p:cNvPr id="20" name="Text 18"/>
+          <p:cNvPr id="23" name="Text 21"/>
           <p:cNvSpPr/>
           <p:nvPr/>
         </p:nvSpPr>
@@ -13537,7 +13761,7 @@
       </p:sp>
       <p:sp>
         <p:nvSpPr>
-          <p:cNvPr id="21" name="Shape 19"/>
+          <p:cNvPr id="24" name="Shape 22"/>
           <p:cNvSpPr/>
           <p:nvPr/>
         </p:nvSpPr>
@@ -13564,13 +13788,13 @@
       </p:sp>
       <p:sp>
         <p:nvSpPr>
-          <p:cNvPr id="22" name="Shape 20"/>
-          <p:cNvSpPr/>
-          <p:nvPr/>
-        </p:nvSpPr>
-        <p:spPr>
-          <a:xfrm>
-            <a:off x="2999232" y="3364992"/>
+          <p:cNvPr id="25" name="Shape 23"/>
+          <p:cNvSpPr/>
+          <p:nvPr/>
+        </p:nvSpPr>
+        <p:spPr>
+          <a:xfrm>
+            <a:off x="2313432" y="3364992"/>
             <a:ext cx="1645920" cy="475488"/>
           </a:xfrm>
           <a:prstGeom prst="rect">
@@ -13591,13 +13815,13 @@
       </p:sp>
       <p:sp>
         <p:nvSpPr>
-          <p:cNvPr id="23" name="Text 21"/>
-          <p:cNvSpPr/>
-          <p:nvPr/>
-        </p:nvSpPr>
-        <p:spPr>
-          <a:xfrm>
-            <a:off x="2999232" y="3364992"/>
+          <p:cNvPr id="26" name="Text 24"/>
+          <p:cNvSpPr/>
+          <p:nvPr/>
+        </p:nvSpPr>
+        <p:spPr>
+          <a:xfrm>
+            <a:off x="2313432" y="3364992"/>
             <a:ext cx="1645920" cy="475488"/>
           </a:xfrm>
           <a:prstGeom prst="rect">
@@ -13630,14 +13854,14 @@
       </p:sp>
       <p:sp>
         <p:nvSpPr>
-          <p:cNvPr id="24" name="Text 22"/>
-          <p:cNvSpPr/>
-          <p:nvPr/>
-        </p:nvSpPr>
-        <p:spPr>
-          <a:xfrm>
-            <a:off x="4645152" y="3364992"/>
-            <a:ext cx="1097280" cy="475488"/>
+          <p:cNvPr id="27" name="Text 25"/>
+          <p:cNvSpPr/>
+          <p:nvPr/>
+        </p:nvSpPr>
+        <p:spPr>
+          <a:xfrm>
+            <a:off x="3959352" y="3364992"/>
+            <a:ext cx="411480" cy="475488"/>
           </a:xfrm>
           <a:prstGeom prst="rect">
             <a:avLst/>
@@ -13669,13 +13893,13 @@
       </p:sp>
       <p:sp>
         <p:nvSpPr>
-          <p:cNvPr id="25" name="Shape 23"/>
-          <p:cNvSpPr/>
-          <p:nvPr/>
-        </p:nvSpPr>
-        <p:spPr>
-          <a:xfrm>
-            <a:off x="5742432" y="3364992"/>
+          <p:cNvPr id="28" name="Shape 26"/>
+          <p:cNvSpPr/>
+          <p:nvPr/>
+        </p:nvSpPr>
+        <p:spPr>
+          <a:xfrm>
+            <a:off x="4370832" y="3364992"/>
             <a:ext cx="1645920" cy="475488"/>
           </a:xfrm>
           <a:prstGeom prst="rect">
@@ -13696,13 +13920,13 @@
       </p:sp>
       <p:sp>
         <p:nvSpPr>
-          <p:cNvPr id="26" name="Text 24"/>
-          <p:cNvSpPr/>
-          <p:nvPr/>
-        </p:nvSpPr>
-        <p:spPr>
-          <a:xfrm>
-            <a:off x="5742432" y="3364992"/>
+          <p:cNvPr id="29" name="Text 27"/>
+          <p:cNvSpPr/>
+          <p:nvPr/>
+        </p:nvSpPr>
+        <p:spPr>
+          <a:xfrm>
+            <a:off x="4370832" y="3364992"/>
             <a:ext cx="1645920" cy="475488"/>
           </a:xfrm>
           <a:prstGeom prst="rect">
@@ -13735,7 +13959,112 @@
       </p:sp>
       <p:sp>
         <p:nvSpPr>
-          <p:cNvPr id="27" name="Shape 25"/>
+          <p:cNvPr id="30" name="Text 28"/>
+          <p:cNvSpPr/>
+          <p:nvPr/>
+        </p:nvSpPr>
+        <p:spPr>
+          <a:xfrm>
+            <a:off x="6016752" y="3364992"/>
+            <a:ext cx="411480" cy="475488"/>
+          </a:xfrm>
+          <a:prstGeom prst="rect">
+            <a:avLst/>
+          </a:prstGeom>
+          <a:noFill/>
+          <a:ln/>
+        </p:spPr>
+        <p:txBody>
+          <a:bodyPr wrap="square" lIns="0" tIns="0" rIns="0" bIns="0" rtlCol="0" anchor="ctr"/>
+          <a:lstStyle/>
+          <a:p>
+            <a:pPr algn="ctr" indent="0" marL="0">
+              <a:buNone/>
+            </a:pPr>
+            <a:r>
+              <a:rPr lang="en-US" sz="1600" b="1" dirty="0">
+                <a:solidFill>
+                  <a:srgbClr val="0D9488"/>
+                </a:solidFill>
+                <a:latin typeface="Trebuchet MS" pitchFamily="34" charset="0"/>
+                <a:ea typeface="Trebuchet MS" pitchFamily="34" charset="-122"/>
+                <a:cs typeface="Trebuchet MS" pitchFamily="34" charset="-120"/>
+              </a:rPr>
+              <a:t>·</a:t>
+            </a:r>
+            <a:endParaRPr lang="en-US" sz="1600" dirty="0"/>
+          </a:p>
+        </p:txBody>
+      </p:sp>
+      <p:sp>
+        <p:nvSpPr>
+          <p:cNvPr id="31" name="Shape 29"/>
+          <p:cNvSpPr/>
+          <p:nvPr/>
+        </p:nvSpPr>
+        <p:spPr>
+          <a:xfrm>
+            <a:off x="6428232" y="3364992"/>
+            <a:ext cx="1645920" cy="475488"/>
+          </a:xfrm>
+          <a:prstGeom prst="rect">
+            <a:avLst>
+              <a:gd name="adj" fmla="val 9615"/>
+            </a:avLst>
+          </a:prstGeom>
+          <a:solidFill>
+            <a:srgbClr val="FFFFFF"/>
+          </a:solidFill>
+          <a:ln w="12700">
+            <a:solidFill>
+              <a:srgbClr val="0D9488"/>
+            </a:solidFill>
+            <a:prstDash val="solid"/>
+          </a:ln>
+        </p:spPr>
+      </p:sp>
+      <p:sp>
+        <p:nvSpPr>
+          <p:cNvPr id="32" name="Text 30"/>
+          <p:cNvSpPr/>
+          <p:nvPr/>
+        </p:nvSpPr>
+        <p:spPr>
+          <a:xfrm>
+            <a:off x="6428232" y="3364992"/>
+            <a:ext cx="1645920" cy="475488"/>
+          </a:xfrm>
+          <a:prstGeom prst="rect">
+            <a:avLst/>
+          </a:prstGeom>
+          <a:noFill/>
+          <a:ln/>
+        </p:spPr>
+        <p:txBody>
+          <a:bodyPr wrap="square" lIns="0" tIns="0" rIns="0" bIns="0" rtlCol="0" anchor="ctr"/>
+          <a:lstStyle/>
+          <a:p>
+            <a:pPr algn="ctr" indent="0" marL="0">
+              <a:buNone/>
+            </a:pPr>
+            <a:r>
+              <a:rPr lang="en-US" sz="1400" b="1" dirty="0">
+                <a:solidFill>
+                  <a:srgbClr val="0D9488"/>
+                </a:solidFill>
+                <a:latin typeface="Trebuchet MS" pitchFamily="34" charset="0"/>
+                <a:ea typeface="Trebuchet MS" pitchFamily="34" charset="-122"/>
+                <a:cs typeface="Trebuchet MS" pitchFamily="34" charset="-120"/>
+              </a:rPr>
+              <a:t>ly</a:t>
+            </a:r>
+            <a:endParaRPr lang="en-US" sz="1400" dirty="0"/>
+          </a:p>
+        </p:txBody>
+      </p:sp>
+      <p:sp>
+        <p:nvSpPr>
+          <p:cNvPr id="33" name="Shape 31"/>
           <p:cNvSpPr/>
           <p:nvPr/>
         </p:nvSpPr>
@@ -13762,7 +14091,7 @@
       </p:sp>
       <p:sp>
         <p:nvSpPr>
-          <p:cNvPr id="28" name="Text 26"/>
+          <p:cNvPr id="34" name="Text 32"/>
           <p:cNvSpPr/>
           <p:nvPr/>
         </p:nvSpPr>
@@ -13801,7 +14130,7 @@
       </p:sp>
       <p:sp>
         <p:nvSpPr>
-          <p:cNvPr id="29" name="Shape 27"/>
+          <p:cNvPr id="35" name="Shape 33"/>
           <p:cNvSpPr/>
           <p:nvPr/>
         </p:nvSpPr>
@@ -13828,7 +14157,7 @@
       </p:sp>
       <p:sp>
         <p:nvSpPr>
-          <p:cNvPr id="30" name="Text 28"/>
+          <p:cNvPr id="36" name="Text 34"/>
           <p:cNvSpPr/>
           <p:nvPr/>
         </p:nvSpPr>
@@ -14555,7 +14884,7 @@
                 <a:ea typeface="Trebuchet MS" pitchFamily="34" charset="-122"/>
                 <a:cs typeface="Trebuchet MS" pitchFamily="34" charset="-120"/>
               </a:rPr>
-              <a:t>legal</a:t>
+              <a:t>legally</a:t>
             </a:r>
             <a:endParaRPr lang="en-US" sz="2800" dirty="0"/>
           </a:p>
@@ -14635,7 +14964,7 @@
         </p:nvSpPr>
         <p:spPr>
           <a:xfrm>
-            <a:off x="4370832" y="2258568"/>
+            <a:off x="2938272" y="2258568"/>
             <a:ext cx="1828800" cy="292608"/>
           </a:xfrm>
           <a:prstGeom prst="rect">
@@ -14669,7 +14998,7 @@
         </p:nvSpPr>
         <p:spPr>
           <a:xfrm>
-            <a:off x="4370832" y="2258568"/>
+            <a:off x="2938272" y="2258568"/>
             <a:ext cx="1828800" cy="292608"/>
           </a:xfrm>
           <a:prstGeom prst="rect">
@@ -14708,7 +15037,7 @@
         </p:nvSpPr>
         <p:spPr>
           <a:xfrm>
-            <a:off x="4370832" y="2569464"/>
+            <a:off x="2938272" y="2569464"/>
             <a:ext cx="1828800" cy="201168"/>
           </a:xfrm>
           <a:prstGeom prst="rect">
@@ -14747,6 +15076,118 @@
         </p:nvSpPr>
         <p:spPr>
           <a:xfrm>
+            <a:off x="5803392" y="2258568"/>
+            <a:ext cx="1828800" cy="292608"/>
+          </a:xfrm>
+          <a:prstGeom prst="rect">
+            <a:avLst>
+              <a:gd name="adj" fmla="val 25000"/>
+            </a:avLst>
+          </a:prstGeom>
+          <a:solidFill>
+            <a:srgbClr val="FCE7F3"/>
+          </a:solidFill>
+          <a:ln w="19050">
+            <a:solidFill>
+              <a:srgbClr val="DB2777"/>
+            </a:solidFill>
+            <a:prstDash val="solid"/>
+          </a:ln>
+          <a:effectLst>
+            <a:outerShdw sx="100000" sy="100000" kx="0" ky="0" algn="bl" rotWithShape="0" blurRad="101600" dist="38100" dir="8100000">
+              <a:srgbClr val="000000">
+                <a:alpha val="12000"/>
+              </a:srgbClr>
+            </a:outerShdw>
+          </a:effectLst>
+        </p:spPr>
+      </p:sp>
+      <p:sp>
+        <p:nvSpPr>
+          <p:cNvPr id="20" name="Text 18"/>
+          <p:cNvSpPr/>
+          <p:nvPr/>
+        </p:nvSpPr>
+        <p:spPr>
+          <a:xfrm>
+            <a:off x="5803392" y="2258568"/>
+            <a:ext cx="1828800" cy="292608"/>
+          </a:xfrm>
+          <a:prstGeom prst="rect">
+            <a:avLst/>
+          </a:prstGeom>
+          <a:noFill/>
+          <a:ln/>
+        </p:spPr>
+        <p:txBody>
+          <a:bodyPr wrap="square" lIns="0" tIns="0" rIns="0" bIns="0" rtlCol="0" anchor="ctr"/>
+          <a:lstStyle/>
+          <a:p>
+            <a:pPr algn="ctr" indent="0" marL="0">
+              <a:buNone/>
+            </a:pPr>
+            <a:r>
+              <a:rPr lang="en-US" sz="1300" b="1" dirty="0">
+                <a:solidFill>
+                  <a:srgbClr val="9D174D"/>
+                </a:solidFill>
+                <a:latin typeface="Trebuchet MS" pitchFamily="34" charset="0"/>
+                <a:ea typeface="Trebuchet MS" pitchFamily="34" charset="-122"/>
+                <a:cs typeface="Trebuchet MS" pitchFamily="34" charset="-120"/>
+              </a:rPr>
+              <a:t>ly</a:t>
+            </a:r>
+            <a:endParaRPr lang="en-US" sz="1300" dirty="0"/>
+          </a:p>
+        </p:txBody>
+      </p:sp>
+      <p:sp>
+        <p:nvSpPr>
+          <p:cNvPr id="21" name="Text 19"/>
+          <p:cNvSpPr/>
+          <p:nvPr/>
+        </p:nvSpPr>
+        <p:spPr>
+          <a:xfrm>
+            <a:off x="5803392" y="2569464"/>
+            <a:ext cx="1828800" cy="201168"/>
+          </a:xfrm>
+          <a:prstGeom prst="rect">
+            <a:avLst/>
+          </a:prstGeom>
+          <a:noFill/>
+          <a:ln/>
+        </p:spPr>
+        <p:txBody>
+          <a:bodyPr wrap="square" lIns="0" tIns="0" rIns="0" bIns="0" rtlCol="0" anchor="t"/>
+          <a:lstStyle/>
+          <a:p>
+            <a:pPr algn="ctr" indent="0" marL="0">
+              <a:buNone/>
+            </a:pPr>
+            <a:r>
+              <a:rPr lang="en-US" sz="850" dirty="0">
+                <a:solidFill>
+                  <a:srgbClr val="475569"/>
+                </a:solidFill>
+                <a:latin typeface="Calibri" pitchFamily="34" charset="0"/>
+                <a:ea typeface="Calibri" pitchFamily="34" charset="-122"/>
+                <a:cs typeface="Calibri" pitchFamily="34" charset="-120"/>
+              </a:rPr>
+              <a:t>in a certain way</a:t>
+            </a:r>
+            <a:endParaRPr lang="en-US" sz="850" dirty="0"/>
+          </a:p>
+        </p:txBody>
+      </p:sp>
+      <p:sp>
+        <p:nvSpPr>
+          <p:cNvPr id="22" name="Shape 20"/>
+          <p:cNvSpPr/>
+          <p:nvPr/>
+        </p:nvSpPr>
+        <p:spPr>
+          <a:xfrm>
             <a:off x="365760" y="3273552"/>
             <a:ext cx="1371600" cy="658368"/>
           </a:xfrm>
@@ -14768,7 +15209,7 @@
       </p:sp>
       <p:sp>
         <p:nvSpPr>
-          <p:cNvPr id="20" name="Text 18"/>
+          <p:cNvPr id="23" name="Text 21"/>
           <p:cNvSpPr/>
           <p:nvPr/>
         </p:nvSpPr>
@@ -14807,7 +15248,7 @@
       </p:sp>
       <p:sp>
         <p:nvSpPr>
-          <p:cNvPr id="21" name="Shape 19"/>
+          <p:cNvPr id="24" name="Shape 22"/>
           <p:cNvSpPr/>
           <p:nvPr/>
         </p:nvSpPr>
@@ -14834,13 +15275,13 @@
       </p:sp>
       <p:sp>
         <p:nvSpPr>
-          <p:cNvPr id="22" name="Shape 20"/>
-          <p:cNvSpPr/>
-          <p:nvPr/>
-        </p:nvSpPr>
-        <p:spPr>
-          <a:xfrm>
-            <a:off x="2999232" y="3364992"/>
+          <p:cNvPr id="25" name="Shape 23"/>
+          <p:cNvSpPr/>
+          <p:nvPr/>
+        </p:nvSpPr>
+        <p:spPr>
+          <a:xfrm>
+            <a:off x="2313432" y="3364992"/>
             <a:ext cx="1645920" cy="475488"/>
           </a:xfrm>
           <a:prstGeom prst="rect">
@@ -14861,13 +15302,13 @@
       </p:sp>
       <p:sp>
         <p:nvSpPr>
-          <p:cNvPr id="23" name="Text 21"/>
-          <p:cNvSpPr/>
-          <p:nvPr/>
-        </p:nvSpPr>
-        <p:spPr>
-          <a:xfrm>
-            <a:off x="2999232" y="3364992"/>
+          <p:cNvPr id="26" name="Text 24"/>
+          <p:cNvSpPr/>
+          <p:nvPr/>
+        </p:nvSpPr>
+        <p:spPr>
+          <a:xfrm>
+            <a:off x="2313432" y="3364992"/>
             <a:ext cx="1645920" cy="475488"/>
           </a:xfrm>
           <a:prstGeom prst="rect">
@@ -14900,14 +15341,14 @@
       </p:sp>
       <p:sp>
         <p:nvSpPr>
-          <p:cNvPr id="24" name="Text 22"/>
-          <p:cNvSpPr/>
-          <p:nvPr/>
-        </p:nvSpPr>
-        <p:spPr>
-          <a:xfrm>
-            <a:off x="4645152" y="3364992"/>
-            <a:ext cx="1097280" cy="475488"/>
+          <p:cNvPr id="27" name="Text 25"/>
+          <p:cNvSpPr/>
+          <p:nvPr/>
+        </p:nvSpPr>
+        <p:spPr>
+          <a:xfrm>
+            <a:off x="3959352" y="3364992"/>
+            <a:ext cx="411480" cy="475488"/>
           </a:xfrm>
           <a:prstGeom prst="rect">
             <a:avLst/>
@@ -14939,13 +15380,13 @@
       </p:sp>
       <p:sp>
         <p:nvSpPr>
-          <p:cNvPr id="25" name="Shape 23"/>
-          <p:cNvSpPr/>
-          <p:nvPr/>
-        </p:nvSpPr>
-        <p:spPr>
-          <a:xfrm>
-            <a:off x="5742432" y="3364992"/>
+          <p:cNvPr id="28" name="Shape 26"/>
+          <p:cNvSpPr/>
+          <p:nvPr/>
+        </p:nvSpPr>
+        <p:spPr>
+          <a:xfrm>
+            <a:off x="4370832" y="3364992"/>
             <a:ext cx="1645920" cy="475488"/>
           </a:xfrm>
           <a:prstGeom prst="rect">
@@ -14966,13 +15407,13 @@
       </p:sp>
       <p:sp>
         <p:nvSpPr>
-          <p:cNvPr id="26" name="Text 24"/>
-          <p:cNvSpPr/>
-          <p:nvPr/>
-        </p:nvSpPr>
-        <p:spPr>
-          <a:xfrm>
-            <a:off x="5742432" y="3364992"/>
+          <p:cNvPr id="29" name="Text 27"/>
+          <p:cNvSpPr/>
+          <p:nvPr/>
+        </p:nvSpPr>
+        <p:spPr>
+          <a:xfrm>
+            <a:off x="4370832" y="3364992"/>
             <a:ext cx="1645920" cy="475488"/>
           </a:xfrm>
           <a:prstGeom prst="rect">
@@ -15005,7 +15446,112 @@
       </p:sp>
       <p:sp>
         <p:nvSpPr>
-          <p:cNvPr id="27" name="Shape 25"/>
+          <p:cNvPr id="30" name="Text 28"/>
+          <p:cNvSpPr/>
+          <p:nvPr/>
+        </p:nvSpPr>
+        <p:spPr>
+          <a:xfrm>
+            <a:off x="6016752" y="3364992"/>
+            <a:ext cx="411480" cy="475488"/>
+          </a:xfrm>
+          <a:prstGeom prst="rect">
+            <a:avLst/>
+          </a:prstGeom>
+          <a:noFill/>
+          <a:ln/>
+        </p:spPr>
+        <p:txBody>
+          <a:bodyPr wrap="square" lIns="0" tIns="0" rIns="0" bIns="0" rtlCol="0" anchor="ctr"/>
+          <a:lstStyle/>
+          <a:p>
+            <a:pPr algn="ctr" indent="0" marL="0">
+              <a:buNone/>
+            </a:pPr>
+            <a:r>
+              <a:rPr lang="en-US" sz="1600" b="1" dirty="0">
+                <a:solidFill>
+                  <a:srgbClr val="0D9488"/>
+                </a:solidFill>
+                <a:latin typeface="Trebuchet MS" pitchFamily="34" charset="0"/>
+                <a:ea typeface="Trebuchet MS" pitchFamily="34" charset="-122"/>
+                <a:cs typeface="Trebuchet MS" pitchFamily="34" charset="-120"/>
+              </a:rPr>
+              <a:t>·</a:t>
+            </a:r>
+            <a:endParaRPr lang="en-US" sz="1600" dirty="0"/>
+          </a:p>
+        </p:txBody>
+      </p:sp>
+      <p:sp>
+        <p:nvSpPr>
+          <p:cNvPr id="31" name="Shape 29"/>
+          <p:cNvSpPr/>
+          <p:nvPr/>
+        </p:nvSpPr>
+        <p:spPr>
+          <a:xfrm>
+            <a:off x="6428232" y="3364992"/>
+            <a:ext cx="1645920" cy="475488"/>
+          </a:xfrm>
+          <a:prstGeom prst="rect">
+            <a:avLst>
+              <a:gd name="adj" fmla="val 9615"/>
+            </a:avLst>
+          </a:prstGeom>
+          <a:solidFill>
+            <a:srgbClr val="FFFFFF"/>
+          </a:solidFill>
+          <a:ln w="12700">
+            <a:solidFill>
+              <a:srgbClr val="0D9488"/>
+            </a:solidFill>
+            <a:prstDash val="solid"/>
+          </a:ln>
+        </p:spPr>
+      </p:sp>
+      <p:sp>
+        <p:nvSpPr>
+          <p:cNvPr id="32" name="Text 30"/>
+          <p:cNvSpPr/>
+          <p:nvPr/>
+        </p:nvSpPr>
+        <p:spPr>
+          <a:xfrm>
+            <a:off x="6428232" y="3364992"/>
+            <a:ext cx="1645920" cy="475488"/>
+          </a:xfrm>
+          <a:prstGeom prst="rect">
+            <a:avLst/>
+          </a:prstGeom>
+          <a:noFill/>
+          <a:ln/>
+        </p:spPr>
+        <p:txBody>
+          <a:bodyPr wrap="square" lIns="0" tIns="0" rIns="0" bIns="0" rtlCol="0" anchor="ctr"/>
+          <a:lstStyle/>
+          <a:p>
+            <a:pPr algn="ctr" indent="0" marL="0">
+              <a:buNone/>
+            </a:pPr>
+            <a:r>
+              <a:rPr lang="en-US" sz="1400" b="1" dirty="0">
+                <a:solidFill>
+                  <a:srgbClr val="0D9488"/>
+                </a:solidFill>
+                <a:latin typeface="Trebuchet MS" pitchFamily="34" charset="0"/>
+                <a:ea typeface="Trebuchet MS" pitchFamily="34" charset="-122"/>
+                <a:cs typeface="Trebuchet MS" pitchFamily="34" charset="-120"/>
+              </a:rPr>
+              <a:t>ly</a:t>
+            </a:r>
+            <a:endParaRPr lang="en-US" sz="1400" dirty="0"/>
+          </a:p>
+        </p:txBody>
+      </p:sp>
+      <p:sp>
+        <p:nvSpPr>
+          <p:cNvPr id="33" name="Shape 31"/>
           <p:cNvSpPr/>
           <p:nvPr/>
         </p:nvSpPr>
@@ -15032,7 +15578,7 @@
       </p:sp>
       <p:sp>
         <p:nvSpPr>
-          <p:cNvPr id="28" name="Text 26"/>
+          <p:cNvPr id="34" name="Text 32"/>
           <p:cNvSpPr/>
           <p:nvPr/>
         </p:nvSpPr>
@@ -15071,7 +15617,7 @@
       </p:sp>
       <p:sp>
         <p:nvSpPr>
-          <p:cNvPr id="29" name="Shape 27"/>
+          <p:cNvPr id="35" name="Shape 33"/>
           <p:cNvSpPr/>
           <p:nvPr/>
         </p:nvSpPr>
@@ -15098,13 +15644,13 @@
       </p:sp>
       <p:sp>
         <p:nvSpPr>
-          <p:cNvPr id="30" name="Shape 28"/>
-          <p:cNvSpPr/>
-          <p:nvPr/>
-        </p:nvSpPr>
-        <p:spPr>
-          <a:xfrm>
-            <a:off x="2427732" y="4169664"/>
+          <p:cNvPr id="36" name="Shape 34"/>
+          <p:cNvSpPr/>
+          <p:nvPr/>
+        </p:nvSpPr>
+        <p:spPr>
+          <a:xfrm>
+            <a:off x="2254649" y="4169664"/>
             <a:ext cx="685800" cy="475488"/>
           </a:xfrm>
           <a:prstGeom prst="rect">
@@ -15125,13 +15671,13 @@
       </p:sp>
       <p:sp>
         <p:nvSpPr>
-          <p:cNvPr id="31" name="Text 29"/>
-          <p:cNvSpPr/>
-          <p:nvPr/>
-        </p:nvSpPr>
-        <p:spPr>
-          <a:xfrm>
-            <a:off x="2427732" y="4169664"/>
+          <p:cNvPr id="37" name="Text 35"/>
+          <p:cNvSpPr/>
+          <p:nvPr/>
+        </p:nvSpPr>
+        <p:spPr>
+          <a:xfrm>
+            <a:off x="2254649" y="4169664"/>
             <a:ext cx="685800" cy="475488"/>
           </a:xfrm>
           <a:prstGeom prst="rect">
@@ -15164,13 +15710,13 @@
       </p:sp>
       <p:sp>
         <p:nvSpPr>
-          <p:cNvPr id="32" name="Shape 30"/>
-          <p:cNvSpPr/>
-          <p:nvPr/>
-        </p:nvSpPr>
-        <p:spPr>
-          <a:xfrm>
-            <a:off x="3639312" y="4169664"/>
+          <p:cNvPr id="38" name="Shape 36"/>
+          <p:cNvSpPr/>
+          <p:nvPr/>
+        </p:nvSpPr>
+        <p:spPr>
+          <a:xfrm>
+            <a:off x="3293146" y="4169664"/>
             <a:ext cx="685800" cy="475488"/>
           </a:xfrm>
           <a:prstGeom prst="rect">
@@ -15191,13 +15737,13 @@
       </p:sp>
       <p:sp>
         <p:nvSpPr>
-          <p:cNvPr id="33" name="Text 31"/>
-          <p:cNvSpPr/>
-          <p:nvPr/>
-        </p:nvSpPr>
-        <p:spPr>
-          <a:xfrm>
-            <a:off x="3639312" y="4169664"/>
+          <p:cNvPr id="39" name="Text 37"/>
+          <p:cNvSpPr/>
+          <p:nvPr/>
+        </p:nvSpPr>
+        <p:spPr>
+          <a:xfrm>
+            <a:off x="3293146" y="4169664"/>
             <a:ext cx="685800" cy="475488"/>
           </a:xfrm>
           <a:prstGeom prst="rect">
@@ -15230,13 +15776,13 @@
       </p:sp>
       <p:sp>
         <p:nvSpPr>
-          <p:cNvPr id="34" name="Shape 32"/>
-          <p:cNvSpPr/>
-          <p:nvPr/>
-        </p:nvSpPr>
-        <p:spPr>
-          <a:xfrm>
-            <a:off x="4850892" y="4169664"/>
+          <p:cNvPr id="40" name="Shape 38"/>
+          <p:cNvSpPr/>
+          <p:nvPr/>
+        </p:nvSpPr>
+        <p:spPr>
+          <a:xfrm>
+            <a:off x="4331643" y="4169664"/>
             <a:ext cx="685800" cy="475488"/>
           </a:xfrm>
           <a:prstGeom prst="rect">
@@ -15257,13 +15803,13 @@
       </p:sp>
       <p:sp>
         <p:nvSpPr>
-          <p:cNvPr id="35" name="Text 33"/>
-          <p:cNvSpPr/>
-          <p:nvPr/>
-        </p:nvSpPr>
-        <p:spPr>
-          <a:xfrm>
-            <a:off x="4850892" y="4169664"/>
+          <p:cNvPr id="41" name="Text 39"/>
+          <p:cNvSpPr/>
+          <p:nvPr/>
+        </p:nvSpPr>
+        <p:spPr>
+          <a:xfrm>
+            <a:off x="4331643" y="4169664"/>
             <a:ext cx="685800" cy="475488"/>
           </a:xfrm>
           <a:prstGeom prst="rect">
@@ -15296,13 +15842,13 @@
       </p:sp>
       <p:sp>
         <p:nvSpPr>
-          <p:cNvPr id="36" name="Shape 34"/>
-          <p:cNvSpPr/>
-          <p:nvPr/>
-        </p:nvSpPr>
-        <p:spPr>
-          <a:xfrm>
-            <a:off x="6062472" y="4169664"/>
+          <p:cNvPr id="42" name="Shape 40"/>
+          <p:cNvSpPr/>
+          <p:nvPr/>
+        </p:nvSpPr>
+        <p:spPr>
+          <a:xfrm>
+            <a:off x="5370141" y="4169664"/>
             <a:ext cx="685800" cy="475488"/>
           </a:xfrm>
           <a:prstGeom prst="rect">
@@ -15323,13 +15869,13 @@
       </p:sp>
       <p:sp>
         <p:nvSpPr>
-          <p:cNvPr id="37" name="Text 35"/>
-          <p:cNvSpPr/>
-          <p:nvPr/>
-        </p:nvSpPr>
-        <p:spPr>
-          <a:xfrm>
-            <a:off x="6062472" y="4169664"/>
+          <p:cNvPr id="43" name="Text 41"/>
+          <p:cNvSpPr/>
+          <p:nvPr/>
+        </p:nvSpPr>
+        <p:spPr>
+          <a:xfrm>
+            <a:off x="5370141" y="4169664"/>
             <a:ext cx="685800" cy="475488"/>
           </a:xfrm>
           <a:prstGeom prst="rect">
@@ -15362,13 +15908,13 @@
       </p:sp>
       <p:sp>
         <p:nvSpPr>
-          <p:cNvPr id="38" name="Shape 36"/>
-          <p:cNvSpPr/>
-          <p:nvPr/>
-        </p:nvSpPr>
-        <p:spPr>
-          <a:xfrm>
-            <a:off x="7274052" y="4169664"/>
+          <p:cNvPr id="44" name="Shape 42"/>
+          <p:cNvSpPr/>
+          <p:nvPr/>
+        </p:nvSpPr>
+        <p:spPr>
+          <a:xfrm>
+            <a:off x="6408638" y="4169664"/>
             <a:ext cx="685800" cy="475488"/>
           </a:xfrm>
           <a:prstGeom prst="rect">
@@ -15389,13 +15935,13 @@
       </p:sp>
       <p:sp>
         <p:nvSpPr>
-          <p:cNvPr id="39" name="Text 37"/>
-          <p:cNvSpPr/>
-          <p:nvPr/>
-        </p:nvSpPr>
-        <p:spPr>
-          <a:xfrm>
-            <a:off x="7274052" y="4169664"/>
+          <p:cNvPr id="45" name="Text 43"/>
+          <p:cNvSpPr/>
+          <p:nvPr/>
+        </p:nvSpPr>
+        <p:spPr>
+          <a:xfrm>
+            <a:off x="6408638" y="4169664"/>
             <a:ext cx="685800" cy="475488"/>
           </a:xfrm>
           <a:prstGeom prst="rect">
@@ -15420,7 +15966,73 @@
                 <a:ea typeface="Trebuchet MS" pitchFamily="34" charset="-122"/>
                 <a:cs typeface="Trebuchet MS" pitchFamily="34" charset="-120"/>
               </a:rPr>
-              <a:t>l</a:t>
+              <a:t>ll</a:t>
+            </a:r>
+            <a:endParaRPr lang="en-US" sz="900" dirty="0"/>
+          </a:p>
+        </p:txBody>
+      </p:sp>
+      <p:sp>
+        <p:nvSpPr>
+          <p:cNvPr id="46" name="Shape 44"/>
+          <p:cNvSpPr/>
+          <p:nvPr/>
+        </p:nvSpPr>
+        <p:spPr>
+          <a:xfrm>
+            <a:off x="7447135" y="4169664"/>
+            <a:ext cx="685800" cy="475488"/>
+          </a:xfrm>
+          <a:prstGeom prst="rect">
+            <a:avLst>
+              <a:gd name="adj" fmla="val 7692"/>
+            </a:avLst>
+          </a:prstGeom>
+          <a:solidFill>
+            <a:srgbClr val="FFFFFF"/>
+          </a:solidFill>
+          <a:ln w="12700">
+            <a:solidFill>
+              <a:srgbClr val="DB2777"/>
+            </a:solidFill>
+            <a:prstDash val="solid"/>
+          </a:ln>
+        </p:spPr>
+      </p:sp>
+      <p:sp>
+        <p:nvSpPr>
+          <p:cNvPr id="47" name="Text 45"/>
+          <p:cNvSpPr/>
+          <p:nvPr/>
+        </p:nvSpPr>
+        <p:spPr>
+          <a:xfrm>
+            <a:off x="7447135" y="4169664"/>
+            <a:ext cx="685800" cy="475488"/>
+          </a:xfrm>
+          <a:prstGeom prst="rect">
+            <a:avLst/>
+          </a:prstGeom>
+          <a:noFill/>
+          <a:ln/>
+        </p:spPr>
+        <p:txBody>
+          <a:bodyPr wrap="square" lIns="0" tIns="0" rIns="0" bIns="0" rtlCol="0" anchor="ctr"/>
+          <a:lstStyle/>
+          <a:p>
+            <a:pPr algn="ctr" indent="0" marL="0">
+              <a:buNone/>
+            </a:pPr>
+            <a:r>
+              <a:rPr lang="en-US" sz="900" b="1" dirty="0">
+                <a:solidFill>
+                  <a:srgbClr val="9D174D"/>
+                </a:solidFill>
+                <a:latin typeface="Trebuchet MS" pitchFamily="34" charset="0"/>
+                <a:ea typeface="Trebuchet MS" pitchFamily="34" charset="-122"/>
+                <a:cs typeface="Trebuchet MS" pitchFamily="34" charset="-120"/>
+              </a:rPr>
+              <a:t>y</a:t>
             </a:r>
             <a:endParaRPr lang="en-US" sz="900" dirty="0"/>
           </a:p>
@@ -16777,7 +17389,7 @@
                 <a:ea typeface="Calibri" pitchFamily="34" charset="-122"/>
                 <a:cs typeface="Calibri" pitchFamily="34" charset="-120"/>
               </a:rPr>
-              <a:t> explained that it is </a:t>
+              <a:t> explained the </a:t>
             </a:r>
             <a:pPr algn="l" indent="0" marL="0">
               <a:buNone/>
@@ -16794,7 +17406,7 @@
                 <a:ea typeface="Calibri" pitchFamily="34" charset="-122"/>
                 <a:cs typeface="Calibri" pitchFamily="34" charset="-120"/>
               </a:rPr>
-              <a:t>illegal</a:t>
+              <a:t>legality</a:t>
             </a:r>
             <a:pPr algn="l" indent="0" marL="0">
               <a:buNone/>
@@ -16808,7 +17420,7 @@
                 <a:ea typeface="Calibri" pitchFamily="34" charset="-122"/>
                 <a:cs typeface="Calibri" pitchFamily="34" charset="-120"/>
               </a:rPr>
-              <a:t> to copy the document, but </a:t>
+              <a:t> of the plan, and the team agreed to </a:t>
             </a:r>
             <a:pPr algn="l" indent="0" marL="0">
               <a:buNone/>
@@ -16825,7 +17437,7 @@
                 <a:ea typeface="Calibri" pitchFamily="34" charset="-122"/>
                 <a:cs typeface="Calibri" pitchFamily="34" charset="-120"/>
               </a:rPr>
-              <a:t>legalisation</a:t>
+              <a:t>legalise</a:t>
             </a:r>
             <a:pPr algn="l" indent="0" marL="0">
               <a:buNone/>
@@ -16839,7 +17451,7 @@
                 <a:ea typeface="Calibri" pitchFamily="34" charset="-122"/>
                 <a:cs typeface="Calibri" pitchFamily="34" charset="-120"/>
               </a:rPr>
-              <a:t> of the process is possible.</a:t>
+              <a:t> it.</a:t>
             </a:r>
             <a:endParaRPr lang="en-US" sz="1800" dirty="0"/>
           </a:p>
@@ -17122,7 +17734,7 @@
                 <a:ea typeface="Trebuchet MS" pitchFamily="34" charset="-122"/>
                 <a:cs typeface="Trebuchet MS" pitchFamily="34" charset="-120"/>
               </a:rPr>
-              <a:t>illegal</a:t>
+              <a:t>legality</a:t>
             </a:r>
             <a:endParaRPr lang="en-US" sz="1400" dirty="0"/>
           </a:p>
@@ -17250,7 +17862,7 @@
                 <a:ea typeface="Trebuchet MS" pitchFamily="34" charset="-122"/>
                 <a:cs typeface="Trebuchet MS" pitchFamily="34" charset="-120"/>
               </a:rPr>
-              <a:t>legalisation</a:t>
+              <a:t>legalise</a:t>
             </a:r>
             <a:endParaRPr lang="en-US" sz="1400" dirty="0"/>
           </a:p>
@@ -18725,7 +19337,7 @@
                 <a:ea typeface="Calibri" pitchFamily="34" charset="-122"/>
                 <a:cs typeface="Calibri" pitchFamily="34" charset="-120"/>
               </a:rPr>
-              <a:t>beside or assisting</a:t>
+              <a:t>alongside or assisting</a:t>
             </a:r>
             <a:endParaRPr lang="en-US" sz="850" dirty="0"/>
           </a:p>
@@ -19710,7 +20322,7 @@
                 <a:ea typeface="Calibri" pitchFamily="34" charset="-122"/>
                 <a:cs typeface="Calibri" pitchFamily="34" charset="-120"/>
               </a:rPr>
-              <a:t>beside or assisting</a:t>
+              <a:t>alongside or assisting</a:t>
             </a:r>
             <a:endParaRPr lang="en-US" sz="850" dirty="0"/>
           </a:p>
@@ -21037,7 +21649,7 @@
                 <a:ea typeface="Calibri" pitchFamily="34" charset="-122"/>
                 <a:cs typeface="Calibri" pitchFamily="34" charset="-120"/>
               </a:rPr>
-              <a:t>beside or assisting</a:t>
+              <a:t>alongside or assisting</a:t>
             </a:r>
             <a:endParaRPr lang="en-US" sz="850" dirty="0"/>
           </a:p>
@@ -22675,7 +23287,7 @@
                 <a:ea typeface="Trebuchet MS" pitchFamily="34" charset="-122"/>
                 <a:cs typeface="Trebuchet MS" pitchFamily="34" charset="-120"/>
               </a:rPr>
-              <a:t>illegal</a:t>
+              <a:t>legality</a:t>
             </a:r>
             <a:endParaRPr lang="en-US" sz="2800" dirty="0"/>
           </a:p>
@@ -23502,7 +24114,7 @@
                 <a:ea typeface="Trebuchet MS" pitchFamily="34" charset="-122"/>
                 <a:cs typeface="Trebuchet MS" pitchFamily="34" charset="-120"/>
               </a:rPr>
-              <a:t>illegal</a:t>
+              <a:t>legality</a:t>
             </a:r>
             <a:endParaRPr lang="en-US" sz="2800" dirty="0"/>
           </a:p>
@@ -23591,11 +24203,11 @@
             </a:avLst>
           </a:prstGeom>
           <a:solidFill>
-            <a:srgbClr val="DDD6FE"/>
+            <a:srgbClr val="CCFBF1"/>
           </a:solidFill>
           <a:ln w="19050">
             <a:solidFill>
-              <a:srgbClr val="7C3AED"/>
+              <a:srgbClr val="0D9488"/>
             </a:solidFill>
             <a:prstDash val="solid"/>
           </a:ln>
@@ -23635,13 +24247,13 @@
             <a:r>
               <a:rPr lang="en-US" sz="1300" b="1" dirty="0">
                 <a:solidFill>
-                  <a:srgbClr val="4C1D95"/>
+                  <a:srgbClr val="0F766E"/>
                 </a:solidFill>
                 <a:latin typeface="Trebuchet MS" pitchFamily="34" charset="0"/>
                 <a:ea typeface="Trebuchet MS" pitchFamily="34" charset="-122"/>
                 <a:cs typeface="Trebuchet MS" pitchFamily="34" charset="-120"/>
               </a:rPr>
-              <a:t>il</a:t>
+              <a:t>legal</a:t>
             </a:r>
             <a:endParaRPr lang="en-US" sz="1300" dirty="0"/>
           </a:p>
@@ -23680,7 +24292,7 @@
                 <a:ea typeface="Calibri" pitchFamily="34" charset="-122"/>
                 <a:cs typeface="Calibri" pitchFamily="34" charset="-120"/>
               </a:rPr>
-              <a:t>not</a:t>
+              <a:t>relating to law</a:t>
             </a:r>
             <a:endParaRPr lang="en-US" sz="850" dirty="0"/>
           </a:p>
@@ -23688,46 +24300,7 @@
       </p:sp>
       <p:sp>
         <p:nvSpPr>
-          <p:cNvPr id="19" name="Text 17"/>
-          <p:cNvSpPr/>
-          <p:nvPr/>
-        </p:nvSpPr>
-        <p:spPr>
-          <a:xfrm>
-            <a:off x="2938272" y="2752344"/>
-            <a:ext cx="1828800" cy="182880"/>
-          </a:xfrm>
-          <a:prstGeom prst="rect">
-            <a:avLst/>
-          </a:prstGeom>
-          <a:noFill/>
-          <a:ln/>
-        </p:spPr>
-        <p:txBody>
-          <a:bodyPr wrap="square" lIns="0" tIns="0" rIns="0" bIns="0" rtlCol="0" anchor="t"/>
-          <a:lstStyle/>
-          <a:p>
-            <a:pPr algn="ctr" indent="0" marL="0">
-              <a:buNone/>
-            </a:pPr>
-            <a:r>
-              <a:rPr lang="en-US" sz="700" i="1" dirty="0">
-                <a:solidFill>
-                  <a:srgbClr val="94A3B8"/>
-                </a:solidFill>
-                <a:latin typeface="Calibri" pitchFamily="34" charset="0"/>
-                <a:ea typeface="Calibri" pitchFamily="34" charset="-122"/>
-                <a:cs typeface="Calibri" pitchFamily="34" charset="-120"/>
-              </a:rPr>
-              <a:t>in → il before 'l'</a:t>
-            </a:r>
-            <a:endParaRPr lang="en-US" sz="700" dirty="0"/>
-          </a:p>
-        </p:txBody>
-      </p:sp>
-      <p:sp>
-        <p:nvSpPr>
-          <p:cNvPr id="20" name="Shape 18"/>
+          <p:cNvPr id="19" name="Shape 17"/>
           <p:cNvSpPr/>
           <p:nvPr/>
         </p:nvSpPr>
@@ -23742,11 +24315,11 @@
             </a:avLst>
           </a:prstGeom>
           <a:solidFill>
-            <a:srgbClr val="CCFBF1"/>
+            <a:srgbClr val="FCE7F3"/>
           </a:solidFill>
           <a:ln w="19050">
             <a:solidFill>
-              <a:srgbClr val="0D9488"/>
+              <a:srgbClr val="DB2777"/>
             </a:solidFill>
             <a:prstDash val="solid"/>
           </a:ln>
@@ -23761,7 +24334,7 @@
       </p:sp>
       <p:sp>
         <p:nvSpPr>
-          <p:cNvPr id="21" name="Text 19"/>
+          <p:cNvPr id="20" name="Text 18"/>
           <p:cNvSpPr/>
           <p:nvPr/>
         </p:nvSpPr>
@@ -23786,13 +24359,13 @@
             <a:r>
               <a:rPr lang="en-US" sz="1300" b="1" dirty="0">
                 <a:solidFill>
-                  <a:srgbClr val="0F766E"/>
+                  <a:srgbClr val="9D174D"/>
                 </a:solidFill>
                 <a:latin typeface="Trebuchet MS" pitchFamily="34" charset="0"/>
                 <a:ea typeface="Trebuchet MS" pitchFamily="34" charset="-122"/>
                 <a:cs typeface="Trebuchet MS" pitchFamily="34" charset="-120"/>
               </a:rPr>
-              <a:t>legal</a:t>
+              <a:t>ity</a:t>
             </a:r>
             <a:endParaRPr lang="en-US" sz="1300" dirty="0"/>
           </a:p>
@@ -23800,7 +24373,7 @@
       </p:sp>
       <p:sp>
         <p:nvSpPr>
-          <p:cNvPr id="22" name="Text 20"/>
+          <p:cNvPr id="21" name="Text 19"/>
           <p:cNvSpPr/>
           <p:nvPr/>
         </p:nvSpPr>
@@ -23831,7 +24404,7 @@
                 <a:ea typeface="Calibri" pitchFamily="34" charset="-122"/>
                 <a:cs typeface="Calibri" pitchFamily="34" charset="-120"/>
               </a:rPr>
-              <a:t>relating to law</a:t>
+              <a:t>state or quality of</a:t>
             </a:r>
             <a:endParaRPr lang="en-US" sz="850" dirty="0"/>
           </a:p>
@@ -23839,7 +24412,7 @@
       </p:sp>
       <p:sp>
         <p:nvSpPr>
-          <p:cNvPr id="23" name="Shape 21"/>
+          <p:cNvPr id="22" name="Shape 20"/>
           <p:cNvSpPr/>
           <p:nvPr/>
         </p:nvSpPr>
@@ -23866,7 +24439,7 @@
       </p:sp>
       <p:sp>
         <p:nvSpPr>
-          <p:cNvPr id="24" name="Text 22"/>
+          <p:cNvPr id="23" name="Text 21"/>
           <p:cNvSpPr/>
           <p:nvPr/>
         </p:nvSpPr>
@@ -23905,7 +24478,7 @@
       </p:sp>
       <p:sp>
         <p:nvSpPr>
-          <p:cNvPr id="25" name="Shape 23"/>
+          <p:cNvPr id="24" name="Shape 22"/>
           <p:cNvSpPr/>
           <p:nvPr/>
         </p:nvSpPr>
@@ -23932,7 +24505,7 @@
       </p:sp>
       <p:sp>
         <p:nvSpPr>
-          <p:cNvPr id="26" name="Text 24"/>
+          <p:cNvPr id="25" name="Text 23"/>
           <p:cNvSpPr/>
           <p:nvPr/>
         </p:nvSpPr>
@@ -23971,7 +24544,7 @@
       </p:sp>
       <p:sp>
         <p:nvSpPr>
-          <p:cNvPr id="27" name="Shape 25"/>
+          <p:cNvPr id="26" name="Shape 24"/>
           <p:cNvSpPr/>
           <p:nvPr/>
         </p:nvSpPr>
@@ -23998,7 +24571,7 @@
       </p:sp>
       <p:sp>
         <p:nvSpPr>
-          <p:cNvPr id="28" name="Text 26"/>
+          <p:cNvPr id="27" name="Text 25"/>
           <p:cNvSpPr/>
           <p:nvPr/>
         </p:nvSpPr>
@@ -24037,7 +24610,7 @@
       </p:sp>
       <p:sp>
         <p:nvSpPr>
-          <p:cNvPr id="29" name="Shape 27"/>
+          <p:cNvPr id="28" name="Shape 26"/>
           <p:cNvSpPr/>
           <p:nvPr/>
         </p:nvSpPr>
@@ -24064,7 +24637,7 @@
       </p:sp>
       <p:sp>
         <p:nvSpPr>
-          <p:cNvPr id="30" name="Text 28"/>
+          <p:cNvPr id="29" name="Text 27"/>
           <p:cNvSpPr/>
           <p:nvPr/>
         </p:nvSpPr>
@@ -25245,7 +25818,7 @@
                 <a:ea typeface="Trebuchet MS" pitchFamily="34" charset="-122"/>
                 <a:cs typeface="Trebuchet MS" pitchFamily="34" charset="-120"/>
               </a:rPr>
-              <a:t>illegal</a:t>
+              <a:t>legality</a:t>
             </a:r>
             <a:endParaRPr lang="en-US" sz="2800" dirty="0"/>
           </a:p>
@@ -25334,11 +25907,11 @@
             </a:avLst>
           </a:prstGeom>
           <a:solidFill>
-            <a:srgbClr val="DDD6FE"/>
+            <a:srgbClr val="CCFBF1"/>
           </a:solidFill>
           <a:ln w="19050">
             <a:solidFill>
-              <a:srgbClr val="7C3AED"/>
+              <a:srgbClr val="0D9488"/>
             </a:solidFill>
             <a:prstDash val="solid"/>
           </a:ln>
@@ -25378,13 +25951,13 @@
             <a:r>
               <a:rPr lang="en-US" sz="1300" b="1" dirty="0">
                 <a:solidFill>
-                  <a:srgbClr val="4C1D95"/>
+                  <a:srgbClr val="0F766E"/>
                 </a:solidFill>
                 <a:latin typeface="Trebuchet MS" pitchFamily="34" charset="0"/>
                 <a:ea typeface="Trebuchet MS" pitchFamily="34" charset="-122"/>
                 <a:cs typeface="Trebuchet MS" pitchFamily="34" charset="-120"/>
               </a:rPr>
-              <a:t>il</a:t>
+              <a:t>legal</a:t>
             </a:r>
             <a:endParaRPr lang="en-US" sz="1300" dirty="0"/>
           </a:p>
@@ -25423,7 +25996,7 @@
                 <a:ea typeface="Calibri" pitchFamily="34" charset="-122"/>
                 <a:cs typeface="Calibri" pitchFamily="34" charset="-120"/>
               </a:rPr>
-              <a:t>not</a:t>
+              <a:t>relating to law</a:t>
             </a:r>
             <a:endParaRPr lang="en-US" sz="850" dirty="0"/>
           </a:p>
@@ -25431,46 +26004,7 @@
       </p:sp>
       <p:sp>
         <p:nvSpPr>
-          <p:cNvPr id="19" name="Text 17"/>
-          <p:cNvSpPr/>
-          <p:nvPr/>
-        </p:nvSpPr>
-        <p:spPr>
-          <a:xfrm>
-            <a:off x="2938272" y="2752344"/>
-            <a:ext cx="1828800" cy="182880"/>
-          </a:xfrm>
-          <a:prstGeom prst="rect">
-            <a:avLst/>
-          </a:prstGeom>
-          <a:noFill/>
-          <a:ln/>
-        </p:spPr>
-        <p:txBody>
-          <a:bodyPr wrap="square" lIns="0" tIns="0" rIns="0" bIns="0" rtlCol="0" anchor="t"/>
-          <a:lstStyle/>
-          <a:p>
-            <a:pPr algn="ctr" indent="0" marL="0">
-              <a:buNone/>
-            </a:pPr>
-            <a:r>
-              <a:rPr lang="en-US" sz="700" i="1" dirty="0">
-                <a:solidFill>
-                  <a:srgbClr val="94A3B8"/>
-                </a:solidFill>
-                <a:latin typeface="Calibri" pitchFamily="34" charset="0"/>
-                <a:ea typeface="Calibri" pitchFamily="34" charset="-122"/>
-                <a:cs typeface="Calibri" pitchFamily="34" charset="-120"/>
-              </a:rPr>
-              <a:t>in → il before 'l'</a:t>
-            </a:r>
-            <a:endParaRPr lang="en-US" sz="700" dirty="0"/>
-          </a:p>
-        </p:txBody>
-      </p:sp>
-      <p:sp>
-        <p:nvSpPr>
-          <p:cNvPr id="20" name="Shape 18"/>
+          <p:cNvPr id="19" name="Shape 17"/>
           <p:cNvSpPr/>
           <p:nvPr/>
         </p:nvSpPr>
@@ -25485,11 +26019,11 @@
             </a:avLst>
           </a:prstGeom>
           <a:solidFill>
-            <a:srgbClr val="CCFBF1"/>
+            <a:srgbClr val="FCE7F3"/>
           </a:solidFill>
           <a:ln w="19050">
             <a:solidFill>
-              <a:srgbClr val="0D9488"/>
+              <a:srgbClr val="DB2777"/>
             </a:solidFill>
             <a:prstDash val="solid"/>
           </a:ln>
@@ -25504,7 +26038,7 @@
       </p:sp>
       <p:sp>
         <p:nvSpPr>
-          <p:cNvPr id="21" name="Text 19"/>
+          <p:cNvPr id="20" name="Text 18"/>
           <p:cNvSpPr/>
           <p:nvPr/>
         </p:nvSpPr>
@@ -25529,13 +26063,13 @@
             <a:r>
               <a:rPr lang="en-US" sz="1300" b="1" dirty="0">
                 <a:solidFill>
-                  <a:srgbClr val="0F766E"/>
+                  <a:srgbClr val="9D174D"/>
                 </a:solidFill>
                 <a:latin typeface="Trebuchet MS" pitchFamily="34" charset="0"/>
                 <a:ea typeface="Trebuchet MS" pitchFamily="34" charset="-122"/>
                 <a:cs typeface="Trebuchet MS" pitchFamily="34" charset="-120"/>
               </a:rPr>
-              <a:t>legal</a:t>
+              <a:t>ity</a:t>
             </a:r>
             <a:endParaRPr lang="en-US" sz="1300" dirty="0"/>
           </a:p>
@@ -25543,7 +26077,7 @@
       </p:sp>
       <p:sp>
         <p:nvSpPr>
-          <p:cNvPr id="22" name="Text 20"/>
+          <p:cNvPr id="21" name="Text 19"/>
           <p:cNvSpPr/>
           <p:nvPr/>
         </p:nvSpPr>
@@ -25574,7 +26108,7 @@
                 <a:ea typeface="Calibri" pitchFamily="34" charset="-122"/>
                 <a:cs typeface="Calibri" pitchFamily="34" charset="-120"/>
               </a:rPr>
-              <a:t>relating to law</a:t>
+              <a:t>state or quality of</a:t>
             </a:r>
             <a:endParaRPr lang="en-US" sz="850" dirty="0"/>
           </a:p>
@@ -25582,7 +26116,7 @@
       </p:sp>
       <p:sp>
         <p:nvSpPr>
-          <p:cNvPr id="23" name="Shape 21"/>
+          <p:cNvPr id="22" name="Shape 20"/>
           <p:cNvSpPr/>
           <p:nvPr/>
         </p:nvSpPr>
@@ -25609,7 +26143,7 @@
       </p:sp>
       <p:sp>
         <p:nvSpPr>
-          <p:cNvPr id="24" name="Text 22"/>
+          <p:cNvPr id="23" name="Text 21"/>
           <p:cNvSpPr/>
           <p:nvPr/>
         </p:nvSpPr>
@@ -25648,7 +26182,7 @@
       </p:sp>
       <p:sp>
         <p:nvSpPr>
-          <p:cNvPr id="25" name="Shape 23"/>
+          <p:cNvPr id="24" name="Shape 22"/>
           <p:cNvSpPr/>
           <p:nvPr/>
         </p:nvSpPr>
@@ -25675,14 +26209,14 @@
       </p:sp>
       <p:sp>
         <p:nvSpPr>
-          <p:cNvPr id="26" name="Shape 24"/>
-          <p:cNvSpPr/>
-          <p:nvPr/>
-        </p:nvSpPr>
-        <p:spPr>
-          <a:xfrm>
-            <a:off x="2313432" y="3364992"/>
-            <a:ext cx="1645920" cy="475488"/>
+          <p:cNvPr id="25" name="Shape 23"/>
+          <p:cNvSpPr/>
+          <p:nvPr/>
+        </p:nvSpPr>
+        <p:spPr>
+          <a:xfrm>
+            <a:off x="1975104" y="3364992"/>
+            <a:ext cx="1554480" cy="475488"/>
           </a:xfrm>
           <a:prstGeom prst="rect">
             <a:avLst>
@@ -25702,14 +26236,14 @@
       </p:sp>
       <p:sp>
         <p:nvSpPr>
-          <p:cNvPr id="27" name="Text 25"/>
-          <p:cNvSpPr/>
-          <p:nvPr/>
-        </p:nvSpPr>
-        <p:spPr>
-          <a:xfrm>
-            <a:off x="2313432" y="3364992"/>
-            <a:ext cx="1645920" cy="475488"/>
+          <p:cNvPr id="26" name="Text 24"/>
+          <p:cNvSpPr/>
+          <p:nvPr/>
+        </p:nvSpPr>
+        <p:spPr>
+          <a:xfrm>
+            <a:off x="1975104" y="3364992"/>
+            <a:ext cx="1554480" cy="475488"/>
           </a:xfrm>
           <a:prstGeom prst="rect">
             <a:avLst/>
@@ -25733,7 +26267,7 @@
                 <a:ea typeface="Trebuchet MS" pitchFamily="34" charset="-122"/>
                 <a:cs typeface="Trebuchet MS" pitchFamily="34" charset="-120"/>
               </a:rPr>
-              <a:t>il</a:t>
+              <a:t>le</a:t>
             </a:r>
             <a:endParaRPr lang="en-US" sz="1400" dirty="0"/>
           </a:p>
@@ -25741,14 +26275,14 @@
       </p:sp>
       <p:sp>
         <p:nvSpPr>
-          <p:cNvPr id="28" name="Text 26"/>
-          <p:cNvSpPr/>
-          <p:nvPr/>
-        </p:nvSpPr>
-        <p:spPr>
-          <a:xfrm>
-            <a:off x="3959352" y="3364992"/>
-            <a:ext cx="411480" cy="475488"/>
+          <p:cNvPr id="27" name="Text 25"/>
+          <p:cNvSpPr/>
+          <p:nvPr/>
+        </p:nvSpPr>
+        <p:spPr>
+          <a:xfrm>
+            <a:off x="3529584" y="3364992"/>
+            <a:ext cx="73152" cy="475488"/>
           </a:xfrm>
           <a:prstGeom prst="rect">
             <a:avLst/>
@@ -25780,14 +26314,14 @@
       </p:sp>
       <p:sp>
         <p:nvSpPr>
-          <p:cNvPr id="29" name="Shape 27"/>
-          <p:cNvSpPr/>
-          <p:nvPr/>
-        </p:nvSpPr>
-        <p:spPr>
-          <a:xfrm>
-            <a:off x="4370832" y="3364992"/>
-            <a:ext cx="1645920" cy="475488"/>
+          <p:cNvPr id="28" name="Shape 26"/>
+          <p:cNvSpPr/>
+          <p:nvPr/>
+        </p:nvSpPr>
+        <p:spPr>
+          <a:xfrm>
+            <a:off x="3602736" y="3364992"/>
+            <a:ext cx="1554480" cy="475488"/>
           </a:xfrm>
           <a:prstGeom prst="rect">
             <a:avLst>
@@ -25807,14 +26341,14 @@
       </p:sp>
       <p:sp>
         <p:nvSpPr>
-          <p:cNvPr id="30" name="Text 28"/>
-          <p:cNvSpPr/>
-          <p:nvPr/>
-        </p:nvSpPr>
-        <p:spPr>
-          <a:xfrm>
-            <a:off x="4370832" y="3364992"/>
-            <a:ext cx="1645920" cy="475488"/>
+          <p:cNvPr id="29" name="Text 27"/>
+          <p:cNvSpPr/>
+          <p:nvPr/>
+        </p:nvSpPr>
+        <p:spPr>
+          <a:xfrm>
+            <a:off x="3602736" y="3364992"/>
+            <a:ext cx="1554480" cy="475488"/>
           </a:xfrm>
           <a:prstGeom prst="rect">
             <a:avLst/>
@@ -25838,7 +26372,7 @@
                 <a:ea typeface="Trebuchet MS" pitchFamily="34" charset="-122"/>
                 <a:cs typeface="Trebuchet MS" pitchFamily="34" charset="-120"/>
               </a:rPr>
-              <a:t>le</a:t>
+              <a:t>gal</a:t>
             </a:r>
             <a:endParaRPr lang="en-US" sz="1400" dirty="0"/>
           </a:p>
@@ -25846,14 +26380,14 @@
       </p:sp>
       <p:sp>
         <p:nvSpPr>
-          <p:cNvPr id="31" name="Text 29"/>
-          <p:cNvSpPr/>
-          <p:nvPr/>
-        </p:nvSpPr>
-        <p:spPr>
-          <a:xfrm>
-            <a:off x="6016752" y="3364992"/>
-            <a:ext cx="411480" cy="475488"/>
+          <p:cNvPr id="30" name="Text 28"/>
+          <p:cNvSpPr/>
+          <p:nvPr/>
+        </p:nvSpPr>
+        <p:spPr>
+          <a:xfrm>
+            <a:off x="5157216" y="3364992"/>
+            <a:ext cx="73152" cy="475488"/>
           </a:xfrm>
           <a:prstGeom prst="rect">
             <a:avLst/>
@@ -25885,14 +26419,14 @@
       </p:sp>
       <p:sp>
         <p:nvSpPr>
-          <p:cNvPr id="32" name="Shape 30"/>
-          <p:cNvSpPr/>
-          <p:nvPr/>
-        </p:nvSpPr>
-        <p:spPr>
-          <a:xfrm>
-            <a:off x="6428232" y="3364992"/>
-            <a:ext cx="1645920" cy="475488"/>
+          <p:cNvPr id="31" name="Shape 29"/>
+          <p:cNvSpPr/>
+          <p:nvPr/>
+        </p:nvSpPr>
+        <p:spPr>
+          <a:xfrm>
+            <a:off x="5230368" y="3364992"/>
+            <a:ext cx="1554480" cy="475488"/>
           </a:xfrm>
           <a:prstGeom prst="rect">
             <a:avLst>
@@ -25912,14 +26446,14 @@
       </p:sp>
       <p:sp>
         <p:nvSpPr>
-          <p:cNvPr id="33" name="Text 31"/>
-          <p:cNvSpPr/>
-          <p:nvPr/>
-        </p:nvSpPr>
-        <p:spPr>
-          <a:xfrm>
-            <a:off x="6428232" y="3364992"/>
-            <a:ext cx="1645920" cy="475488"/>
+          <p:cNvPr id="32" name="Text 30"/>
+          <p:cNvSpPr/>
+          <p:nvPr/>
+        </p:nvSpPr>
+        <p:spPr>
+          <a:xfrm>
+            <a:off x="5230368" y="3364992"/>
+            <a:ext cx="1554480" cy="475488"/>
           </a:xfrm>
           <a:prstGeom prst="rect">
             <a:avLst/>
@@ -25943,7 +26477,7 @@
                 <a:ea typeface="Trebuchet MS" pitchFamily="34" charset="-122"/>
                 <a:cs typeface="Trebuchet MS" pitchFamily="34" charset="-120"/>
               </a:rPr>
-              <a:t>gal</a:t>
+              <a:t>i</a:t>
             </a:r>
             <a:endParaRPr lang="en-US" sz="1400" dirty="0"/>
           </a:p>
@@ -25951,7 +26485,112 @@
       </p:sp>
       <p:sp>
         <p:nvSpPr>
+          <p:cNvPr id="33" name="Text 31"/>
+          <p:cNvSpPr/>
+          <p:nvPr/>
+        </p:nvSpPr>
+        <p:spPr>
+          <a:xfrm>
+            <a:off x="6784848" y="3364992"/>
+            <a:ext cx="73152" cy="475488"/>
+          </a:xfrm>
+          <a:prstGeom prst="rect">
+            <a:avLst/>
+          </a:prstGeom>
+          <a:noFill/>
+          <a:ln/>
+        </p:spPr>
+        <p:txBody>
+          <a:bodyPr wrap="square" lIns="0" tIns="0" rIns="0" bIns="0" rtlCol="0" anchor="ctr"/>
+          <a:lstStyle/>
+          <a:p>
+            <a:pPr algn="ctr" indent="0" marL="0">
+              <a:buNone/>
+            </a:pPr>
+            <a:r>
+              <a:rPr lang="en-US" sz="1600" b="1" dirty="0">
+                <a:solidFill>
+                  <a:srgbClr val="0D9488"/>
+                </a:solidFill>
+                <a:latin typeface="Trebuchet MS" pitchFamily="34" charset="0"/>
+                <a:ea typeface="Trebuchet MS" pitchFamily="34" charset="-122"/>
+                <a:cs typeface="Trebuchet MS" pitchFamily="34" charset="-120"/>
+              </a:rPr>
+              <a:t>·</a:t>
+            </a:r>
+            <a:endParaRPr lang="en-US" sz="1600" dirty="0"/>
+          </a:p>
+        </p:txBody>
+      </p:sp>
+      <p:sp>
+        <p:nvSpPr>
           <p:cNvPr id="34" name="Shape 32"/>
+          <p:cNvSpPr/>
+          <p:nvPr/>
+        </p:nvSpPr>
+        <p:spPr>
+          <a:xfrm>
+            <a:off x="6858000" y="3364992"/>
+            <a:ext cx="1554480" cy="475488"/>
+          </a:xfrm>
+          <a:prstGeom prst="rect">
+            <a:avLst>
+              <a:gd name="adj" fmla="val 9615"/>
+            </a:avLst>
+          </a:prstGeom>
+          <a:solidFill>
+            <a:srgbClr val="FFFFFF"/>
+          </a:solidFill>
+          <a:ln w="12700">
+            <a:solidFill>
+              <a:srgbClr val="0D9488"/>
+            </a:solidFill>
+            <a:prstDash val="solid"/>
+          </a:ln>
+        </p:spPr>
+      </p:sp>
+      <p:sp>
+        <p:nvSpPr>
+          <p:cNvPr id="35" name="Text 33"/>
+          <p:cNvSpPr/>
+          <p:nvPr/>
+        </p:nvSpPr>
+        <p:spPr>
+          <a:xfrm>
+            <a:off x="6858000" y="3364992"/>
+            <a:ext cx="1554480" cy="475488"/>
+          </a:xfrm>
+          <a:prstGeom prst="rect">
+            <a:avLst/>
+          </a:prstGeom>
+          <a:noFill/>
+          <a:ln/>
+        </p:spPr>
+        <p:txBody>
+          <a:bodyPr wrap="square" lIns="0" tIns="0" rIns="0" bIns="0" rtlCol="0" anchor="ctr"/>
+          <a:lstStyle/>
+          <a:p>
+            <a:pPr algn="ctr" indent="0" marL="0">
+              <a:buNone/>
+            </a:pPr>
+            <a:r>
+              <a:rPr lang="en-US" sz="1400" b="1" dirty="0">
+                <a:solidFill>
+                  <a:srgbClr val="0D9488"/>
+                </a:solidFill>
+                <a:latin typeface="Trebuchet MS" pitchFamily="34" charset="0"/>
+                <a:ea typeface="Trebuchet MS" pitchFamily="34" charset="-122"/>
+                <a:cs typeface="Trebuchet MS" pitchFamily="34" charset="-120"/>
+              </a:rPr>
+              <a:t>ty</a:t>
+            </a:r>
+            <a:endParaRPr lang="en-US" sz="1400" dirty="0"/>
+          </a:p>
+        </p:txBody>
+      </p:sp>
+      <p:sp>
+        <p:nvSpPr>
+          <p:cNvPr id="36" name="Shape 34"/>
           <p:cNvSpPr/>
           <p:nvPr/>
         </p:nvSpPr>
@@ -25978,7 +26617,7 @@
       </p:sp>
       <p:sp>
         <p:nvSpPr>
-          <p:cNvPr id="35" name="Text 33"/>
+          <p:cNvPr id="37" name="Text 35"/>
           <p:cNvSpPr/>
           <p:nvPr/>
         </p:nvSpPr>
@@ -26017,7 +26656,7 @@
       </p:sp>
       <p:sp>
         <p:nvSpPr>
-          <p:cNvPr id="36" name="Shape 34"/>
+          <p:cNvPr id="38" name="Shape 36"/>
           <p:cNvSpPr/>
           <p:nvPr/>
         </p:nvSpPr>
@@ -26044,7 +26683,7 @@
       </p:sp>
       <p:sp>
         <p:nvSpPr>
-          <p:cNvPr id="37" name="Text 35"/>
+          <p:cNvPr id="39" name="Text 37"/>
           <p:cNvSpPr/>
           <p:nvPr/>
         </p:nvSpPr>
@@ -26506,7 +27145,7 @@
                 <a:ea typeface="Trebuchet MS" pitchFamily="34" charset="-122"/>
                 <a:cs typeface="Trebuchet MS" pitchFamily="34" charset="-120"/>
               </a:rPr>
-              <a:t>illegal</a:t>
+              <a:t>legality</a:t>
             </a:r>
             <a:endParaRPr lang="en-US" sz="2800" dirty="0"/>
           </a:p>
@@ -26595,11 +27234,11 @@
             </a:avLst>
           </a:prstGeom>
           <a:solidFill>
-            <a:srgbClr val="DDD6FE"/>
+            <a:srgbClr val="CCFBF1"/>
           </a:solidFill>
           <a:ln w="19050">
             <a:solidFill>
-              <a:srgbClr val="7C3AED"/>
+              <a:srgbClr val="0D9488"/>
             </a:solidFill>
             <a:prstDash val="solid"/>
           </a:ln>
@@ -26639,13 +27278,13 @@
             <a:r>
               <a:rPr lang="en-US" sz="1300" b="1" dirty="0">
                 <a:solidFill>
-                  <a:srgbClr val="4C1D95"/>
+                  <a:srgbClr val="0F766E"/>
                 </a:solidFill>
                 <a:latin typeface="Trebuchet MS" pitchFamily="34" charset="0"/>
                 <a:ea typeface="Trebuchet MS" pitchFamily="34" charset="-122"/>
                 <a:cs typeface="Trebuchet MS" pitchFamily="34" charset="-120"/>
               </a:rPr>
-              <a:t>il</a:t>
+              <a:t>legal</a:t>
             </a:r>
             <a:endParaRPr lang="en-US" sz="1300" dirty="0"/>
           </a:p>
@@ -26684,7 +27323,7 @@
                 <a:ea typeface="Calibri" pitchFamily="34" charset="-122"/>
                 <a:cs typeface="Calibri" pitchFamily="34" charset="-120"/>
               </a:rPr>
-              <a:t>not</a:t>
+              <a:t>relating to law</a:t>
             </a:r>
             <a:endParaRPr lang="en-US" sz="850" dirty="0"/>
           </a:p>
@@ -26692,46 +27331,7 @@
       </p:sp>
       <p:sp>
         <p:nvSpPr>
-          <p:cNvPr id="19" name="Text 17"/>
-          <p:cNvSpPr/>
-          <p:nvPr/>
-        </p:nvSpPr>
-        <p:spPr>
-          <a:xfrm>
-            <a:off x="2938272" y="2752344"/>
-            <a:ext cx="1828800" cy="182880"/>
-          </a:xfrm>
-          <a:prstGeom prst="rect">
-            <a:avLst/>
-          </a:prstGeom>
-          <a:noFill/>
-          <a:ln/>
-        </p:spPr>
-        <p:txBody>
-          <a:bodyPr wrap="square" lIns="0" tIns="0" rIns="0" bIns="0" rtlCol="0" anchor="t"/>
-          <a:lstStyle/>
-          <a:p>
-            <a:pPr algn="ctr" indent="0" marL="0">
-              <a:buNone/>
-            </a:pPr>
-            <a:r>
-              <a:rPr lang="en-US" sz="700" i="1" dirty="0">
-                <a:solidFill>
-                  <a:srgbClr val="94A3B8"/>
-                </a:solidFill>
-                <a:latin typeface="Calibri" pitchFamily="34" charset="0"/>
-                <a:ea typeface="Calibri" pitchFamily="34" charset="-122"/>
-                <a:cs typeface="Calibri" pitchFamily="34" charset="-120"/>
-              </a:rPr>
-              <a:t>in → il before 'l'</a:t>
-            </a:r>
-            <a:endParaRPr lang="en-US" sz="700" dirty="0"/>
-          </a:p>
-        </p:txBody>
-      </p:sp>
-      <p:sp>
-        <p:nvSpPr>
-          <p:cNvPr id="20" name="Shape 18"/>
+          <p:cNvPr id="19" name="Shape 17"/>
           <p:cNvSpPr/>
           <p:nvPr/>
         </p:nvSpPr>
@@ -26746,11 +27346,11 @@
             </a:avLst>
           </a:prstGeom>
           <a:solidFill>
-            <a:srgbClr val="CCFBF1"/>
+            <a:srgbClr val="FCE7F3"/>
           </a:solidFill>
           <a:ln w="19050">
             <a:solidFill>
-              <a:srgbClr val="0D9488"/>
+              <a:srgbClr val="DB2777"/>
             </a:solidFill>
             <a:prstDash val="solid"/>
           </a:ln>
@@ -26765,7 +27365,7 @@
       </p:sp>
       <p:sp>
         <p:nvSpPr>
-          <p:cNvPr id="21" name="Text 19"/>
+          <p:cNvPr id="20" name="Text 18"/>
           <p:cNvSpPr/>
           <p:nvPr/>
         </p:nvSpPr>
@@ -26790,13 +27390,13 @@
             <a:r>
               <a:rPr lang="en-US" sz="1300" b="1" dirty="0">
                 <a:solidFill>
-                  <a:srgbClr val="0F766E"/>
+                  <a:srgbClr val="9D174D"/>
                 </a:solidFill>
                 <a:latin typeface="Trebuchet MS" pitchFamily="34" charset="0"/>
                 <a:ea typeface="Trebuchet MS" pitchFamily="34" charset="-122"/>
                 <a:cs typeface="Trebuchet MS" pitchFamily="34" charset="-120"/>
               </a:rPr>
-              <a:t>legal</a:t>
+              <a:t>ity</a:t>
             </a:r>
             <a:endParaRPr lang="en-US" sz="1300" dirty="0"/>
           </a:p>
@@ -26804,7 +27404,7 @@
       </p:sp>
       <p:sp>
         <p:nvSpPr>
-          <p:cNvPr id="22" name="Text 20"/>
+          <p:cNvPr id="21" name="Text 19"/>
           <p:cNvSpPr/>
           <p:nvPr/>
         </p:nvSpPr>
@@ -26835,7 +27435,7 @@
                 <a:ea typeface="Calibri" pitchFamily="34" charset="-122"/>
                 <a:cs typeface="Calibri" pitchFamily="34" charset="-120"/>
               </a:rPr>
-              <a:t>relating to law</a:t>
+              <a:t>state or quality of</a:t>
             </a:r>
             <a:endParaRPr lang="en-US" sz="850" dirty="0"/>
           </a:p>
@@ -26843,7 +27443,7 @@
       </p:sp>
       <p:sp>
         <p:nvSpPr>
-          <p:cNvPr id="23" name="Shape 21"/>
+          <p:cNvPr id="22" name="Shape 20"/>
           <p:cNvSpPr/>
           <p:nvPr/>
         </p:nvSpPr>
@@ -26870,7 +27470,7 @@
       </p:sp>
       <p:sp>
         <p:nvSpPr>
-          <p:cNvPr id="24" name="Text 22"/>
+          <p:cNvPr id="23" name="Text 21"/>
           <p:cNvSpPr/>
           <p:nvPr/>
         </p:nvSpPr>
@@ -26909,7 +27509,7 @@
       </p:sp>
       <p:sp>
         <p:nvSpPr>
-          <p:cNvPr id="25" name="Shape 23"/>
+          <p:cNvPr id="24" name="Shape 22"/>
           <p:cNvSpPr/>
           <p:nvPr/>
         </p:nvSpPr>
@@ -26936,14 +27536,14 @@
       </p:sp>
       <p:sp>
         <p:nvSpPr>
-          <p:cNvPr id="26" name="Shape 24"/>
-          <p:cNvSpPr/>
-          <p:nvPr/>
-        </p:nvSpPr>
-        <p:spPr>
-          <a:xfrm>
-            <a:off x="2313432" y="3364992"/>
-            <a:ext cx="1645920" cy="475488"/>
+          <p:cNvPr id="25" name="Shape 23"/>
+          <p:cNvSpPr/>
+          <p:nvPr/>
+        </p:nvSpPr>
+        <p:spPr>
+          <a:xfrm>
+            <a:off x="1975104" y="3364992"/>
+            <a:ext cx="1554480" cy="475488"/>
           </a:xfrm>
           <a:prstGeom prst="rect">
             <a:avLst>
@@ -26963,14 +27563,14 @@
       </p:sp>
       <p:sp>
         <p:nvSpPr>
-          <p:cNvPr id="27" name="Text 25"/>
-          <p:cNvSpPr/>
-          <p:nvPr/>
-        </p:nvSpPr>
-        <p:spPr>
-          <a:xfrm>
-            <a:off x="2313432" y="3364992"/>
-            <a:ext cx="1645920" cy="475488"/>
+          <p:cNvPr id="26" name="Text 24"/>
+          <p:cNvSpPr/>
+          <p:nvPr/>
+        </p:nvSpPr>
+        <p:spPr>
+          <a:xfrm>
+            <a:off x="1975104" y="3364992"/>
+            <a:ext cx="1554480" cy="475488"/>
           </a:xfrm>
           <a:prstGeom prst="rect">
             <a:avLst/>
@@ -26994,7 +27594,7 @@
                 <a:ea typeface="Trebuchet MS" pitchFamily="34" charset="-122"/>
                 <a:cs typeface="Trebuchet MS" pitchFamily="34" charset="-120"/>
               </a:rPr>
-              <a:t>il</a:t>
+              <a:t>le</a:t>
             </a:r>
             <a:endParaRPr lang="en-US" sz="1400" dirty="0"/>
           </a:p>
@@ -27002,14 +27602,14 @@
       </p:sp>
       <p:sp>
         <p:nvSpPr>
-          <p:cNvPr id="28" name="Text 26"/>
-          <p:cNvSpPr/>
-          <p:nvPr/>
-        </p:nvSpPr>
-        <p:spPr>
-          <a:xfrm>
-            <a:off x="3959352" y="3364992"/>
-            <a:ext cx="411480" cy="475488"/>
+          <p:cNvPr id="27" name="Text 25"/>
+          <p:cNvSpPr/>
+          <p:nvPr/>
+        </p:nvSpPr>
+        <p:spPr>
+          <a:xfrm>
+            <a:off x="3529584" y="3364992"/>
+            <a:ext cx="73152" cy="475488"/>
           </a:xfrm>
           <a:prstGeom prst="rect">
             <a:avLst/>
@@ -27041,14 +27641,14 @@
       </p:sp>
       <p:sp>
         <p:nvSpPr>
-          <p:cNvPr id="29" name="Shape 27"/>
-          <p:cNvSpPr/>
-          <p:nvPr/>
-        </p:nvSpPr>
-        <p:spPr>
-          <a:xfrm>
-            <a:off x="4370832" y="3364992"/>
-            <a:ext cx="1645920" cy="475488"/>
+          <p:cNvPr id="28" name="Shape 26"/>
+          <p:cNvSpPr/>
+          <p:nvPr/>
+        </p:nvSpPr>
+        <p:spPr>
+          <a:xfrm>
+            <a:off x="3602736" y="3364992"/>
+            <a:ext cx="1554480" cy="475488"/>
           </a:xfrm>
           <a:prstGeom prst="rect">
             <a:avLst>
@@ -27068,14 +27668,14 @@
       </p:sp>
       <p:sp>
         <p:nvSpPr>
-          <p:cNvPr id="30" name="Text 28"/>
-          <p:cNvSpPr/>
-          <p:nvPr/>
-        </p:nvSpPr>
-        <p:spPr>
-          <a:xfrm>
-            <a:off x="4370832" y="3364992"/>
-            <a:ext cx="1645920" cy="475488"/>
+          <p:cNvPr id="29" name="Text 27"/>
+          <p:cNvSpPr/>
+          <p:nvPr/>
+        </p:nvSpPr>
+        <p:spPr>
+          <a:xfrm>
+            <a:off x="3602736" y="3364992"/>
+            <a:ext cx="1554480" cy="475488"/>
           </a:xfrm>
           <a:prstGeom prst="rect">
             <a:avLst/>
@@ -27099,7 +27699,7 @@
                 <a:ea typeface="Trebuchet MS" pitchFamily="34" charset="-122"/>
                 <a:cs typeface="Trebuchet MS" pitchFamily="34" charset="-120"/>
               </a:rPr>
-              <a:t>le</a:t>
+              <a:t>gal</a:t>
             </a:r>
             <a:endParaRPr lang="en-US" sz="1400" dirty="0"/>
           </a:p>
@@ -27107,14 +27707,14 @@
       </p:sp>
       <p:sp>
         <p:nvSpPr>
-          <p:cNvPr id="31" name="Text 29"/>
-          <p:cNvSpPr/>
-          <p:nvPr/>
-        </p:nvSpPr>
-        <p:spPr>
-          <a:xfrm>
-            <a:off x="6016752" y="3364992"/>
-            <a:ext cx="411480" cy="475488"/>
+          <p:cNvPr id="30" name="Text 28"/>
+          <p:cNvSpPr/>
+          <p:nvPr/>
+        </p:nvSpPr>
+        <p:spPr>
+          <a:xfrm>
+            <a:off x="5157216" y="3364992"/>
+            <a:ext cx="73152" cy="475488"/>
           </a:xfrm>
           <a:prstGeom prst="rect">
             <a:avLst/>
@@ -27146,14 +27746,14 @@
       </p:sp>
       <p:sp>
         <p:nvSpPr>
-          <p:cNvPr id="32" name="Shape 30"/>
-          <p:cNvSpPr/>
-          <p:nvPr/>
-        </p:nvSpPr>
-        <p:spPr>
-          <a:xfrm>
-            <a:off x="6428232" y="3364992"/>
-            <a:ext cx="1645920" cy="475488"/>
+          <p:cNvPr id="31" name="Shape 29"/>
+          <p:cNvSpPr/>
+          <p:nvPr/>
+        </p:nvSpPr>
+        <p:spPr>
+          <a:xfrm>
+            <a:off x="5230368" y="3364992"/>
+            <a:ext cx="1554480" cy="475488"/>
           </a:xfrm>
           <a:prstGeom prst="rect">
             <a:avLst>
@@ -27173,14 +27773,14 @@
       </p:sp>
       <p:sp>
         <p:nvSpPr>
-          <p:cNvPr id="33" name="Text 31"/>
-          <p:cNvSpPr/>
-          <p:nvPr/>
-        </p:nvSpPr>
-        <p:spPr>
-          <a:xfrm>
-            <a:off x="6428232" y="3364992"/>
-            <a:ext cx="1645920" cy="475488"/>
+          <p:cNvPr id="32" name="Text 30"/>
+          <p:cNvSpPr/>
+          <p:nvPr/>
+        </p:nvSpPr>
+        <p:spPr>
+          <a:xfrm>
+            <a:off x="5230368" y="3364992"/>
+            <a:ext cx="1554480" cy="475488"/>
           </a:xfrm>
           <a:prstGeom prst="rect">
             <a:avLst/>
@@ -27204,7 +27804,7 @@
                 <a:ea typeface="Trebuchet MS" pitchFamily="34" charset="-122"/>
                 <a:cs typeface="Trebuchet MS" pitchFamily="34" charset="-120"/>
               </a:rPr>
-              <a:t>gal</a:t>
+              <a:t>i</a:t>
             </a:r>
             <a:endParaRPr lang="en-US" sz="1400" dirty="0"/>
           </a:p>
@@ -27212,7 +27812,112 @@
       </p:sp>
       <p:sp>
         <p:nvSpPr>
+          <p:cNvPr id="33" name="Text 31"/>
+          <p:cNvSpPr/>
+          <p:nvPr/>
+        </p:nvSpPr>
+        <p:spPr>
+          <a:xfrm>
+            <a:off x="6784848" y="3364992"/>
+            <a:ext cx="73152" cy="475488"/>
+          </a:xfrm>
+          <a:prstGeom prst="rect">
+            <a:avLst/>
+          </a:prstGeom>
+          <a:noFill/>
+          <a:ln/>
+        </p:spPr>
+        <p:txBody>
+          <a:bodyPr wrap="square" lIns="0" tIns="0" rIns="0" bIns="0" rtlCol="0" anchor="ctr"/>
+          <a:lstStyle/>
+          <a:p>
+            <a:pPr algn="ctr" indent="0" marL="0">
+              <a:buNone/>
+            </a:pPr>
+            <a:r>
+              <a:rPr lang="en-US" sz="1600" b="1" dirty="0">
+                <a:solidFill>
+                  <a:srgbClr val="0D9488"/>
+                </a:solidFill>
+                <a:latin typeface="Trebuchet MS" pitchFamily="34" charset="0"/>
+                <a:ea typeface="Trebuchet MS" pitchFamily="34" charset="-122"/>
+                <a:cs typeface="Trebuchet MS" pitchFamily="34" charset="-120"/>
+              </a:rPr>
+              <a:t>·</a:t>
+            </a:r>
+            <a:endParaRPr lang="en-US" sz="1600" dirty="0"/>
+          </a:p>
+        </p:txBody>
+      </p:sp>
+      <p:sp>
+        <p:nvSpPr>
           <p:cNvPr id="34" name="Shape 32"/>
+          <p:cNvSpPr/>
+          <p:nvPr/>
+        </p:nvSpPr>
+        <p:spPr>
+          <a:xfrm>
+            <a:off x="6858000" y="3364992"/>
+            <a:ext cx="1554480" cy="475488"/>
+          </a:xfrm>
+          <a:prstGeom prst="rect">
+            <a:avLst>
+              <a:gd name="adj" fmla="val 9615"/>
+            </a:avLst>
+          </a:prstGeom>
+          <a:solidFill>
+            <a:srgbClr val="FFFFFF"/>
+          </a:solidFill>
+          <a:ln w="12700">
+            <a:solidFill>
+              <a:srgbClr val="0D9488"/>
+            </a:solidFill>
+            <a:prstDash val="solid"/>
+          </a:ln>
+        </p:spPr>
+      </p:sp>
+      <p:sp>
+        <p:nvSpPr>
+          <p:cNvPr id="35" name="Text 33"/>
+          <p:cNvSpPr/>
+          <p:nvPr/>
+        </p:nvSpPr>
+        <p:spPr>
+          <a:xfrm>
+            <a:off x="6858000" y="3364992"/>
+            <a:ext cx="1554480" cy="475488"/>
+          </a:xfrm>
+          <a:prstGeom prst="rect">
+            <a:avLst/>
+          </a:prstGeom>
+          <a:noFill/>
+          <a:ln/>
+        </p:spPr>
+        <p:txBody>
+          <a:bodyPr wrap="square" lIns="0" tIns="0" rIns="0" bIns="0" rtlCol="0" anchor="ctr"/>
+          <a:lstStyle/>
+          <a:p>
+            <a:pPr algn="ctr" indent="0" marL="0">
+              <a:buNone/>
+            </a:pPr>
+            <a:r>
+              <a:rPr lang="en-US" sz="1400" b="1" dirty="0">
+                <a:solidFill>
+                  <a:srgbClr val="0D9488"/>
+                </a:solidFill>
+                <a:latin typeface="Trebuchet MS" pitchFamily="34" charset="0"/>
+                <a:ea typeface="Trebuchet MS" pitchFamily="34" charset="-122"/>
+                <a:cs typeface="Trebuchet MS" pitchFamily="34" charset="-120"/>
+              </a:rPr>
+              <a:t>ty</a:t>
+            </a:r>
+            <a:endParaRPr lang="en-US" sz="1400" dirty="0"/>
+          </a:p>
+        </p:txBody>
+      </p:sp>
+      <p:sp>
+        <p:nvSpPr>
+          <p:cNvPr id="36" name="Shape 34"/>
           <p:cNvSpPr/>
           <p:nvPr/>
         </p:nvSpPr>
@@ -27239,7 +27944,7 @@
       </p:sp>
       <p:sp>
         <p:nvSpPr>
-          <p:cNvPr id="35" name="Text 33"/>
+          <p:cNvPr id="37" name="Text 35"/>
           <p:cNvSpPr/>
           <p:nvPr/>
         </p:nvSpPr>
@@ -27278,7 +27983,7 @@
       </p:sp>
       <p:sp>
         <p:nvSpPr>
-          <p:cNvPr id="36" name="Shape 34"/>
+          <p:cNvPr id="38" name="Shape 36"/>
           <p:cNvSpPr/>
           <p:nvPr/>
         </p:nvSpPr>
@@ -27305,13 +28010,13 @@
       </p:sp>
       <p:sp>
         <p:nvSpPr>
-          <p:cNvPr id="37" name="Shape 35"/>
-          <p:cNvSpPr/>
-          <p:nvPr/>
-        </p:nvSpPr>
-        <p:spPr>
-          <a:xfrm>
-            <a:off x="2254649" y="4169664"/>
+          <p:cNvPr id="39" name="Shape 37"/>
+          <p:cNvSpPr/>
+          <p:nvPr/>
+        </p:nvSpPr>
+        <p:spPr>
+          <a:xfrm>
+            <a:off x="2023872" y="4169664"/>
             <a:ext cx="685800" cy="475488"/>
           </a:xfrm>
           <a:prstGeom prst="rect">
@@ -27332,13 +28037,13 @@
       </p:sp>
       <p:sp>
         <p:nvSpPr>
-          <p:cNvPr id="38" name="Text 36"/>
-          <p:cNvSpPr/>
-          <p:nvPr/>
-        </p:nvSpPr>
-        <p:spPr>
-          <a:xfrm>
-            <a:off x="2254649" y="4169664"/>
+          <p:cNvPr id="40" name="Text 38"/>
+          <p:cNvSpPr/>
+          <p:nvPr/>
+        </p:nvSpPr>
+        <p:spPr>
+          <a:xfrm>
+            <a:off x="2023872" y="4169664"/>
             <a:ext cx="685800" cy="475488"/>
           </a:xfrm>
           <a:prstGeom prst="rect">
@@ -27363,7 +28068,7 @@
                 <a:ea typeface="Trebuchet MS" pitchFamily="34" charset="-122"/>
                 <a:cs typeface="Trebuchet MS" pitchFamily="34" charset="-120"/>
               </a:rPr>
-              <a:t>i</a:t>
+              <a:t>l</a:t>
             </a:r>
             <a:endParaRPr lang="en-US" sz="900" dirty="0"/>
           </a:p>
@@ -27371,13 +28076,13 @@
       </p:sp>
       <p:sp>
         <p:nvSpPr>
-          <p:cNvPr id="39" name="Shape 37"/>
-          <p:cNvSpPr/>
-          <p:nvPr/>
-        </p:nvSpPr>
-        <p:spPr>
-          <a:xfrm>
-            <a:off x="3293146" y="4169664"/>
+          <p:cNvPr id="41" name="Shape 39"/>
+          <p:cNvSpPr/>
+          <p:nvPr/>
+        </p:nvSpPr>
+        <p:spPr>
+          <a:xfrm>
+            <a:off x="2831592" y="4169664"/>
             <a:ext cx="685800" cy="475488"/>
           </a:xfrm>
           <a:prstGeom prst="rect">
@@ -27398,13 +28103,13 @@
       </p:sp>
       <p:sp>
         <p:nvSpPr>
-          <p:cNvPr id="40" name="Text 38"/>
-          <p:cNvSpPr/>
-          <p:nvPr/>
-        </p:nvSpPr>
-        <p:spPr>
-          <a:xfrm>
-            <a:off x="3293146" y="4169664"/>
+          <p:cNvPr id="42" name="Text 40"/>
+          <p:cNvSpPr/>
+          <p:nvPr/>
+        </p:nvSpPr>
+        <p:spPr>
+          <a:xfrm>
+            <a:off x="2831592" y="4169664"/>
             <a:ext cx="685800" cy="475488"/>
           </a:xfrm>
           <a:prstGeom prst="rect">
@@ -27429,7 +28134,7 @@
                 <a:ea typeface="Trebuchet MS" pitchFamily="34" charset="-122"/>
                 <a:cs typeface="Trebuchet MS" pitchFamily="34" charset="-120"/>
               </a:rPr>
-              <a:t>ll</a:t>
+              <a:t>e</a:t>
             </a:r>
             <a:endParaRPr lang="en-US" sz="900" dirty="0"/>
           </a:p>
@@ -27437,13 +28142,13 @@
       </p:sp>
       <p:sp>
         <p:nvSpPr>
-          <p:cNvPr id="41" name="Shape 39"/>
-          <p:cNvSpPr/>
-          <p:nvPr/>
-        </p:nvSpPr>
-        <p:spPr>
-          <a:xfrm>
-            <a:off x="4331643" y="4169664"/>
+          <p:cNvPr id="43" name="Shape 41"/>
+          <p:cNvSpPr/>
+          <p:nvPr/>
+        </p:nvSpPr>
+        <p:spPr>
+          <a:xfrm>
+            <a:off x="3639312" y="4169664"/>
             <a:ext cx="685800" cy="475488"/>
           </a:xfrm>
           <a:prstGeom prst="rect">
@@ -27464,13 +28169,13 @@
       </p:sp>
       <p:sp>
         <p:nvSpPr>
-          <p:cNvPr id="42" name="Text 40"/>
-          <p:cNvSpPr/>
-          <p:nvPr/>
-        </p:nvSpPr>
-        <p:spPr>
-          <a:xfrm>
-            <a:off x="4331643" y="4169664"/>
+          <p:cNvPr id="44" name="Text 42"/>
+          <p:cNvSpPr/>
+          <p:nvPr/>
+        </p:nvSpPr>
+        <p:spPr>
+          <a:xfrm>
+            <a:off x="3639312" y="4169664"/>
             <a:ext cx="685800" cy="475488"/>
           </a:xfrm>
           <a:prstGeom prst="rect">
@@ -27495,7 +28200,7 @@
                 <a:ea typeface="Trebuchet MS" pitchFamily="34" charset="-122"/>
                 <a:cs typeface="Trebuchet MS" pitchFamily="34" charset="-120"/>
               </a:rPr>
-              <a:t>e</a:t>
+              <a:t>g</a:t>
             </a:r>
             <a:endParaRPr lang="en-US" sz="900" dirty="0"/>
           </a:p>
@@ -27503,13 +28208,13 @@
       </p:sp>
       <p:sp>
         <p:nvSpPr>
-          <p:cNvPr id="43" name="Shape 41"/>
-          <p:cNvSpPr/>
-          <p:nvPr/>
-        </p:nvSpPr>
-        <p:spPr>
-          <a:xfrm>
-            <a:off x="5370141" y="4169664"/>
+          <p:cNvPr id="45" name="Shape 43"/>
+          <p:cNvSpPr/>
+          <p:nvPr/>
+        </p:nvSpPr>
+        <p:spPr>
+          <a:xfrm>
+            <a:off x="4447032" y="4169664"/>
             <a:ext cx="685800" cy="475488"/>
           </a:xfrm>
           <a:prstGeom prst="rect">
@@ -27530,13 +28235,13 @@
       </p:sp>
       <p:sp>
         <p:nvSpPr>
-          <p:cNvPr id="44" name="Text 42"/>
-          <p:cNvSpPr/>
-          <p:nvPr/>
-        </p:nvSpPr>
-        <p:spPr>
-          <a:xfrm>
-            <a:off x="5370141" y="4169664"/>
+          <p:cNvPr id="46" name="Text 44"/>
+          <p:cNvSpPr/>
+          <p:nvPr/>
+        </p:nvSpPr>
+        <p:spPr>
+          <a:xfrm>
+            <a:off x="4447032" y="4169664"/>
             <a:ext cx="685800" cy="475488"/>
           </a:xfrm>
           <a:prstGeom prst="rect">
@@ -27561,7 +28266,7 @@
                 <a:ea typeface="Trebuchet MS" pitchFamily="34" charset="-122"/>
                 <a:cs typeface="Trebuchet MS" pitchFamily="34" charset="-120"/>
               </a:rPr>
-              <a:t>g</a:t>
+              <a:t>a</a:t>
             </a:r>
             <a:endParaRPr lang="en-US" sz="900" dirty="0"/>
           </a:p>
@@ -27569,13 +28274,13 @@
       </p:sp>
       <p:sp>
         <p:nvSpPr>
-          <p:cNvPr id="45" name="Shape 43"/>
-          <p:cNvSpPr/>
-          <p:nvPr/>
-        </p:nvSpPr>
-        <p:spPr>
-          <a:xfrm>
-            <a:off x="6408638" y="4169664"/>
+          <p:cNvPr id="47" name="Shape 45"/>
+          <p:cNvSpPr/>
+          <p:nvPr/>
+        </p:nvSpPr>
+        <p:spPr>
+          <a:xfrm>
+            <a:off x="5254752" y="4169664"/>
             <a:ext cx="685800" cy="475488"/>
           </a:xfrm>
           <a:prstGeom prst="rect">
@@ -27596,13 +28301,13 @@
       </p:sp>
       <p:sp>
         <p:nvSpPr>
-          <p:cNvPr id="46" name="Text 44"/>
-          <p:cNvSpPr/>
-          <p:nvPr/>
-        </p:nvSpPr>
-        <p:spPr>
-          <a:xfrm>
-            <a:off x="6408638" y="4169664"/>
+          <p:cNvPr id="48" name="Text 46"/>
+          <p:cNvSpPr/>
+          <p:nvPr/>
+        </p:nvSpPr>
+        <p:spPr>
+          <a:xfrm>
+            <a:off x="5254752" y="4169664"/>
             <a:ext cx="685800" cy="475488"/>
           </a:xfrm>
           <a:prstGeom prst="rect">
@@ -27627,7 +28332,7 @@
                 <a:ea typeface="Trebuchet MS" pitchFamily="34" charset="-122"/>
                 <a:cs typeface="Trebuchet MS" pitchFamily="34" charset="-120"/>
               </a:rPr>
-              <a:t>a</a:t>
+              <a:t>l</a:t>
             </a:r>
             <a:endParaRPr lang="en-US" sz="900" dirty="0"/>
           </a:p>
@@ -27635,13 +28340,13 @@
       </p:sp>
       <p:sp>
         <p:nvSpPr>
-          <p:cNvPr id="47" name="Shape 45"/>
-          <p:cNvSpPr/>
-          <p:nvPr/>
-        </p:nvSpPr>
-        <p:spPr>
-          <a:xfrm>
-            <a:off x="7447135" y="4169664"/>
+          <p:cNvPr id="49" name="Shape 47"/>
+          <p:cNvSpPr/>
+          <p:nvPr/>
+        </p:nvSpPr>
+        <p:spPr>
+          <a:xfrm>
+            <a:off x="6062472" y="4169664"/>
             <a:ext cx="685800" cy="475488"/>
           </a:xfrm>
           <a:prstGeom prst="rect">
@@ -27662,13 +28367,13 @@
       </p:sp>
       <p:sp>
         <p:nvSpPr>
-          <p:cNvPr id="48" name="Text 46"/>
-          <p:cNvSpPr/>
-          <p:nvPr/>
-        </p:nvSpPr>
-        <p:spPr>
-          <a:xfrm>
-            <a:off x="7447135" y="4169664"/>
+          <p:cNvPr id="50" name="Text 48"/>
+          <p:cNvSpPr/>
+          <p:nvPr/>
+        </p:nvSpPr>
+        <p:spPr>
+          <a:xfrm>
+            <a:off x="6062472" y="4169664"/>
             <a:ext cx="685800" cy="475488"/>
           </a:xfrm>
           <a:prstGeom prst="rect">
@@ -27693,7 +28398,139 @@
                 <a:ea typeface="Trebuchet MS" pitchFamily="34" charset="-122"/>
                 <a:cs typeface="Trebuchet MS" pitchFamily="34" charset="-120"/>
               </a:rPr>
-              <a:t>l</a:t>
+              <a:t>i</a:t>
+            </a:r>
+            <a:endParaRPr lang="en-US" sz="900" dirty="0"/>
+          </a:p>
+        </p:txBody>
+      </p:sp>
+      <p:sp>
+        <p:nvSpPr>
+          <p:cNvPr id="51" name="Shape 49"/>
+          <p:cNvSpPr/>
+          <p:nvPr/>
+        </p:nvSpPr>
+        <p:spPr>
+          <a:xfrm>
+            <a:off x="6870192" y="4169664"/>
+            <a:ext cx="685800" cy="475488"/>
+          </a:xfrm>
+          <a:prstGeom prst="rect">
+            <a:avLst>
+              <a:gd name="adj" fmla="val 7692"/>
+            </a:avLst>
+          </a:prstGeom>
+          <a:solidFill>
+            <a:srgbClr val="FFFFFF"/>
+          </a:solidFill>
+          <a:ln w="12700">
+            <a:solidFill>
+              <a:srgbClr val="DB2777"/>
+            </a:solidFill>
+            <a:prstDash val="solid"/>
+          </a:ln>
+        </p:spPr>
+      </p:sp>
+      <p:sp>
+        <p:nvSpPr>
+          <p:cNvPr id="52" name="Text 50"/>
+          <p:cNvSpPr/>
+          <p:nvPr/>
+        </p:nvSpPr>
+        <p:spPr>
+          <a:xfrm>
+            <a:off x="6870192" y="4169664"/>
+            <a:ext cx="685800" cy="475488"/>
+          </a:xfrm>
+          <a:prstGeom prst="rect">
+            <a:avLst/>
+          </a:prstGeom>
+          <a:noFill/>
+          <a:ln/>
+        </p:spPr>
+        <p:txBody>
+          <a:bodyPr wrap="square" lIns="0" tIns="0" rIns="0" bIns="0" rtlCol="0" anchor="ctr"/>
+          <a:lstStyle/>
+          <a:p>
+            <a:pPr algn="ctr" indent="0" marL="0">
+              <a:buNone/>
+            </a:pPr>
+            <a:r>
+              <a:rPr lang="en-US" sz="900" b="1" dirty="0">
+                <a:solidFill>
+                  <a:srgbClr val="9D174D"/>
+                </a:solidFill>
+                <a:latin typeface="Trebuchet MS" pitchFamily="34" charset="0"/>
+                <a:ea typeface="Trebuchet MS" pitchFamily="34" charset="-122"/>
+                <a:cs typeface="Trebuchet MS" pitchFamily="34" charset="-120"/>
+              </a:rPr>
+              <a:t>t</a:t>
+            </a:r>
+            <a:endParaRPr lang="en-US" sz="900" dirty="0"/>
+          </a:p>
+        </p:txBody>
+      </p:sp>
+      <p:sp>
+        <p:nvSpPr>
+          <p:cNvPr id="53" name="Shape 51"/>
+          <p:cNvSpPr/>
+          <p:nvPr/>
+        </p:nvSpPr>
+        <p:spPr>
+          <a:xfrm>
+            <a:off x="7677912" y="4169664"/>
+            <a:ext cx="685800" cy="475488"/>
+          </a:xfrm>
+          <a:prstGeom prst="rect">
+            <a:avLst>
+              <a:gd name="adj" fmla="val 7692"/>
+            </a:avLst>
+          </a:prstGeom>
+          <a:solidFill>
+            <a:srgbClr val="FFFFFF"/>
+          </a:solidFill>
+          <a:ln w="12700">
+            <a:solidFill>
+              <a:srgbClr val="DB2777"/>
+            </a:solidFill>
+            <a:prstDash val="solid"/>
+          </a:ln>
+        </p:spPr>
+      </p:sp>
+      <p:sp>
+        <p:nvSpPr>
+          <p:cNvPr id="54" name="Text 52"/>
+          <p:cNvSpPr/>
+          <p:nvPr/>
+        </p:nvSpPr>
+        <p:spPr>
+          <a:xfrm>
+            <a:off x="7677912" y="4169664"/>
+            <a:ext cx="685800" cy="475488"/>
+          </a:xfrm>
+          <a:prstGeom prst="rect">
+            <a:avLst/>
+          </a:prstGeom>
+          <a:noFill/>
+          <a:ln/>
+        </p:spPr>
+        <p:txBody>
+          <a:bodyPr wrap="square" lIns="0" tIns="0" rIns="0" bIns="0" rtlCol="0" anchor="ctr"/>
+          <a:lstStyle/>
+          <a:p>
+            <a:pPr algn="ctr" indent="0" marL="0">
+              <a:buNone/>
+            </a:pPr>
+            <a:r>
+              <a:rPr lang="en-US" sz="900" b="1" dirty="0">
+                <a:solidFill>
+                  <a:srgbClr val="9D174D"/>
+                </a:solidFill>
+                <a:latin typeface="Trebuchet MS" pitchFamily="34" charset="0"/>
+                <a:ea typeface="Trebuchet MS" pitchFamily="34" charset="-122"/>
+                <a:cs typeface="Trebuchet MS" pitchFamily="34" charset="-120"/>
+              </a:rPr>
+              <a:t>y</a:t>
             </a:r>
             <a:endParaRPr lang="en-US" sz="900" dirty="0"/>
           </a:p>
@@ -28124,7 +28961,7 @@
                 <a:ea typeface="Trebuchet MS" pitchFamily="34" charset="-122"/>
                 <a:cs typeface="Trebuchet MS" pitchFamily="34" charset="-120"/>
               </a:rPr>
-              <a:t>legalisation</a:t>
+              <a:t>legalise</a:t>
             </a:r>
             <a:endParaRPr lang="en-US" sz="2800" dirty="0"/>
           </a:p>
@@ -28951,7 +29788,7 @@
                 <a:ea typeface="Trebuchet MS" pitchFamily="34" charset="-122"/>
                 <a:cs typeface="Trebuchet MS" pitchFamily="34" charset="-120"/>
               </a:rPr>
-              <a:t>legalisation</a:t>
+              <a:t>legalise</a:t>
             </a:r>
             <a:endParaRPr lang="en-US" sz="2800" dirty="0"/>
           </a:p>
@@ -29031,7 +29868,7 @@
         </p:nvSpPr>
         <p:spPr>
           <a:xfrm>
-            <a:off x="2221992" y="2258568"/>
+            <a:off x="2938272" y="2258568"/>
             <a:ext cx="1828800" cy="292608"/>
           </a:xfrm>
           <a:prstGeom prst="rect">
@@ -29065,7 +29902,7 @@
         </p:nvSpPr>
         <p:spPr>
           <a:xfrm>
-            <a:off x="2221992" y="2258568"/>
+            <a:off x="2938272" y="2258568"/>
             <a:ext cx="1828800" cy="292608"/>
           </a:xfrm>
           <a:prstGeom prst="rect">
@@ -29104,7 +29941,7 @@
         </p:nvSpPr>
         <p:spPr>
           <a:xfrm>
-            <a:off x="2221992" y="2569464"/>
+            <a:off x="2938272" y="2569464"/>
             <a:ext cx="1828800" cy="201168"/>
           </a:xfrm>
           <a:prstGeom prst="rect">
@@ -29143,7 +29980,7 @@
         </p:nvSpPr>
         <p:spPr>
           <a:xfrm>
-            <a:off x="4370832" y="2258568"/>
+            <a:off x="5803392" y="2258568"/>
             <a:ext cx="1828800" cy="292608"/>
           </a:xfrm>
           <a:prstGeom prst="rect">
@@ -29177,7 +30014,7 @@
         </p:nvSpPr>
         <p:spPr>
           <a:xfrm>
-            <a:off x="4370832" y="2258568"/>
+            <a:off x="5803392" y="2258568"/>
             <a:ext cx="1828800" cy="292608"/>
           </a:xfrm>
           <a:prstGeom prst="rect">
@@ -29202,7 +30039,7 @@
                 <a:ea typeface="Trebuchet MS" pitchFamily="34" charset="-122"/>
                 <a:cs typeface="Trebuchet MS" pitchFamily="34" charset="-120"/>
               </a:rPr>
-              <a:t>isa</a:t>
+              <a:t>ise</a:t>
             </a:r>
             <a:endParaRPr lang="en-US" sz="1300" dirty="0"/>
           </a:p>
@@ -29216,7 +30053,7 @@
         </p:nvSpPr>
         <p:spPr>
           <a:xfrm>
-            <a:off x="4370832" y="2569464"/>
+            <a:off x="5803392" y="2569464"/>
             <a:ext cx="1828800" cy="201168"/>
           </a:xfrm>
           <a:prstGeom prst="rect">
@@ -29241,7 +30078,7 @@
                 <a:ea typeface="Calibri" pitchFamily="34" charset="-122"/>
                 <a:cs typeface="Calibri" pitchFamily="34" charset="-120"/>
               </a:rPr>
-              <a:t>to make</a:t>
+              <a:t>to make or become</a:t>
             </a:r>
             <a:endParaRPr lang="en-US" sz="850" dirty="0"/>
           </a:p>
@@ -29249,255 +30086,197 @@
       </p:sp>
       <p:sp>
         <p:nvSpPr>
-          <p:cNvPr id="22" name="Text 20"/>
-          <p:cNvSpPr/>
-          <p:nvPr/>
-        </p:nvSpPr>
-        <p:spPr>
-          <a:xfrm>
-            <a:off x="4370832" y="2752344"/>
-            <a:ext cx="1828800" cy="182880"/>
-          </a:xfrm>
-          <a:prstGeom prst="rect">
-            <a:avLst/>
-          </a:prstGeom>
-          <a:noFill/>
-          <a:ln/>
-        </p:spPr>
-        <p:txBody>
-          <a:bodyPr wrap="square" lIns="0" tIns="0" rIns="0" bIns="0" rtlCol="0" anchor="t"/>
-          <a:lstStyle/>
-          <a:p>
-            <a:pPr algn="ctr" indent="0" marL="0">
-              <a:buNone/>
-            </a:pPr>
-            <a:r>
-              <a:rPr lang="en-US" sz="700" i="1" dirty="0">
-                <a:solidFill>
-                  <a:srgbClr val="94A3B8"/>
+          <p:cNvPr id="22" name="Shape 20"/>
+          <p:cNvSpPr/>
+          <p:nvPr/>
+        </p:nvSpPr>
+        <p:spPr>
+          <a:xfrm>
+            <a:off x="365760" y="3273552"/>
+            <a:ext cx="1371600" cy="658368"/>
+          </a:xfrm>
+          <a:prstGeom prst="rect">
+            <a:avLst>
+              <a:gd name="adj" fmla="val 8333"/>
+            </a:avLst>
+          </a:prstGeom>
+          <a:solidFill>
+            <a:srgbClr val="E2E8F0"/>
+          </a:solidFill>
+          <a:ln w="12700">
+            <a:solidFill>
+              <a:srgbClr val="E2E8F0"/>
+            </a:solidFill>
+            <a:prstDash val="solid"/>
+          </a:ln>
+        </p:spPr>
+      </p:sp>
+      <p:sp>
+        <p:nvSpPr>
+          <p:cNvPr id="23" name="Text 21"/>
+          <p:cNvSpPr/>
+          <p:nvPr/>
+        </p:nvSpPr>
+        <p:spPr>
+          <a:xfrm>
+            <a:off x="365760" y="3273552"/>
+            <a:ext cx="1371600" cy="658368"/>
+          </a:xfrm>
+          <a:prstGeom prst="rect">
+            <a:avLst/>
+          </a:prstGeom>
+          <a:noFill/>
+          <a:ln/>
+        </p:spPr>
+        <p:txBody>
+          <a:bodyPr wrap="square" lIns="0" tIns="0" rIns="0" bIns="0" rtlCol="0" anchor="ctr"/>
+          <a:lstStyle/>
+          <a:p>
+            <a:pPr algn="ctr" indent="0" marL="0">
+              <a:buNone/>
+            </a:pPr>
+            <a:r>
+              <a:rPr lang="en-US" sz="1100" b="1" dirty="0">
+                <a:solidFill>
+                  <a:srgbClr val="475569"/>
+                </a:solidFill>
+                <a:latin typeface="Trebuchet MS" pitchFamily="34" charset="0"/>
+                <a:ea typeface="Trebuchet MS" pitchFamily="34" charset="-122"/>
+                <a:cs typeface="Trebuchet MS" pitchFamily="34" charset="-120"/>
+              </a:rPr>
+              <a:t>Syllables</a:t>
+            </a:r>
+            <a:endParaRPr lang="en-US" sz="1100" dirty="0"/>
+          </a:p>
+        </p:txBody>
+      </p:sp>
+      <p:sp>
+        <p:nvSpPr>
+          <p:cNvPr id="24" name="Shape 22"/>
+          <p:cNvSpPr/>
+          <p:nvPr/>
+        </p:nvSpPr>
+        <p:spPr>
+          <a:xfrm>
+            <a:off x="1874520" y="3273552"/>
+            <a:ext cx="6903720" cy="658368"/>
+          </a:xfrm>
+          <a:prstGeom prst="rect">
+            <a:avLst>
+              <a:gd name="adj" fmla="val 8333"/>
+            </a:avLst>
+          </a:prstGeom>
+          <a:solidFill>
+            <a:srgbClr val="F8FAFC"/>
+          </a:solidFill>
+          <a:ln w="12700">
+            <a:solidFill>
+              <a:srgbClr val="E2E8F0"/>
+            </a:solidFill>
+            <a:prstDash val="dash"/>
+          </a:ln>
+        </p:spPr>
+      </p:sp>
+      <p:sp>
+        <p:nvSpPr>
+          <p:cNvPr id="25" name="Text 23"/>
+          <p:cNvSpPr/>
+          <p:nvPr/>
+        </p:nvSpPr>
+        <p:spPr>
+          <a:xfrm>
+            <a:off x="1874520" y="3273552"/>
+            <a:ext cx="6903720" cy="658368"/>
+          </a:xfrm>
+          <a:prstGeom prst="rect">
+            <a:avLst/>
+          </a:prstGeom>
+          <a:noFill/>
+          <a:ln/>
+        </p:spPr>
+        <p:txBody>
+          <a:bodyPr wrap="square" rtlCol="0" anchor="ctr"/>
+          <a:lstStyle/>
+          <a:p>
+            <a:pPr algn="ctr" indent="0" marL="0">
+              <a:buNone/>
+            </a:pPr>
+            <a:r>
+              <a:rPr lang="en-US" sz="1100" i="1" dirty="0">
+                <a:solidFill>
+                  <a:srgbClr val="CBD5E1"/>
                 </a:solidFill>
                 <a:latin typeface="Calibri" pitchFamily="34" charset="0"/>
                 <a:ea typeface="Calibri" pitchFamily="34" charset="-122"/>
                 <a:cs typeface="Calibri" pitchFamily="34" charset="-120"/>
               </a:rPr>
-              <a:t>connecting vowel 'a' links base to suffix</a:t>
-            </a:r>
-            <a:endParaRPr lang="en-US" sz="700" dirty="0"/>
-          </a:p>
-        </p:txBody>
-      </p:sp>
-      <p:sp>
-        <p:nvSpPr>
-          <p:cNvPr id="23" name="Shape 21"/>
-          <p:cNvSpPr/>
-          <p:nvPr/>
-        </p:nvSpPr>
-        <p:spPr>
-          <a:xfrm>
-            <a:off x="6519672" y="2258568"/>
-            <a:ext cx="1828800" cy="292608"/>
+              <a:t>Write here...</a:t>
+            </a:r>
+            <a:endParaRPr lang="en-US" sz="1100" dirty="0"/>
+          </a:p>
+        </p:txBody>
+      </p:sp>
+      <p:sp>
+        <p:nvSpPr>
+          <p:cNvPr id="26" name="Shape 24"/>
+          <p:cNvSpPr/>
+          <p:nvPr/>
+        </p:nvSpPr>
+        <p:spPr>
+          <a:xfrm>
+            <a:off x="365760" y="4096512"/>
+            <a:ext cx="1371600" cy="804672"/>
           </a:xfrm>
           <a:prstGeom prst="rect">
             <a:avLst>
-              <a:gd name="adj" fmla="val 25000"/>
+              <a:gd name="adj" fmla="val 6818"/>
             </a:avLst>
           </a:prstGeom>
           <a:solidFill>
-            <a:srgbClr val="FCE7F3"/>
-          </a:solidFill>
-          <a:ln w="19050">
-            <a:solidFill>
-              <a:srgbClr val="DB2777"/>
-            </a:solidFill>
-            <a:prstDash val="solid"/>
-          </a:ln>
-          <a:effectLst>
-            <a:outerShdw sx="100000" sy="100000" kx="0" ky="0" algn="bl" rotWithShape="0" blurRad="101600" dist="38100" dir="8100000">
-              <a:srgbClr val="000000">
-                <a:alpha val="12000"/>
-              </a:srgbClr>
-            </a:outerShdw>
-          </a:effectLst>
-        </p:spPr>
-      </p:sp>
-      <p:sp>
-        <p:nvSpPr>
-          <p:cNvPr id="24" name="Text 22"/>
-          <p:cNvSpPr/>
-          <p:nvPr/>
-        </p:nvSpPr>
-        <p:spPr>
-          <a:xfrm>
-            <a:off x="6519672" y="2258568"/>
-            <a:ext cx="1828800" cy="292608"/>
-          </a:xfrm>
-          <a:prstGeom prst="rect">
-            <a:avLst/>
-          </a:prstGeom>
-          <a:noFill/>
-          <a:ln/>
-        </p:spPr>
-        <p:txBody>
-          <a:bodyPr wrap="square" lIns="0" tIns="0" rIns="0" bIns="0" rtlCol="0" anchor="ctr"/>
-          <a:lstStyle/>
-          <a:p>
-            <a:pPr algn="ctr" indent="0" marL="0">
-              <a:buNone/>
-            </a:pPr>
-            <a:r>
-              <a:rPr lang="en-US" sz="1300" b="1" dirty="0">
-                <a:solidFill>
-                  <a:srgbClr val="9D174D"/>
+            <a:srgbClr val="E2E8F0"/>
+          </a:solidFill>
+          <a:ln w="12700">
+            <a:solidFill>
+              <a:srgbClr val="E2E8F0"/>
+            </a:solidFill>
+            <a:prstDash val="solid"/>
+          </a:ln>
+        </p:spPr>
+      </p:sp>
+      <p:sp>
+        <p:nvSpPr>
+          <p:cNvPr id="27" name="Text 25"/>
+          <p:cNvSpPr/>
+          <p:nvPr/>
+        </p:nvSpPr>
+        <p:spPr>
+          <a:xfrm>
+            <a:off x="365760" y="4096512"/>
+            <a:ext cx="1371600" cy="804672"/>
+          </a:xfrm>
+          <a:prstGeom prst="rect">
+            <a:avLst/>
+          </a:prstGeom>
+          <a:noFill/>
+          <a:ln/>
+        </p:spPr>
+        <p:txBody>
+          <a:bodyPr wrap="square" lIns="0" tIns="0" rIns="0" bIns="0" rtlCol="0" anchor="ctr"/>
+          <a:lstStyle/>
+          <a:p>
+            <a:pPr algn="ctr" indent="0" marL="0">
+              <a:buNone/>
+            </a:pPr>
+            <a:r>
+              <a:rPr lang="en-US" sz="1100" b="1" dirty="0">
+                <a:solidFill>
+                  <a:srgbClr val="475569"/>
                 </a:solidFill>
                 <a:latin typeface="Trebuchet MS" pitchFamily="34" charset="0"/>
                 <a:ea typeface="Trebuchet MS" pitchFamily="34" charset="-122"/>
                 <a:cs typeface="Trebuchet MS" pitchFamily="34" charset="-120"/>
               </a:rPr>
-              <a:t>tion</a:t>
-            </a:r>
-            <a:endParaRPr lang="en-US" sz="1300" dirty="0"/>
-          </a:p>
-        </p:txBody>
-      </p:sp>
-      <p:sp>
-        <p:nvSpPr>
-          <p:cNvPr id="25" name="Text 23"/>
-          <p:cNvSpPr/>
-          <p:nvPr/>
-        </p:nvSpPr>
-        <p:spPr>
-          <a:xfrm>
-            <a:off x="6519672" y="2569464"/>
-            <a:ext cx="1828800" cy="201168"/>
-          </a:xfrm>
-          <a:prstGeom prst="rect">
-            <a:avLst/>
-          </a:prstGeom>
-          <a:noFill/>
-          <a:ln/>
-        </p:spPr>
-        <p:txBody>
-          <a:bodyPr wrap="square" lIns="0" tIns="0" rIns="0" bIns="0" rtlCol="0" anchor="t"/>
-          <a:lstStyle/>
-          <a:p>
-            <a:pPr algn="ctr" indent="0" marL="0">
-              <a:buNone/>
-            </a:pPr>
-            <a:r>
-              <a:rPr lang="en-US" sz="850" dirty="0">
-                <a:solidFill>
-                  <a:srgbClr val="475569"/>
-                </a:solidFill>
-                <a:latin typeface="Calibri" pitchFamily="34" charset="0"/>
-                <a:ea typeface="Calibri" pitchFamily="34" charset="-122"/>
-                <a:cs typeface="Calibri" pitchFamily="34" charset="-120"/>
-              </a:rPr>
-              <a:t>process or result</a:t>
-            </a:r>
-            <a:endParaRPr lang="en-US" sz="850" dirty="0"/>
-          </a:p>
-        </p:txBody>
-      </p:sp>
-      <p:sp>
-        <p:nvSpPr>
-          <p:cNvPr id="26" name="Text 24"/>
-          <p:cNvSpPr/>
-          <p:nvPr/>
-        </p:nvSpPr>
-        <p:spPr>
-          <a:xfrm>
-            <a:off x="6519672" y="2752344"/>
-            <a:ext cx="1828800" cy="182880"/>
-          </a:xfrm>
-          <a:prstGeom prst="rect">
-            <a:avLst/>
-          </a:prstGeom>
-          <a:noFill/>
-          <a:ln/>
-        </p:spPr>
-        <p:txBody>
-          <a:bodyPr wrap="square" lIns="0" tIns="0" rIns="0" bIns="0" rtlCol="0" anchor="t"/>
-          <a:lstStyle/>
-          <a:p>
-            <a:pPr algn="ctr" indent="0" marL="0">
-              <a:buNone/>
-            </a:pPr>
-            <a:r>
-              <a:rPr lang="en-US" sz="700" i="1" dirty="0">
-                <a:solidFill>
-                  <a:srgbClr val="94A3B8"/>
-                </a:solidFill>
-                <a:latin typeface="Calibri" pitchFamily="34" charset="0"/>
-                <a:ea typeface="Calibri" pitchFamily="34" charset="-122"/>
-                <a:cs typeface="Calibri" pitchFamily="34" charset="-120"/>
-              </a:rPr>
-              <a:t>ti makes /sh/ sound</a:t>
-            </a:r>
-            <a:endParaRPr lang="en-US" sz="700" dirty="0"/>
-          </a:p>
-        </p:txBody>
-      </p:sp>
-      <p:sp>
-        <p:nvSpPr>
-          <p:cNvPr id="27" name="Shape 25"/>
-          <p:cNvSpPr/>
-          <p:nvPr/>
-        </p:nvSpPr>
-        <p:spPr>
-          <a:xfrm>
-            <a:off x="365760" y="3273552"/>
-            <a:ext cx="1371600" cy="658368"/>
-          </a:xfrm>
-          <a:prstGeom prst="rect">
-            <a:avLst>
-              <a:gd name="adj" fmla="val 8333"/>
-            </a:avLst>
-          </a:prstGeom>
-          <a:solidFill>
-            <a:srgbClr val="E2E8F0"/>
-          </a:solidFill>
-          <a:ln w="12700">
-            <a:solidFill>
-              <a:srgbClr val="E2E8F0"/>
-            </a:solidFill>
-            <a:prstDash val="solid"/>
-          </a:ln>
-        </p:spPr>
-      </p:sp>
-      <p:sp>
-        <p:nvSpPr>
-          <p:cNvPr id="28" name="Text 26"/>
-          <p:cNvSpPr/>
-          <p:nvPr/>
-        </p:nvSpPr>
-        <p:spPr>
-          <a:xfrm>
-            <a:off x="365760" y="3273552"/>
-            <a:ext cx="1371600" cy="658368"/>
-          </a:xfrm>
-          <a:prstGeom prst="rect">
-            <a:avLst/>
-          </a:prstGeom>
-          <a:noFill/>
-          <a:ln/>
-        </p:spPr>
-        <p:txBody>
-          <a:bodyPr wrap="square" lIns="0" tIns="0" rIns="0" bIns="0" rtlCol="0" anchor="ctr"/>
-          <a:lstStyle/>
-          <a:p>
-            <a:pPr algn="ctr" indent="0" marL="0">
-              <a:buNone/>
-            </a:pPr>
-            <a:r>
-              <a:rPr lang="en-US" sz="1100" b="1" dirty="0">
-                <a:solidFill>
-                  <a:srgbClr val="475569"/>
-                </a:solidFill>
-                <a:latin typeface="Trebuchet MS" pitchFamily="34" charset="0"/>
-                <a:ea typeface="Trebuchet MS" pitchFamily="34" charset="-122"/>
-                <a:cs typeface="Trebuchet MS" pitchFamily="34" charset="-120"/>
-              </a:rPr>
-              <a:t>Syllables</a:t>
+              <a:t>Phonemes</a:t>
             </a:r>
             <a:endParaRPr lang="en-US" sz="1100" dirty="0"/>
           </a:p>
@@ -29505,80 +30284,14 @@
       </p:sp>
       <p:sp>
         <p:nvSpPr>
-          <p:cNvPr id="29" name="Shape 27"/>
-          <p:cNvSpPr/>
-          <p:nvPr/>
-        </p:nvSpPr>
-        <p:spPr>
-          <a:xfrm>
-            <a:off x="1874520" y="3273552"/>
-            <a:ext cx="6903720" cy="658368"/>
-          </a:xfrm>
-          <a:prstGeom prst="rect">
-            <a:avLst>
-              <a:gd name="adj" fmla="val 8333"/>
-            </a:avLst>
-          </a:prstGeom>
-          <a:solidFill>
-            <a:srgbClr val="F8FAFC"/>
-          </a:solidFill>
-          <a:ln w="12700">
-            <a:solidFill>
-              <a:srgbClr val="E2E8F0"/>
-            </a:solidFill>
-            <a:prstDash val="dash"/>
-          </a:ln>
-        </p:spPr>
-      </p:sp>
-      <p:sp>
-        <p:nvSpPr>
-          <p:cNvPr id="30" name="Text 28"/>
-          <p:cNvSpPr/>
-          <p:nvPr/>
-        </p:nvSpPr>
-        <p:spPr>
-          <a:xfrm>
-            <a:off x="1874520" y="3273552"/>
-            <a:ext cx="6903720" cy="658368"/>
-          </a:xfrm>
-          <a:prstGeom prst="rect">
-            <a:avLst/>
-          </a:prstGeom>
-          <a:noFill/>
-          <a:ln/>
-        </p:spPr>
-        <p:txBody>
-          <a:bodyPr wrap="square" rtlCol="0" anchor="ctr"/>
-          <a:lstStyle/>
-          <a:p>
-            <a:pPr algn="ctr" indent="0" marL="0">
-              <a:buNone/>
-            </a:pPr>
-            <a:r>
-              <a:rPr lang="en-US" sz="1100" i="1" dirty="0">
-                <a:solidFill>
-                  <a:srgbClr val="CBD5E1"/>
-                </a:solidFill>
-                <a:latin typeface="Calibri" pitchFamily="34" charset="0"/>
-                <a:ea typeface="Calibri" pitchFamily="34" charset="-122"/>
-                <a:cs typeface="Calibri" pitchFamily="34" charset="-120"/>
-              </a:rPr>
-              <a:t>Write here...</a:t>
-            </a:r>
-            <a:endParaRPr lang="en-US" sz="1100" dirty="0"/>
-          </a:p>
-        </p:txBody>
-      </p:sp>
-      <p:sp>
-        <p:nvSpPr>
-          <p:cNvPr id="31" name="Shape 29"/>
-          <p:cNvSpPr/>
-          <p:nvPr/>
-        </p:nvSpPr>
-        <p:spPr>
-          <a:xfrm>
-            <a:off x="365760" y="4096512"/>
-            <a:ext cx="1371600" cy="804672"/>
+          <p:cNvPr id="28" name="Shape 26"/>
+          <p:cNvSpPr/>
+          <p:nvPr/>
+        </p:nvSpPr>
+        <p:spPr>
+          <a:xfrm>
+            <a:off x="1874520" y="4096512"/>
+            <a:ext cx="6903720" cy="804672"/>
           </a:xfrm>
           <a:prstGeom prst="rect">
             <a:avLst>
@@ -29586,85 +30299,19 @@
             </a:avLst>
           </a:prstGeom>
           <a:solidFill>
-            <a:srgbClr val="E2E8F0"/>
+            <a:srgbClr val="F8FAFC"/>
           </a:solidFill>
           <a:ln w="12700">
             <a:solidFill>
               <a:srgbClr val="E2E8F0"/>
             </a:solidFill>
-            <a:prstDash val="solid"/>
-          </a:ln>
-        </p:spPr>
-      </p:sp>
-      <p:sp>
-        <p:nvSpPr>
-          <p:cNvPr id="32" name="Text 30"/>
-          <p:cNvSpPr/>
-          <p:nvPr/>
-        </p:nvSpPr>
-        <p:spPr>
-          <a:xfrm>
-            <a:off x="365760" y="4096512"/>
-            <a:ext cx="1371600" cy="804672"/>
-          </a:xfrm>
-          <a:prstGeom prst="rect">
-            <a:avLst/>
-          </a:prstGeom>
-          <a:noFill/>
-          <a:ln/>
-        </p:spPr>
-        <p:txBody>
-          <a:bodyPr wrap="square" lIns="0" tIns="0" rIns="0" bIns="0" rtlCol="0" anchor="ctr"/>
-          <a:lstStyle/>
-          <a:p>
-            <a:pPr algn="ctr" indent="0" marL="0">
-              <a:buNone/>
-            </a:pPr>
-            <a:r>
-              <a:rPr lang="en-US" sz="1100" b="1" dirty="0">
-                <a:solidFill>
-                  <a:srgbClr val="475569"/>
-                </a:solidFill>
-                <a:latin typeface="Trebuchet MS" pitchFamily="34" charset="0"/>
-                <a:ea typeface="Trebuchet MS" pitchFamily="34" charset="-122"/>
-                <a:cs typeface="Trebuchet MS" pitchFamily="34" charset="-120"/>
-              </a:rPr>
-              <a:t>Phonemes</a:t>
-            </a:r>
-            <a:endParaRPr lang="en-US" sz="1100" dirty="0"/>
-          </a:p>
-        </p:txBody>
-      </p:sp>
-      <p:sp>
-        <p:nvSpPr>
-          <p:cNvPr id="33" name="Shape 31"/>
-          <p:cNvSpPr/>
-          <p:nvPr/>
-        </p:nvSpPr>
-        <p:spPr>
-          <a:xfrm>
-            <a:off x="1874520" y="4096512"/>
-            <a:ext cx="6903720" cy="804672"/>
-          </a:xfrm>
-          <a:prstGeom prst="rect">
-            <a:avLst>
-              <a:gd name="adj" fmla="val 6818"/>
-            </a:avLst>
-          </a:prstGeom>
-          <a:solidFill>
-            <a:srgbClr val="F8FAFC"/>
-          </a:solidFill>
-          <a:ln w="12700">
-            <a:solidFill>
-              <a:srgbClr val="E2E8F0"/>
-            </a:solidFill>
             <a:prstDash val="dash"/>
           </a:ln>
         </p:spPr>
       </p:sp>
       <p:sp>
         <p:nvSpPr>
-          <p:cNvPr id="34" name="Text 32"/>
+          <p:cNvPr id="29" name="Text 27"/>
           <p:cNvSpPr/>
           <p:nvPr/>
         </p:nvSpPr>
@@ -30126,7 +30773,7 @@
                 <a:ea typeface="Trebuchet MS" pitchFamily="34" charset="-122"/>
                 <a:cs typeface="Trebuchet MS" pitchFamily="34" charset="-120"/>
               </a:rPr>
-              <a:t>legalisation</a:t>
+              <a:t>legalise</a:t>
             </a:r>
             <a:endParaRPr lang="en-US" sz="2800" dirty="0"/>
           </a:p>
@@ -30206,7 +30853,7 @@
         </p:nvSpPr>
         <p:spPr>
           <a:xfrm>
-            <a:off x="2221992" y="2258568"/>
+            <a:off x="2938272" y="2258568"/>
             <a:ext cx="1828800" cy="292608"/>
           </a:xfrm>
           <a:prstGeom prst="rect">
@@ -30240,7 +30887,7 @@
         </p:nvSpPr>
         <p:spPr>
           <a:xfrm>
-            <a:off x="2221992" y="2258568"/>
+            <a:off x="2938272" y="2258568"/>
             <a:ext cx="1828800" cy="292608"/>
           </a:xfrm>
           <a:prstGeom prst="rect">
@@ -30279,7 +30926,7 @@
         </p:nvSpPr>
         <p:spPr>
           <a:xfrm>
-            <a:off x="2221992" y="2569464"/>
+            <a:off x="2938272" y="2569464"/>
             <a:ext cx="1828800" cy="201168"/>
           </a:xfrm>
           <a:prstGeom prst="rect">
@@ -30318,7 +30965,7 @@
         </p:nvSpPr>
         <p:spPr>
           <a:xfrm>
-            <a:off x="4370832" y="2258568"/>
+            <a:off x="5803392" y="2258568"/>
             <a:ext cx="1828800" cy="292608"/>
           </a:xfrm>
           <a:prstGeom prst="rect">
@@ -30352,7 +30999,7 @@
         </p:nvSpPr>
         <p:spPr>
           <a:xfrm>
-            <a:off x="4370832" y="2258568"/>
+            <a:off x="5803392" y="2258568"/>
             <a:ext cx="1828800" cy="292608"/>
           </a:xfrm>
           <a:prstGeom prst="rect">
@@ -30377,7 +31024,7 @@
                 <a:ea typeface="Trebuchet MS" pitchFamily="34" charset="-122"/>
                 <a:cs typeface="Trebuchet MS" pitchFamily="34" charset="-120"/>
               </a:rPr>
-              <a:t>isa</a:t>
+              <a:t>ise</a:t>
             </a:r>
             <a:endParaRPr lang="en-US" sz="1300" dirty="0"/>
           </a:p>
@@ -30391,7 +31038,7 @@
         </p:nvSpPr>
         <p:spPr>
           <a:xfrm>
-            <a:off x="4370832" y="2569464"/>
+            <a:off x="5803392" y="2569464"/>
             <a:ext cx="1828800" cy="201168"/>
           </a:xfrm>
           <a:prstGeom prst="rect">
@@ -30416,7 +31063,7 @@
                 <a:ea typeface="Calibri" pitchFamily="34" charset="-122"/>
                 <a:cs typeface="Calibri" pitchFamily="34" charset="-120"/>
               </a:rPr>
-              <a:t>to make</a:t>
+              <a:t>to make or become</a:t>
             </a:r>
             <a:endParaRPr lang="en-US" sz="850" dirty="0"/>
           </a:p>
@@ -30424,204 +31071,80 @@
       </p:sp>
       <p:sp>
         <p:nvSpPr>
-          <p:cNvPr id="22" name="Text 20"/>
-          <p:cNvSpPr/>
-          <p:nvPr/>
-        </p:nvSpPr>
-        <p:spPr>
-          <a:xfrm>
-            <a:off x="4370832" y="2752344"/>
-            <a:ext cx="1828800" cy="182880"/>
-          </a:xfrm>
-          <a:prstGeom prst="rect">
-            <a:avLst/>
-          </a:prstGeom>
-          <a:noFill/>
-          <a:ln/>
-        </p:spPr>
-        <p:txBody>
-          <a:bodyPr wrap="square" lIns="0" tIns="0" rIns="0" bIns="0" rtlCol="0" anchor="t"/>
-          <a:lstStyle/>
-          <a:p>
-            <a:pPr algn="ctr" indent="0" marL="0">
-              <a:buNone/>
-            </a:pPr>
-            <a:r>
-              <a:rPr lang="en-US" sz="700" i="1" dirty="0">
-                <a:solidFill>
-                  <a:srgbClr val="94A3B8"/>
-                </a:solidFill>
-                <a:latin typeface="Calibri" pitchFamily="34" charset="0"/>
-                <a:ea typeface="Calibri" pitchFamily="34" charset="-122"/>
-                <a:cs typeface="Calibri" pitchFamily="34" charset="-120"/>
-              </a:rPr>
-              <a:t>connecting vowel 'a' links base to suffix</a:t>
-            </a:r>
-            <a:endParaRPr lang="en-US" sz="700" dirty="0"/>
-          </a:p>
-        </p:txBody>
-      </p:sp>
-      <p:sp>
-        <p:nvSpPr>
-          <p:cNvPr id="23" name="Shape 21"/>
-          <p:cNvSpPr/>
-          <p:nvPr/>
-        </p:nvSpPr>
-        <p:spPr>
-          <a:xfrm>
-            <a:off x="6519672" y="2258568"/>
-            <a:ext cx="1828800" cy="292608"/>
+          <p:cNvPr id="22" name="Shape 20"/>
+          <p:cNvSpPr/>
+          <p:nvPr/>
+        </p:nvSpPr>
+        <p:spPr>
+          <a:xfrm>
+            <a:off x="365760" y="3273552"/>
+            <a:ext cx="1371600" cy="658368"/>
           </a:xfrm>
           <a:prstGeom prst="rect">
             <a:avLst>
-              <a:gd name="adj" fmla="val 25000"/>
+              <a:gd name="adj" fmla="val 8333"/>
             </a:avLst>
           </a:prstGeom>
           <a:solidFill>
-            <a:srgbClr val="FCE7F3"/>
-          </a:solidFill>
-          <a:ln w="19050">
-            <a:solidFill>
-              <a:srgbClr val="DB2777"/>
-            </a:solidFill>
-            <a:prstDash val="solid"/>
-          </a:ln>
-          <a:effectLst>
-            <a:outerShdw sx="100000" sy="100000" kx="0" ky="0" algn="bl" rotWithShape="0" blurRad="101600" dist="38100" dir="8100000">
-              <a:srgbClr val="000000">
-                <a:alpha val="12000"/>
-              </a:srgbClr>
-            </a:outerShdw>
-          </a:effectLst>
-        </p:spPr>
-      </p:sp>
-      <p:sp>
-        <p:nvSpPr>
-          <p:cNvPr id="24" name="Text 22"/>
-          <p:cNvSpPr/>
-          <p:nvPr/>
-        </p:nvSpPr>
-        <p:spPr>
-          <a:xfrm>
-            <a:off x="6519672" y="2258568"/>
-            <a:ext cx="1828800" cy="292608"/>
-          </a:xfrm>
-          <a:prstGeom prst="rect">
-            <a:avLst/>
-          </a:prstGeom>
-          <a:noFill/>
-          <a:ln/>
-        </p:spPr>
-        <p:txBody>
-          <a:bodyPr wrap="square" lIns="0" tIns="0" rIns="0" bIns="0" rtlCol="0" anchor="ctr"/>
-          <a:lstStyle/>
-          <a:p>
-            <a:pPr algn="ctr" indent="0" marL="0">
-              <a:buNone/>
-            </a:pPr>
-            <a:r>
-              <a:rPr lang="en-US" sz="1300" b="1" dirty="0">
-                <a:solidFill>
-                  <a:srgbClr val="9D174D"/>
+            <a:srgbClr val="E2E8F0"/>
+          </a:solidFill>
+          <a:ln w="12700">
+            <a:solidFill>
+              <a:srgbClr val="E2E8F0"/>
+            </a:solidFill>
+            <a:prstDash val="solid"/>
+          </a:ln>
+        </p:spPr>
+      </p:sp>
+      <p:sp>
+        <p:nvSpPr>
+          <p:cNvPr id="23" name="Text 21"/>
+          <p:cNvSpPr/>
+          <p:nvPr/>
+        </p:nvSpPr>
+        <p:spPr>
+          <a:xfrm>
+            <a:off x="365760" y="3273552"/>
+            <a:ext cx="1371600" cy="658368"/>
+          </a:xfrm>
+          <a:prstGeom prst="rect">
+            <a:avLst/>
+          </a:prstGeom>
+          <a:noFill/>
+          <a:ln/>
+        </p:spPr>
+        <p:txBody>
+          <a:bodyPr wrap="square" lIns="0" tIns="0" rIns="0" bIns="0" rtlCol="0" anchor="ctr"/>
+          <a:lstStyle/>
+          <a:p>
+            <a:pPr algn="ctr" indent="0" marL="0">
+              <a:buNone/>
+            </a:pPr>
+            <a:r>
+              <a:rPr lang="en-US" sz="1100" b="1" dirty="0">
+                <a:solidFill>
+                  <a:srgbClr val="475569"/>
                 </a:solidFill>
                 <a:latin typeface="Trebuchet MS" pitchFamily="34" charset="0"/>
                 <a:ea typeface="Trebuchet MS" pitchFamily="34" charset="-122"/>
                 <a:cs typeface="Trebuchet MS" pitchFamily="34" charset="-120"/>
               </a:rPr>
-              <a:t>tion</a:t>
-            </a:r>
-            <a:endParaRPr lang="en-US" sz="1300" dirty="0"/>
-          </a:p>
-        </p:txBody>
-      </p:sp>
-      <p:sp>
-        <p:nvSpPr>
-          <p:cNvPr id="25" name="Text 23"/>
-          <p:cNvSpPr/>
-          <p:nvPr/>
-        </p:nvSpPr>
-        <p:spPr>
-          <a:xfrm>
-            <a:off x="6519672" y="2569464"/>
-            <a:ext cx="1828800" cy="201168"/>
-          </a:xfrm>
-          <a:prstGeom prst="rect">
-            <a:avLst/>
-          </a:prstGeom>
-          <a:noFill/>
-          <a:ln/>
-        </p:spPr>
-        <p:txBody>
-          <a:bodyPr wrap="square" lIns="0" tIns="0" rIns="0" bIns="0" rtlCol="0" anchor="t"/>
-          <a:lstStyle/>
-          <a:p>
-            <a:pPr algn="ctr" indent="0" marL="0">
-              <a:buNone/>
-            </a:pPr>
-            <a:r>
-              <a:rPr lang="en-US" sz="850" dirty="0">
-                <a:solidFill>
-                  <a:srgbClr val="475569"/>
-                </a:solidFill>
-                <a:latin typeface="Calibri" pitchFamily="34" charset="0"/>
-                <a:ea typeface="Calibri" pitchFamily="34" charset="-122"/>
-                <a:cs typeface="Calibri" pitchFamily="34" charset="-120"/>
-              </a:rPr>
-              <a:t>process or result</a:t>
-            </a:r>
-            <a:endParaRPr lang="en-US" sz="850" dirty="0"/>
-          </a:p>
-        </p:txBody>
-      </p:sp>
-      <p:sp>
-        <p:nvSpPr>
-          <p:cNvPr id="26" name="Text 24"/>
-          <p:cNvSpPr/>
-          <p:nvPr/>
-        </p:nvSpPr>
-        <p:spPr>
-          <a:xfrm>
-            <a:off x="6519672" y="2752344"/>
-            <a:ext cx="1828800" cy="182880"/>
-          </a:xfrm>
-          <a:prstGeom prst="rect">
-            <a:avLst/>
-          </a:prstGeom>
-          <a:noFill/>
-          <a:ln/>
-        </p:spPr>
-        <p:txBody>
-          <a:bodyPr wrap="square" lIns="0" tIns="0" rIns="0" bIns="0" rtlCol="0" anchor="t"/>
-          <a:lstStyle/>
-          <a:p>
-            <a:pPr algn="ctr" indent="0" marL="0">
-              <a:buNone/>
-            </a:pPr>
-            <a:r>
-              <a:rPr lang="en-US" sz="700" i="1" dirty="0">
-                <a:solidFill>
-                  <a:srgbClr val="94A3B8"/>
-                </a:solidFill>
-                <a:latin typeface="Calibri" pitchFamily="34" charset="0"/>
-                <a:ea typeface="Calibri" pitchFamily="34" charset="-122"/>
-                <a:cs typeface="Calibri" pitchFamily="34" charset="-120"/>
-              </a:rPr>
-              <a:t>ti makes /sh/ sound</a:t>
-            </a:r>
-            <a:endParaRPr lang="en-US" sz="700" dirty="0"/>
-          </a:p>
-        </p:txBody>
-      </p:sp>
-      <p:sp>
-        <p:nvSpPr>
-          <p:cNvPr id="27" name="Shape 25"/>
-          <p:cNvSpPr/>
-          <p:nvPr/>
-        </p:nvSpPr>
-        <p:spPr>
-          <a:xfrm>
-            <a:off x="365760" y="3273552"/>
-            <a:ext cx="1371600" cy="658368"/>
+              <a:t>Syllables</a:t>
+            </a:r>
+            <a:endParaRPr lang="en-US" sz="1100" dirty="0"/>
+          </a:p>
+        </p:txBody>
+      </p:sp>
+      <p:sp>
+        <p:nvSpPr>
+          <p:cNvPr id="24" name="Shape 22"/>
+          <p:cNvSpPr/>
+          <p:nvPr/>
+        </p:nvSpPr>
+        <p:spPr>
+          <a:xfrm>
+            <a:off x="1874520" y="3273552"/>
+            <a:ext cx="6903720" cy="658368"/>
           </a:xfrm>
           <a:prstGeom prst="rect">
             <a:avLst>
@@ -30629,92 +31152,131 @@
             </a:avLst>
           </a:prstGeom>
           <a:solidFill>
-            <a:srgbClr val="E2E8F0"/>
-          </a:solidFill>
-          <a:ln w="12700">
-            <a:solidFill>
-              <a:srgbClr val="E2E8F0"/>
-            </a:solidFill>
-            <a:prstDash val="solid"/>
-          </a:ln>
-        </p:spPr>
-      </p:sp>
-      <p:sp>
-        <p:nvSpPr>
-          <p:cNvPr id="28" name="Text 26"/>
-          <p:cNvSpPr/>
-          <p:nvPr/>
-        </p:nvSpPr>
-        <p:spPr>
-          <a:xfrm>
-            <a:off x="365760" y="3273552"/>
-            <a:ext cx="1371600" cy="658368"/>
-          </a:xfrm>
-          <a:prstGeom prst="rect">
-            <a:avLst/>
-          </a:prstGeom>
-          <a:noFill/>
-          <a:ln/>
-        </p:spPr>
-        <p:txBody>
-          <a:bodyPr wrap="square" lIns="0" tIns="0" rIns="0" bIns="0" rtlCol="0" anchor="ctr"/>
-          <a:lstStyle/>
-          <a:p>
-            <a:pPr algn="ctr" indent="0" marL="0">
-              <a:buNone/>
-            </a:pPr>
-            <a:r>
-              <a:rPr lang="en-US" sz="1100" b="1" dirty="0">
-                <a:solidFill>
-                  <a:srgbClr val="475569"/>
+            <a:srgbClr val="CCFBF1"/>
+          </a:solidFill>
+          <a:ln w="12700">
+            <a:solidFill>
+              <a:srgbClr val="0D9488"/>
+            </a:solidFill>
+            <a:prstDash val="solid"/>
+          </a:ln>
+        </p:spPr>
+      </p:sp>
+      <p:sp>
+        <p:nvSpPr>
+          <p:cNvPr id="25" name="Shape 23"/>
+          <p:cNvSpPr/>
+          <p:nvPr/>
+        </p:nvSpPr>
+        <p:spPr>
+          <a:xfrm>
+            <a:off x="2313432" y="3364992"/>
+            <a:ext cx="1645920" cy="475488"/>
+          </a:xfrm>
+          <a:prstGeom prst="rect">
+            <a:avLst>
+              <a:gd name="adj" fmla="val 9615"/>
+            </a:avLst>
+          </a:prstGeom>
+          <a:solidFill>
+            <a:srgbClr val="FFFFFF"/>
+          </a:solidFill>
+          <a:ln w="12700">
+            <a:solidFill>
+              <a:srgbClr val="0D9488"/>
+            </a:solidFill>
+            <a:prstDash val="solid"/>
+          </a:ln>
+        </p:spPr>
+      </p:sp>
+      <p:sp>
+        <p:nvSpPr>
+          <p:cNvPr id="26" name="Text 24"/>
+          <p:cNvSpPr/>
+          <p:nvPr/>
+        </p:nvSpPr>
+        <p:spPr>
+          <a:xfrm>
+            <a:off x="2313432" y="3364992"/>
+            <a:ext cx="1645920" cy="475488"/>
+          </a:xfrm>
+          <a:prstGeom prst="rect">
+            <a:avLst/>
+          </a:prstGeom>
+          <a:noFill/>
+          <a:ln/>
+        </p:spPr>
+        <p:txBody>
+          <a:bodyPr wrap="square" lIns="0" tIns="0" rIns="0" bIns="0" rtlCol="0" anchor="ctr"/>
+          <a:lstStyle/>
+          <a:p>
+            <a:pPr algn="ctr" indent="0" marL="0">
+              <a:buNone/>
+            </a:pPr>
+            <a:r>
+              <a:rPr lang="en-US" sz="1400" b="1" dirty="0">
+                <a:solidFill>
+                  <a:srgbClr val="0D9488"/>
                 </a:solidFill>
                 <a:latin typeface="Trebuchet MS" pitchFamily="34" charset="0"/>
                 <a:ea typeface="Trebuchet MS" pitchFamily="34" charset="-122"/>
                 <a:cs typeface="Trebuchet MS" pitchFamily="34" charset="-120"/>
               </a:rPr>
-              <a:t>Syllables</a:t>
-            </a:r>
-            <a:endParaRPr lang="en-US" sz="1100" dirty="0"/>
-          </a:p>
-        </p:txBody>
-      </p:sp>
-      <p:sp>
-        <p:nvSpPr>
-          <p:cNvPr id="29" name="Shape 27"/>
-          <p:cNvSpPr/>
-          <p:nvPr/>
-        </p:nvSpPr>
-        <p:spPr>
-          <a:xfrm>
-            <a:off x="1874520" y="3273552"/>
-            <a:ext cx="6903720" cy="658368"/>
-          </a:xfrm>
-          <a:prstGeom prst="rect">
-            <a:avLst>
-              <a:gd name="adj" fmla="val 8333"/>
-            </a:avLst>
-          </a:prstGeom>
-          <a:solidFill>
-            <a:srgbClr val="CCFBF1"/>
-          </a:solidFill>
-          <a:ln w="12700">
-            <a:solidFill>
-              <a:srgbClr val="0D9488"/>
-            </a:solidFill>
-            <a:prstDash val="solid"/>
-          </a:ln>
-        </p:spPr>
-      </p:sp>
-      <p:sp>
-        <p:nvSpPr>
-          <p:cNvPr id="30" name="Shape 28"/>
-          <p:cNvSpPr/>
-          <p:nvPr/>
-        </p:nvSpPr>
-        <p:spPr>
-          <a:xfrm>
-            <a:off x="1978152" y="3364992"/>
-            <a:ext cx="1225296" cy="475488"/>
+              <a:t>le</a:t>
+            </a:r>
+            <a:endParaRPr lang="en-US" sz="1400" dirty="0"/>
+          </a:p>
+        </p:txBody>
+      </p:sp>
+      <p:sp>
+        <p:nvSpPr>
+          <p:cNvPr id="27" name="Text 25"/>
+          <p:cNvSpPr/>
+          <p:nvPr/>
+        </p:nvSpPr>
+        <p:spPr>
+          <a:xfrm>
+            <a:off x="3959352" y="3364992"/>
+            <a:ext cx="411480" cy="475488"/>
+          </a:xfrm>
+          <a:prstGeom prst="rect">
+            <a:avLst/>
+          </a:prstGeom>
+          <a:noFill/>
+          <a:ln/>
+        </p:spPr>
+        <p:txBody>
+          <a:bodyPr wrap="square" lIns="0" tIns="0" rIns="0" bIns="0" rtlCol="0" anchor="ctr"/>
+          <a:lstStyle/>
+          <a:p>
+            <a:pPr algn="ctr" indent="0" marL="0">
+              <a:buNone/>
+            </a:pPr>
+            <a:r>
+              <a:rPr lang="en-US" sz="1600" b="1" dirty="0">
+                <a:solidFill>
+                  <a:srgbClr val="0D9488"/>
+                </a:solidFill>
+                <a:latin typeface="Trebuchet MS" pitchFamily="34" charset="0"/>
+                <a:ea typeface="Trebuchet MS" pitchFamily="34" charset="-122"/>
+                <a:cs typeface="Trebuchet MS" pitchFamily="34" charset="-120"/>
+              </a:rPr>
+              <a:t>·</a:t>
+            </a:r>
+            <a:endParaRPr lang="en-US" sz="1600" dirty="0"/>
+          </a:p>
+        </p:txBody>
+      </p:sp>
+      <p:sp>
+        <p:nvSpPr>
+          <p:cNvPr id="28" name="Shape 26"/>
+          <p:cNvSpPr/>
+          <p:nvPr/>
+        </p:nvSpPr>
+        <p:spPr>
+          <a:xfrm>
+            <a:off x="4370832" y="3364992"/>
+            <a:ext cx="1645920" cy="475488"/>
           </a:xfrm>
           <a:prstGeom prst="rect">
             <a:avLst>
@@ -30734,14 +31296,14 @@
       </p:sp>
       <p:sp>
         <p:nvSpPr>
-          <p:cNvPr id="31" name="Text 29"/>
-          <p:cNvSpPr/>
-          <p:nvPr/>
-        </p:nvSpPr>
-        <p:spPr>
-          <a:xfrm>
-            <a:off x="1978152" y="3364992"/>
-            <a:ext cx="1225296" cy="475488"/>
+          <p:cNvPr id="29" name="Text 27"/>
+          <p:cNvSpPr/>
+          <p:nvPr/>
+        </p:nvSpPr>
+        <p:spPr>
+          <a:xfrm>
+            <a:off x="4370832" y="3364992"/>
+            <a:ext cx="1645920" cy="475488"/>
           </a:xfrm>
           <a:prstGeom prst="rect">
             <a:avLst/>
@@ -30765,7 +31327,7 @@
                 <a:ea typeface="Trebuchet MS" pitchFamily="34" charset="-122"/>
                 <a:cs typeface="Trebuchet MS" pitchFamily="34" charset="-120"/>
               </a:rPr>
-              <a:t>le</a:t>
+              <a:t>gal</a:t>
             </a:r>
             <a:endParaRPr lang="en-US" sz="1400" dirty="0"/>
           </a:p>
@@ -30773,14 +31335,14 @@
       </p:sp>
       <p:sp>
         <p:nvSpPr>
-          <p:cNvPr id="32" name="Text 30"/>
-          <p:cNvSpPr/>
-          <p:nvPr/>
-        </p:nvSpPr>
-        <p:spPr>
-          <a:xfrm>
-            <a:off x="3203448" y="3364992"/>
-            <a:ext cx="76200" cy="475488"/>
+          <p:cNvPr id="30" name="Text 28"/>
+          <p:cNvSpPr/>
+          <p:nvPr/>
+        </p:nvSpPr>
+        <p:spPr>
+          <a:xfrm>
+            <a:off x="6016752" y="3364992"/>
+            <a:ext cx="411480" cy="475488"/>
           </a:xfrm>
           <a:prstGeom prst="rect">
             <a:avLst/>
@@ -30812,14 +31374,14 @@
       </p:sp>
       <p:sp>
         <p:nvSpPr>
-          <p:cNvPr id="33" name="Shape 31"/>
-          <p:cNvSpPr/>
-          <p:nvPr/>
-        </p:nvSpPr>
-        <p:spPr>
-          <a:xfrm>
-            <a:off x="3279648" y="3364992"/>
-            <a:ext cx="1225296" cy="475488"/>
+          <p:cNvPr id="31" name="Shape 29"/>
+          <p:cNvSpPr/>
+          <p:nvPr/>
+        </p:nvSpPr>
+        <p:spPr>
+          <a:xfrm>
+            <a:off x="6428232" y="3364992"/>
+            <a:ext cx="1645920" cy="475488"/>
           </a:xfrm>
           <a:prstGeom prst="rect">
             <a:avLst>
@@ -30839,14 +31401,14 @@
       </p:sp>
       <p:sp>
         <p:nvSpPr>
-          <p:cNvPr id="34" name="Text 32"/>
-          <p:cNvSpPr/>
-          <p:nvPr/>
-        </p:nvSpPr>
-        <p:spPr>
-          <a:xfrm>
-            <a:off x="3279648" y="3364992"/>
-            <a:ext cx="1225296" cy="475488"/>
+          <p:cNvPr id="32" name="Text 30"/>
+          <p:cNvSpPr/>
+          <p:nvPr/>
+        </p:nvSpPr>
+        <p:spPr>
+          <a:xfrm>
+            <a:off x="6428232" y="3364992"/>
+            <a:ext cx="1645920" cy="475488"/>
           </a:xfrm>
           <a:prstGeom prst="rect">
             <a:avLst/>
@@ -30870,7 +31432,7 @@
                 <a:ea typeface="Trebuchet MS" pitchFamily="34" charset="-122"/>
                 <a:cs typeface="Trebuchet MS" pitchFamily="34" charset="-120"/>
               </a:rPr>
-              <a:t>gal</a:t>
+              <a:t>ise</a:t>
             </a:r>
             <a:endParaRPr lang="en-US" sz="1400" dirty="0"/>
           </a:p>
@@ -30878,329 +31440,80 @@
       </p:sp>
       <p:sp>
         <p:nvSpPr>
-          <p:cNvPr id="35" name="Text 33"/>
-          <p:cNvSpPr/>
-          <p:nvPr/>
-        </p:nvSpPr>
-        <p:spPr>
-          <a:xfrm>
-            <a:off x="4504944" y="3364992"/>
-            <a:ext cx="76200" cy="475488"/>
-          </a:xfrm>
-          <a:prstGeom prst="rect">
-            <a:avLst/>
-          </a:prstGeom>
-          <a:noFill/>
-          <a:ln/>
-        </p:spPr>
-        <p:txBody>
-          <a:bodyPr wrap="square" lIns="0" tIns="0" rIns="0" bIns="0" rtlCol="0" anchor="ctr"/>
-          <a:lstStyle/>
-          <a:p>
-            <a:pPr algn="ctr" indent="0" marL="0">
-              <a:buNone/>
-            </a:pPr>
-            <a:r>
-              <a:rPr lang="en-US" sz="1600" b="1" dirty="0">
-                <a:solidFill>
-                  <a:srgbClr val="0D9488"/>
+          <p:cNvPr id="33" name="Shape 31"/>
+          <p:cNvSpPr/>
+          <p:nvPr/>
+        </p:nvSpPr>
+        <p:spPr>
+          <a:xfrm>
+            <a:off x="365760" y="4096512"/>
+            <a:ext cx="1371600" cy="804672"/>
+          </a:xfrm>
+          <a:prstGeom prst="rect">
+            <a:avLst>
+              <a:gd name="adj" fmla="val 6818"/>
+            </a:avLst>
+          </a:prstGeom>
+          <a:solidFill>
+            <a:srgbClr val="E2E8F0"/>
+          </a:solidFill>
+          <a:ln w="12700">
+            <a:solidFill>
+              <a:srgbClr val="E2E8F0"/>
+            </a:solidFill>
+            <a:prstDash val="solid"/>
+          </a:ln>
+        </p:spPr>
+      </p:sp>
+      <p:sp>
+        <p:nvSpPr>
+          <p:cNvPr id="34" name="Text 32"/>
+          <p:cNvSpPr/>
+          <p:nvPr/>
+        </p:nvSpPr>
+        <p:spPr>
+          <a:xfrm>
+            <a:off x="365760" y="4096512"/>
+            <a:ext cx="1371600" cy="804672"/>
+          </a:xfrm>
+          <a:prstGeom prst="rect">
+            <a:avLst/>
+          </a:prstGeom>
+          <a:noFill/>
+          <a:ln/>
+        </p:spPr>
+        <p:txBody>
+          <a:bodyPr wrap="square" lIns="0" tIns="0" rIns="0" bIns="0" rtlCol="0" anchor="ctr"/>
+          <a:lstStyle/>
+          <a:p>
+            <a:pPr algn="ctr" indent="0" marL="0">
+              <a:buNone/>
+            </a:pPr>
+            <a:r>
+              <a:rPr lang="en-US" sz="1100" b="1" dirty="0">
+                <a:solidFill>
+                  <a:srgbClr val="475569"/>
                 </a:solidFill>
                 <a:latin typeface="Trebuchet MS" pitchFamily="34" charset="0"/>
                 <a:ea typeface="Trebuchet MS" pitchFamily="34" charset="-122"/>
                 <a:cs typeface="Trebuchet MS" pitchFamily="34" charset="-120"/>
               </a:rPr>
-              <a:t>·</a:t>
-            </a:r>
-            <a:endParaRPr lang="en-US" sz="1600" dirty="0"/>
-          </a:p>
-        </p:txBody>
-      </p:sp>
-      <p:sp>
-        <p:nvSpPr>
-          <p:cNvPr id="36" name="Shape 34"/>
-          <p:cNvSpPr/>
-          <p:nvPr/>
-        </p:nvSpPr>
-        <p:spPr>
-          <a:xfrm>
-            <a:off x="4581144" y="3364992"/>
-            <a:ext cx="1225296" cy="475488"/>
-          </a:xfrm>
-          <a:prstGeom prst="rect">
-            <a:avLst>
-              <a:gd name="adj" fmla="val 9615"/>
-            </a:avLst>
-          </a:prstGeom>
-          <a:solidFill>
-            <a:srgbClr val="FFFFFF"/>
-          </a:solidFill>
-          <a:ln w="12700">
-            <a:solidFill>
-              <a:srgbClr val="0D9488"/>
-            </a:solidFill>
-            <a:prstDash val="solid"/>
-          </a:ln>
-        </p:spPr>
-      </p:sp>
-      <p:sp>
-        <p:nvSpPr>
-          <p:cNvPr id="37" name="Text 35"/>
-          <p:cNvSpPr/>
-          <p:nvPr/>
-        </p:nvSpPr>
-        <p:spPr>
-          <a:xfrm>
-            <a:off x="4581144" y="3364992"/>
-            <a:ext cx="1225296" cy="475488"/>
-          </a:xfrm>
-          <a:prstGeom prst="rect">
-            <a:avLst/>
-          </a:prstGeom>
-          <a:noFill/>
-          <a:ln/>
-        </p:spPr>
-        <p:txBody>
-          <a:bodyPr wrap="square" lIns="0" tIns="0" rIns="0" bIns="0" rtlCol="0" anchor="ctr"/>
-          <a:lstStyle/>
-          <a:p>
-            <a:pPr algn="ctr" indent="0" marL="0">
-              <a:buNone/>
-            </a:pPr>
-            <a:r>
-              <a:rPr lang="en-US" sz="1400" b="1" dirty="0">
-                <a:solidFill>
-                  <a:srgbClr val="0D9488"/>
-                </a:solidFill>
-                <a:latin typeface="Trebuchet MS" pitchFamily="34" charset="0"/>
-                <a:ea typeface="Trebuchet MS" pitchFamily="34" charset="-122"/>
-                <a:cs typeface="Trebuchet MS" pitchFamily="34" charset="-120"/>
-              </a:rPr>
-              <a:t>i</a:t>
-            </a:r>
-            <a:endParaRPr lang="en-US" sz="1400" dirty="0"/>
-          </a:p>
-        </p:txBody>
-      </p:sp>
-      <p:sp>
-        <p:nvSpPr>
-          <p:cNvPr id="38" name="Text 36"/>
-          <p:cNvSpPr/>
-          <p:nvPr/>
-        </p:nvSpPr>
-        <p:spPr>
-          <a:xfrm>
-            <a:off x="5806440" y="3364992"/>
-            <a:ext cx="76200" cy="475488"/>
-          </a:xfrm>
-          <a:prstGeom prst="rect">
-            <a:avLst/>
-          </a:prstGeom>
-          <a:noFill/>
-          <a:ln/>
-        </p:spPr>
-        <p:txBody>
-          <a:bodyPr wrap="square" lIns="0" tIns="0" rIns="0" bIns="0" rtlCol="0" anchor="ctr"/>
-          <a:lstStyle/>
-          <a:p>
-            <a:pPr algn="ctr" indent="0" marL="0">
-              <a:buNone/>
-            </a:pPr>
-            <a:r>
-              <a:rPr lang="en-US" sz="1600" b="1" dirty="0">
-                <a:solidFill>
-                  <a:srgbClr val="0D9488"/>
-                </a:solidFill>
-                <a:latin typeface="Trebuchet MS" pitchFamily="34" charset="0"/>
-                <a:ea typeface="Trebuchet MS" pitchFamily="34" charset="-122"/>
-                <a:cs typeface="Trebuchet MS" pitchFamily="34" charset="-120"/>
-              </a:rPr>
-              <a:t>·</a:t>
-            </a:r>
-            <a:endParaRPr lang="en-US" sz="1600" dirty="0"/>
-          </a:p>
-        </p:txBody>
-      </p:sp>
-      <p:sp>
-        <p:nvSpPr>
-          <p:cNvPr id="39" name="Shape 37"/>
-          <p:cNvSpPr/>
-          <p:nvPr/>
-        </p:nvSpPr>
-        <p:spPr>
-          <a:xfrm>
-            <a:off x="5882640" y="3364992"/>
-            <a:ext cx="1225296" cy="475488"/>
-          </a:xfrm>
-          <a:prstGeom prst="rect">
-            <a:avLst>
-              <a:gd name="adj" fmla="val 9615"/>
-            </a:avLst>
-          </a:prstGeom>
-          <a:solidFill>
-            <a:srgbClr val="FFFFFF"/>
-          </a:solidFill>
-          <a:ln w="12700">
-            <a:solidFill>
-              <a:srgbClr val="0D9488"/>
-            </a:solidFill>
-            <a:prstDash val="solid"/>
-          </a:ln>
-        </p:spPr>
-      </p:sp>
-      <p:sp>
-        <p:nvSpPr>
-          <p:cNvPr id="40" name="Text 38"/>
-          <p:cNvSpPr/>
-          <p:nvPr/>
-        </p:nvSpPr>
-        <p:spPr>
-          <a:xfrm>
-            <a:off x="5882640" y="3364992"/>
-            <a:ext cx="1225296" cy="475488"/>
-          </a:xfrm>
-          <a:prstGeom prst="rect">
-            <a:avLst/>
-          </a:prstGeom>
-          <a:noFill/>
-          <a:ln/>
-        </p:spPr>
-        <p:txBody>
-          <a:bodyPr wrap="square" lIns="0" tIns="0" rIns="0" bIns="0" rtlCol="0" anchor="ctr"/>
-          <a:lstStyle/>
-          <a:p>
-            <a:pPr algn="ctr" indent="0" marL="0">
-              <a:buNone/>
-            </a:pPr>
-            <a:r>
-              <a:rPr lang="en-US" sz="1400" b="1" dirty="0">
-                <a:solidFill>
-                  <a:srgbClr val="0D9488"/>
-                </a:solidFill>
-                <a:latin typeface="Trebuchet MS" pitchFamily="34" charset="0"/>
-                <a:ea typeface="Trebuchet MS" pitchFamily="34" charset="-122"/>
-                <a:cs typeface="Trebuchet MS" pitchFamily="34" charset="-120"/>
-              </a:rPr>
-              <a:t>sa</a:t>
-            </a:r>
-            <a:endParaRPr lang="en-US" sz="1400" dirty="0"/>
-          </a:p>
-        </p:txBody>
-      </p:sp>
-      <p:sp>
-        <p:nvSpPr>
-          <p:cNvPr id="41" name="Text 39"/>
-          <p:cNvSpPr/>
-          <p:nvPr/>
-        </p:nvSpPr>
-        <p:spPr>
-          <a:xfrm>
-            <a:off x="7107936" y="3364992"/>
-            <a:ext cx="76200" cy="475488"/>
-          </a:xfrm>
-          <a:prstGeom prst="rect">
-            <a:avLst/>
-          </a:prstGeom>
-          <a:noFill/>
-          <a:ln/>
-        </p:spPr>
-        <p:txBody>
-          <a:bodyPr wrap="square" lIns="0" tIns="0" rIns="0" bIns="0" rtlCol="0" anchor="ctr"/>
-          <a:lstStyle/>
-          <a:p>
-            <a:pPr algn="ctr" indent="0" marL="0">
-              <a:buNone/>
-            </a:pPr>
-            <a:r>
-              <a:rPr lang="en-US" sz="1600" b="1" dirty="0">
-                <a:solidFill>
-                  <a:srgbClr val="0D9488"/>
-                </a:solidFill>
-                <a:latin typeface="Trebuchet MS" pitchFamily="34" charset="0"/>
-                <a:ea typeface="Trebuchet MS" pitchFamily="34" charset="-122"/>
-                <a:cs typeface="Trebuchet MS" pitchFamily="34" charset="-120"/>
-              </a:rPr>
-              <a:t>·</a:t>
-            </a:r>
-            <a:endParaRPr lang="en-US" sz="1600" dirty="0"/>
-          </a:p>
-        </p:txBody>
-      </p:sp>
-      <p:sp>
-        <p:nvSpPr>
-          <p:cNvPr id="42" name="Shape 40"/>
-          <p:cNvSpPr/>
-          <p:nvPr/>
-        </p:nvSpPr>
-        <p:spPr>
-          <a:xfrm>
-            <a:off x="7184136" y="3364992"/>
-            <a:ext cx="1225296" cy="475488"/>
-          </a:xfrm>
-          <a:prstGeom prst="rect">
-            <a:avLst>
-              <a:gd name="adj" fmla="val 9615"/>
-            </a:avLst>
-          </a:prstGeom>
-          <a:solidFill>
-            <a:srgbClr val="FFFFFF"/>
-          </a:solidFill>
-          <a:ln w="12700">
-            <a:solidFill>
-              <a:srgbClr val="0D9488"/>
-            </a:solidFill>
-            <a:prstDash val="solid"/>
-          </a:ln>
-        </p:spPr>
-      </p:sp>
-      <p:sp>
-        <p:nvSpPr>
-          <p:cNvPr id="43" name="Text 41"/>
-          <p:cNvSpPr/>
-          <p:nvPr/>
-        </p:nvSpPr>
-        <p:spPr>
-          <a:xfrm>
-            <a:off x="7184136" y="3364992"/>
-            <a:ext cx="1225296" cy="475488"/>
-          </a:xfrm>
-          <a:prstGeom prst="rect">
-            <a:avLst/>
-          </a:prstGeom>
-          <a:noFill/>
-          <a:ln/>
-        </p:spPr>
-        <p:txBody>
-          <a:bodyPr wrap="square" lIns="0" tIns="0" rIns="0" bIns="0" rtlCol="0" anchor="ctr"/>
-          <a:lstStyle/>
-          <a:p>
-            <a:pPr algn="ctr" indent="0" marL="0">
-              <a:buNone/>
-            </a:pPr>
-            <a:r>
-              <a:rPr lang="en-US" sz="1400" b="1" dirty="0">
-                <a:solidFill>
-                  <a:srgbClr val="0D9488"/>
-                </a:solidFill>
-                <a:latin typeface="Trebuchet MS" pitchFamily="34" charset="0"/>
-                <a:ea typeface="Trebuchet MS" pitchFamily="34" charset="-122"/>
-                <a:cs typeface="Trebuchet MS" pitchFamily="34" charset="-120"/>
-              </a:rPr>
-              <a:t>tion</a:t>
-            </a:r>
-            <a:endParaRPr lang="en-US" sz="1400" dirty="0"/>
-          </a:p>
-        </p:txBody>
-      </p:sp>
-      <p:sp>
-        <p:nvSpPr>
-          <p:cNvPr id="44" name="Shape 42"/>
-          <p:cNvSpPr/>
-          <p:nvPr/>
-        </p:nvSpPr>
-        <p:spPr>
-          <a:xfrm>
-            <a:off x="365760" y="4096512"/>
-            <a:ext cx="1371600" cy="804672"/>
+              <a:t>Phonemes</a:t>
+            </a:r>
+            <a:endParaRPr lang="en-US" sz="1100" dirty="0"/>
+          </a:p>
+        </p:txBody>
+      </p:sp>
+      <p:sp>
+        <p:nvSpPr>
+          <p:cNvPr id="35" name="Shape 33"/>
+          <p:cNvSpPr/>
+          <p:nvPr/>
+        </p:nvSpPr>
+        <p:spPr>
+          <a:xfrm>
+            <a:off x="1874520" y="4096512"/>
+            <a:ext cx="6903720" cy="804672"/>
           </a:xfrm>
           <a:prstGeom prst="rect">
             <a:avLst>
@@ -31208,85 +31521,19 @@
             </a:avLst>
           </a:prstGeom>
           <a:solidFill>
-            <a:srgbClr val="E2E8F0"/>
+            <a:srgbClr val="F8FAFC"/>
           </a:solidFill>
           <a:ln w="12700">
             <a:solidFill>
               <a:srgbClr val="E2E8F0"/>
             </a:solidFill>
-            <a:prstDash val="solid"/>
-          </a:ln>
-        </p:spPr>
-      </p:sp>
-      <p:sp>
-        <p:nvSpPr>
-          <p:cNvPr id="45" name="Text 43"/>
-          <p:cNvSpPr/>
-          <p:nvPr/>
-        </p:nvSpPr>
-        <p:spPr>
-          <a:xfrm>
-            <a:off x="365760" y="4096512"/>
-            <a:ext cx="1371600" cy="804672"/>
-          </a:xfrm>
-          <a:prstGeom prst="rect">
-            <a:avLst/>
-          </a:prstGeom>
-          <a:noFill/>
-          <a:ln/>
-        </p:spPr>
-        <p:txBody>
-          <a:bodyPr wrap="square" lIns="0" tIns="0" rIns="0" bIns="0" rtlCol="0" anchor="ctr"/>
-          <a:lstStyle/>
-          <a:p>
-            <a:pPr algn="ctr" indent="0" marL="0">
-              <a:buNone/>
-            </a:pPr>
-            <a:r>
-              <a:rPr lang="en-US" sz="1100" b="1" dirty="0">
-                <a:solidFill>
-                  <a:srgbClr val="475569"/>
-                </a:solidFill>
-                <a:latin typeface="Trebuchet MS" pitchFamily="34" charset="0"/>
-                <a:ea typeface="Trebuchet MS" pitchFamily="34" charset="-122"/>
-                <a:cs typeface="Trebuchet MS" pitchFamily="34" charset="-120"/>
-              </a:rPr>
-              <a:t>Phonemes</a:t>
-            </a:r>
-            <a:endParaRPr lang="en-US" sz="1100" dirty="0"/>
-          </a:p>
-        </p:txBody>
-      </p:sp>
-      <p:sp>
-        <p:nvSpPr>
-          <p:cNvPr id="46" name="Shape 44"/>
-          <p:cNvSpPr/>
-          <p:nvPr/>
-        </p:nvSpPr>
-        <p:spPr>
-          <a:xfrm>
-            <a:off x="1874520" y="4096512"/>
-            <a:ext cx="6903720" cy="804672"/>
-          </a:xfrm>
-          <a:prstGeom prst="rect">
-            <a:avLst>
-              <a:gd name="adj" fmla="val 6818"/>
-            </a:avLst>
-          </a:prstGeom>
-          <a:solidFill>
-            <a:srgbClr val="F8FAFC"/>
-          </a:solidFill>
-          <a:ln w="12700">
-            <a:solidFill>
-              <a:srgbClr val="E2E8F0"/>
-            </a:solidFill>
             <a:prstDash val="dash"/>
           </a:ln>
         </p:spPr>
       </p:sp>
       <p:sp>
         <p:nvSpPr>
-          <p:cNvPr id="47" name="Text 45"/>
+          <p:cNvPr id="36" name="Text 34"/>
           <p:cNvSpPr/>
           <p:nvPr/>
         </p:nvSpPr>
@@ -31748,7 +31995,7 @@
                 <a:ea typeface="Trebuchet MS" pitchFamily="34" charset="-122"/>
                 <a:cs typeface="Trebuchet MS" pitchFamily="34" charset="-120"/>
               </a:rPr>
-              <a:t>legalisation</a:t>
+              <a:t>legalise</a:t>
             </a:r>
             <a:endParaRPr lang="en-US" sz="2800" dirty="0"/>
           </a:p>
@@ -31828,7 +32075,7 @@
         </p:nvSpPr>
         <p:spPr>
           <a:xfrm>
-            <a:off x="2221992" y="2258568"/>
+            <a:off x="2938272" y="2258568"/>
             <a:ext cx="1828800" cy="292608"/>
           </a:xfrm>
           <a:prstGeom prst="rect">
@@ -31862,7 +32109,7 @@
         </p:nvSpPr>
         <p:spPr>
           <a:xfrm>
-            <a:off x="2221992" y="2258568"/>
+            <a:off x="2938272" y="2258568"/>
             <a:ext cx="1828800" cy="292608"/>
           </a:xfrm>
           <a:prstGeom prst="rect">
@@ -31901,7 +32148,7 @@
         </p:nvSpPr>
         <p:spPr>
           <a:xfrm>
-            <a:off x="2221992" y="2569464"/>
+            <a:off x="2938272" y="2569464"/>
             <a:ext cx="1828800" cy="201168"/>
           </a:xfrm>
           <a:prstGeom prst="rect">
@@ -31940,7 +32187,7 @@
         </p:nvSpPr>
         <p:spPr>
           <a:xfrm>
-            <a:off x="4370832" y="2258568"/>
+            <a:off x="5803392" y="2258568"/>
             <a:ext cx="1828800" cy="292608"/>
           </a:xfrm>
           <a:prstGeom prst="rect">
@@ -31974,7 +32221,7 @@
         </p:nvSpPr>
         <p:spPr>
           <a:xfrm>
-            <a:off x="4370832" y="2258568"/>
+            <a:off x="5803392" y="2258568"/>
             <a:ext cx="1828800" cy="292608"/>
           </a:xfrm>
           <a:prstGeom prst="rect">
@@ -31999,7 +32246,7 @@
                 <a:ea typeface="Trebuchet MS" pitchFamily="34" charset="-122"/>
                 <a:cs typeface="Trebuchet MS" pitchFamily="34" charset="-120"/>
               </a:rPr>
-              <a:t>isa</a:t>
+              <a:t>ise</a:t>
             </a:r>
             <a:endParaRPr lang="en-US" sz="1300" dirty="0"/>
           </a:p>
@@ -32013,7 +32260,7 @@
         </p:nvSpPr>
         <p:spPr>
           <a:xfrm>
-            <a:off x="4370832" y="2569464"/>
+            <a:off x="5803392" y="2569464"/>
             <a:ext cx="1828800" cy="201168"/>
           </a:xfrm>
           <a:prstGeom prst="rect">
@@ -32038,7 +32285,7 @@
                 <a:ea typeface="Calibri" pitchFamily="34" charset="-122"/>
                 <a:cs typeface="Calibri" pitchFamily="34" charset="-120"/>
               </a:rPr>
-              <a:t>to make</a:t>
+              <a:t>to make or become</a:t>
             </a:r>
             <a:endParaRPr lang="en-US" sz="850" dirty="0"/>
           </a:p>
@@ -32046,14 +32293,938 @@
       </p:sp>
       <p:sp>
         <p:nvSpPr>
-          <p:cNvPr id="22" name="Text 20"/>
-          <p:cNvSpPr/>
-          <p:nvPr/>
-        </p:nvSpPr>
-        <p:spPr>
-          <a:xfrm>
-            <a:off x="4370832" y="2752344"/>
-            <a:ext cx="1828800" cy="182880"/>
+          <p:cNvPr id="22" name="Shape 20"/>
+          <p:cNvSpPr/>
+          <p:nvPr/>
+        </p:nvSpPr>
+        <p:spPr>
+          <a:xfrm>
+            <a:off x="365760" y="3273552"/>
+            <a:ext cx="1371600" cy="658368"/>
+          </a:xfrm>
+          <a:prstGeom prst="rect">
+            <a:avLst>
+              <a:gd name="adj" fmla="val 8333"/>
+            </a:avLst>
+          </a:prstGeom>
+          <a:solidFill>
+            <a:srgbClr val="E2E8F0"/>
+          </a:solidFill>
+          <a:ln w="12700">
+            <a:solidFill>
+              <a:srgbClr val="E2E8F0"/>
+            </a:solidFill>
+            <a:prstDash val="solid"/>
+          </a:ln>
+        </p:spPr>
+      </p:sp>
+      <p:sp>
+        <p:nvSpPr>
+          <p:cNvPr id="23" name="Text 21"/>
+          <p:cNvSpPr/>
+          <p:nvPr/>
+        </p:nvSpPr>
+        <p:spPr>
+          <a:xfrm>
+            <a:off x="365760" y="3273552"/>
+            <a:ext cx="1371600" cy="658368"/>
+          </a:xfrm>
+          <a:prstGeom prst="rect">
+            <a:avLst/>
+          </a:prstGeom>
+          <a:noFill/>
+          <a:ln/>
+        </p:spPr>
+        <p:txBody>
+          <a:bodyPr wrap="square" lIns="0" tIns="0" rIns="0" bIns="0" rtlCol="0" anchor="ctr"/>
+          <a:lstStyle/>
+          <a:p>
+            <a:pPr algn="ctr" indent="0" marL="0">
+              <a:buNone/>
+            </a:pPr>
+            <a:r>
+              <a:rPr lang="en-US" sz="1100" b="1" dirty="0">
+                <a:solidFill>
+                  <a:srgbClr val="475569"/>
+                </a:solidFill>
+                <a:latin typeface="Trebuchet MS" pitchFamily="34" charset="0"/>
+                <a:ea typeface="Trebuchet MS" pitchFamily="34" charset="-122"/>
+                <a:cs typeface="Trebuchet MS" pitchFamily="34" charset="-120"/>
+              </a:rPr>
+              <a:t>Syllables</a:t>
+            </a:r>
+            <a:endParaRPr lang="en-US" sz="1100" dirty="0"/>
+          </a:p>
+        </p:txBody>
+      </p:sp>
+      <p:sp>
+        <p:nvSpPr>
+          <p:cNvPr id="24" name="Shape 22"/>
+          <p:cNvSpPr/>
+          <p:nvPr/>
+        </p:nvSpPr>
+        <p:spPr>
+          <a:xfrm>
+            <a:off x="1874520" y="3273552"/>
+            <a:ext cx="6903720" cy="658368"/>
+          </a:xfrm>
+          <a:prstGeom prst="rect">
+            <a:avLst>
+              <a:gd name="adj" fmla="val 8333"/>
+            </a:avLst>
+          </a:prstGeom>
+          <a:solidFill>
+            <a:srgbClr val="CCFBF1"/>
+          </a:solidFill>
+          <a:ln w="12700">
+            <a:solidFill>
+              <a:srgbClr val="0D9488"/>
+            </a:solidFill>
+            <a:prstDash val="solid"/>
+          </a:ln>
+        </p:spPr>
+      </p:sp>
+      <p:sp>
+        <p:nvSpPr>
+          <p:cNvPr id="25" name="Shape 23"/>
+          <p:cNvSpPr/>
+          <p:nvPr/>
+        </p:nvSpPr>
+        <p:spPr>
+          <a:xfrm>
+            <a:off x="2313432" y="3364992"/>
+            <a:ext cx="1645920" cy="475488"/>
+          </a:xfrm>
+          <a:prstGeom prst="rect">
+            <a:avLst>
+              <a:gd name="adj" fmla="val 9615"/>
+            </a:avLst>
+          </a:prstGeom>
+          <a:solidFill>
+            <a:srgbClr val="FFFFFF"/>
+          </a:solidFill>
+          <a:ln w="12700">
+            <a:solidFill>
+              <a:srgbClr val="0D9488"/>
+            </a:solidFill>
+            <a:prstDash val="solid"/>
+          </a:ln>
+        </p:spPr>
+      </p:sp>
+      <p:sp>
+        <p:nvSpPr>
+          <p:cNvPr id="26" name="Text 24"/>
+          <p:cNvSpPr/>
+          <p:nvPr/>
+        </p:nvSpPr>
+        <p:spPr>
+          <a:xfrm>
+            <a:off x="2313432" y="3364992"/>
+            <a:ext cx="1645920" cy="475488"/>
+          </a:xfrm>
+          <a:prstGeom prst="rect">
+            <a:avLst/>
+          </a:prstGeom>
+          <a:noFill/>
+          <a:ln/>
+        </p:spPr>
+        <p:txBody>
+          <a:bodyPr wrap="square" lIns="0" tIns="0" rIns="0" bIns="0" rtlCol="0" anchor="ctr"/>
+          <a:lstStyle/>
+          <a:p>
+            <a:pPr algn="ctr" indent="0" marL="0">
+              <a:buNone/>
+            </a:pPr>
+            <a:r>
+              <a:rPr lang="en-US" sz="1400" b="1" dirty="0">
+                <a:solidFill>
+                  <a:srgbClr val="0D9488"/>
+                </a:solidFill>
+                <a:latin typeface="Trebuchet MS" pitchFamily="34" charset="0"/>
+                <a:ea typeface="Trebuchet MS" pitchFamily="34" charset="-122"/>
+                <a:cs typeface="Trebuchet MS" pitchFamily="34" charset="-120"/>
+              </a:rPr>
+              <a:t>le</a:t>
+            </a:r>
+            <a:endParaRPr lang="en-US" sz="1400" dirty="0"/>
+          </a:p>
+        </p:txBody>
+      </p:sp>
+      <p:sp>
+        <p:nvSpPr>
+          <p:cNvPr id="27" name="Text 25"/>
+          <p:cNvSpPr/>
+          <p:nvPr/>
+        </p:nvSpPr>
+        <p:spPr>
+          <a:xfrm>
+            <a:off x="3959352" y="3364992"/>
+            <a:ext cx="411480" cy="475488"/>
+          </a:xfrm>
+          <a:prstGeom prst="rect">
+            <a:avLst/>
+          </a:prstGeom>
+          <a:noFill/>
+          <a:ln/>
+        </p:spPr>
+        <p:txBody>
+          <a:bodyPr wrap="square" lIns="0" tIns="0" rIns="0" bIns="0" rtlCol="0" anchor="ctr"/>
+          <a:lstStyle/>
+          <a:p>
+            <a:pPr algn="ctr" indent="0" marL="0">
+              <a:buNone/>
+            </a:pPr>
+            <a:r>
+              <a:rPr lang="en-US" sz="1600" b="1" dirty="0">
+                <a:solidFill>
+                  <a:srgbClr val="0D9488"/>
+                </a:solidFill>
+                <a:latin typeface="Trebuchet MS" pitchFamily="34" charset="0"/>
+                <a:ea typeface="Trebuchet MS" pitchFamily="34" charset="-122"/>
+                <a:cs typeface="Trebuchet MS" pitchFamily="34" charset="-120"/>
+              </a:rPr>
+              <a:t>·</a:t>
+            </a:r>
+            <a:endParaRPr lang="en-US" sz="1600" dirty="0"/>
+          </a:p>
+        </p:txBody>
+      </p:sp>
+      <p:sp>
+        <p:nvSpPr>
+          <p:cNvPr id="28" name="Shape 26"/>
+          <p:cNvSpPr/>
+          <p:nvPr/>
+        </p:nvSpPr>
+        <p:spPr>
+          <a:xfrm>
+            <a:off x="4370832" y="3364992"/>
+            <a:ext cx="1645920" cy="475488"/>
+          </a:xfrm>
+          <a:prstGeom prst="rect">
+            <a:avLst>
+              <a:gd name="adj" fmla="val 9615"/>
+            </a:avLst>
+          </a:prstGeom>
+          <a:solidFill>
+            <a:srgbClr val="FFFFFF"/>
+          </a:solidFill>
+          <a:ln w="12700">
+            <a:solidFill>
+              <a:srgbClr val="0D9488"/>
+            </a:solidFill>
+            <a:prstDash val="solid"/>
+          </a:ln>
+        </p:spPr>
+      </p:sp>
+      <p:sp>
+        <p:nvSpPr>
+          <p:cNvPr id="29" name="Text 27"/>
+          <p:cNvSpPr/>
+          <p:nvPr/>
+        </p:nvSpPr>
+        <p:spPr>
+          <a:xfrm>
+            <a:off x="4370832" y="3364992"/>
+            <a:ext cx="1645920" cy="475488"/>
+          </a:xfrm>
+          <a:prstGeom prst="rect">
+            <a:avLst/>
+          </a:prstGeom>
+          <a:noFill/>
+          <a:ln/>
+        </p:spPr>
+        <p:txBody>
+          <a:bodyPr wrap="square" lIns="0" tIns="0" rIns="0" bIns="0" rtlCol="0" anchor="ctr"/>
+          <a:lstStyle/>
+          <a:p>
+            <a:pPr algn="ctr" indent="0" marL="0">
+              <a:buNone/>
+            </a:pPr>
+            <a:r>
+              <a:rPr lang="en-US" sz="1400" b="1" dirty="0">
+                <a:solidFill>
+                  <a:srgbClr val="0D9488"/>
+                </a:solidFill>
+                <a:latin typeface="Trebuchet MS" pitchFamily="34" charset="0"/>
+                <a:ea typeface="Trebuchet MS" pitchFamily="34" charset="-122"/>
+                <a:cs typeface="Trebuchet MS" pitchFamily="34" charset="-120"/>
+              </a:rPr>
+              <a:t>gal</a:t>
+            </a:r>
+            <a:endParaRPr lang="en-US" sz="1400" dirty="0"/>
+          </a:p>
+        </p:txBody>
+      </p:sp>
+      <p:sp>
+        <p:nvSpPr>
+          <p:cNvPr id="30" name="Text 28"/>
+          <p:cNvSpPr/>
+          <p:nvPr/>
+        </p:nvSpPr>
+        <p:spPr>
+          <a:xfrm>
+            <a:off x="6016752" y="3364992"/>
+            <a:ext cx="411480" cy="475488"/>
+          </a:xfrm>
+          <a:prstGeom prst="rect">
+            <a:avLst/>
+          </a:prstGeom>
+          <a:noFill/>
+          <a:ln/>
+        </p:spPr>
+        <p:txBody>
+          <a:bodyPr wrap="square" lIns="0" tIns="0" rIns="0" bIns="0" rtlCol="0" anchor="ctr"/>
+          <a:lstStyle/>
+          <a:p>
+            <a:pPr algn="ctr" indent="0" marL="0">
+              <a:buNone/>
+            </a:pPr>
+            <a:r>
+              <a:rPr lang="en-US" sz="1600" b="1" dirty="0">
+                <a:solidFill>
+                  <a:srgbClr val="0D9488"/>
+                </a:solidFill>
+                <a:latin typeface="Trebuchet MS" pitchFamily="34" charset="0"/>
+                <a:ea typeface="Trebuchet MS" pitchFamily="34" charset="-122"/>
+                <a:cs typeface="Trebuchet MS" pitchFamily="34" charset="-120"/>
+              </a:rPr>
+              <a:t>·</a:t>
+            </a:r>
+            <a:endParaRPr lang="en-US" sz="1600" dirty="0"/>
+          </a:p>
+        </p:txBody>
+      </p:sp>
+      <p:sp>
+        <p:nvSpPr>
+          <p:cNvPr id="31" name="Shape 29"/>
+          <p:cNvSpPr/>
+          <p:nvPr/>
+        </p:nvSpPr>
+        <p:spPr>
+          <a:xfrm>
+            <a:off x="6428232" y="3364992"/>
+            <a:ext cx="1645920" cy="475488"/>
+          </a:xfrm>
+          <a:prstGeom prst="rect">
+            <a:avLst>
+              <a:gd name="adj" fmla="val 9615"/>
+            </a:avLst>
+          </a:prstGeom>
+          <a:solidFill>
+            <a:srgbClr val="FFFFFF"/>
+          </a:solidFill>
+          <a:ln w="12700">
+            <a:solidFill>
+              <a:srgbClr val="0D9488"/>
+            </a:solidFill>
+            <a:prstDash val="solid"/>
+          </a:ln>
+        </p:spPr>
+      </p:sp>
+      <p:sp>
+        <p:nvSpPr>
+          <p:cNvPr id="32" name="Text 30"/>
+          <p:cNvSpPr/>
+          <p:nvPr/>
+        </p:nvSpPr>
+        <p:spPr>
+          <a:xfrm>
+            <a:off x="6428232" y="3364992"/>
+            <a:ext cx="1645920" cy="475488"/>
+          </a:xfrm>
+          <a:prstGeom prst="rect">
+            <a:avLst/>
+          </a:prstGeom>
+          <a:noFill/>
+          <a:ln/>
+        </p:spPr>
+        <p:txBody>
+          <a:bodyPr wrap="square" lIns="0" tIns="0" rIns="0" bIns="0" rtlCol="0" anchor="ctr"/>
+          <a:lstStyle/>
+          <a:p>
+            <a:pPr algn="ctr" indent="0" marL="0">
+              <a:buNone/>
+            </a:pPr>
+            <a:r>
+              <a:rPr lang="en-US" sz="1400" b="1" dirty="0">
+                <a:solidFill>
+                  <a:srgbClr val="0D9488"/>
+                </a:solidFill>
+                <a:latin typeface="Trebuchet MS" pitchFamily="34" charset="0"/>
+                <a:ea typeface="Trebuchet MS" pitchFamily="34" charset="-122"/>
+                <a:cs typeface="Trebuchet MS" pitchFamily="34" charset="-120"/>
+              </a:rPr>
+              <a:t>ise</a:t>
+            </a:r>
+            <a:endParaRPr lang="en-US" sz="1400" dirty="0"/>
+          </a:p>
+        </p:txBody>
+      </p:sp>
+      <p:sp>
+        <p:nvSpPr>
+          <p:cNvPr id="33" name="Shape 31"/>
+          <p:cNvSpPr/>
+          <p:nvPr/>
+        </p:nvSpPr>
+        <p:spPr>
+          <a:xfrm>
+            <a:off x="365760" y="4096512"/>
+            <a:ext cx="1371600" cy="804672"/>
+          </a:xfrm>
+          <a:prstGeom prst="rect">
+            <a:avLst>
+              <a:gd name="adj" fmla="val 6818"/>
+            </a:avLst>
+          </a:prstGeom>
+          <a:solidFill>
+            <a:srgbClr val="E2E8F0"/>
+          </a:solidFill>
+          <a:ln w="12700">
+            <a:solidFill>
+              <a:srgbClr val="E2E8F0"/>
+            </a:solidFill>
+            <a:prstDash val="solid"/>
+          </a:ln>
+        </p:spPr>
+      </p:sp>
+      <p:sp>
+        <p:nvSpPr>
+          <p:cNvPr id="34" name="Text 32"/>
+          <p:cNvSpPr/>
+          <p:nvPr/>
+        </p:nvSpPr>
+        <p:spPr>
+          <a:xfrm>
+            <a:off x="365760" y="4096512"/>
+            <a:ext cx="1371600" cy="804672"/>
+          </a:xfrm>
+          <a:prstGeom prst="rect">
+            <a:avLst/>
+          </a:prstGeom>
+          <a:noFill/>
+          <a:ln/>
+        </p:spPr>
+        <p:txBody>
+          <a:bodyPr wrap="square" lIns="0" tIns="0" rIns="0" bIns="0" rtlCol="0" anchor="ctr"/>
+          <a:lstStyle/>
+          <a:p>
+            <a:pPr algn="ctr" indent="0" marL="0">
+              <a:buNone/>
+            </a:pPr>
+            <a:r>
+              <a:rPr lang="en-US" sz="1100" b="1" dirty="0">
+                <a:solidFill>
+                  <a:srgbClr val="475569"/>
+                </a:solidFill>
+                <a:latin typeface="Trebuchet MS" pitchFamily="34" charset="0"/>
+                <a:ea typeface="Trebuchet MS" pitchFamily="34" charset="-122"/>
+                <a:cs typeface="Trebuchet MS" pitchFamily="34" charset="-120"/>
+              </a:rPr>
+              <a:t>Phonemes</a:t>
+            </a:r>
+            <a:endParaRPr lang="en-US" sz="1100" dirty="0"/>
+          </a:p>
+        </p:txBody>
+      </p:sp>
+      <p:sp>
+        <p:nvSpPr>
+          <p:cNvPr id="35" name="Shape 33"/>
+          <p:cNvSpPr/>
+          <p:nvPr/>
+        </p:nvSpPr>
+        <p:spPr>
+          <a:xfrm>
+            <a:off x="1874520" y="4096512"/>
+            <a:ext cx="6903720" cy="804672"/>
+          </a:xfrm>
+          <a:prstGeom prst="rect">
+            <a:avLst>
+              <a:gd name="adj" fmla="val 6818"/>
+            </a:avLst>
+          </a:prstGeom>
+          <a:solidFill>
+            <a:srgbClr val="FCE7F3"/>
+          </a:solidFill>
+          <a:ln w="12700">
+            <a:solidFill>
+              <a:srgbClr val="DB2777"/>
+            </a:solidFill>
+            <a:prstDash val="solid"/>
+          </a:ln>
+        </p:spPr>
+      </p:sp>
+      <p:sp>
+        <p:nvSpPr>
+          <p:cNvPr id="36" name="Shape 34"/>
+          <p:cNvSpPr/>
+          <p:nvPr/>
+        </p:nvSpPr>
+        <p:spPr>
+          <a:xfrm>
+            <a:off x="2023872" y="4169664"/>
+            <a:ext cx="685800" cy="384048"/>
+          </a:xfrm>
+          <a:prstGeom prst="rect">
+            <a:avLst>
+              <a:gd name="adj" fmla="val 9524"/>
+            </a:avLst>
+          </a:prstGeom>
+          <a:solidFill>
+            <a:srgbClr val="FFFFFF"/>
+          </a:solidFill>
+          <a:ln w="12700">
+            <a:solidFill>
+              <a:srgbClr val="DB2777"/>
+            </a:solidFill>
+            <a:prstDash val="solid"/>
+          </a:ln>
+        </p:spPr>
+      </p:sp>
+      <p:sp>
+        <p:nvSpPr>
+          <p:cNvPr id="37" name="Text 35"/>
+          <p:cNvSpPr/>
+          <p:nvPr/>
+        </p:nvSpPr>
+        <p:spPr>
+          <a:xfrm>
+            <a:off x="2023872" y="4169664"/>
+            <a:ext cx="685800" cy="384048"/>
+          </a:xfrm>
+          <a:prstGeom prst="rect">
+            <a:avLst/>
+          </a:prstGeom>
+          <a:noFill/>
+          <a:ln/>
+        </p:spPr>
+        <p:txBody>
+          <a:bodyPr wrap="square" lIns="0" tIns="0" rIns="0" bIns="0" rtlCol="0" anchor="ctr"/>
+          <a:lstStyle/>
+          <a:p>
+            <a:pPr algn="ctr" indent="0" marL="0">
+              <a:buNone/>
+            </a:pPr>
+            <a:r>
+              <a:rPr lang="en-US" sz="900" b="1" dirty="0">
+                <a:solidFill>
+                  <a:srgbClr val="9D174D"/>
+                </a:solidFill>
+                <a:latin typeface="Trebuchet MS" pitchFamily="34" charset="0"/>
+                <a:ea typeface="Trebuchet MS" pitchFamily="34" charset="-122"/>
+                <a:cs typeface="Trebuchet MS" pitchFamily="34" charset="-120"/>
+              </a:rPr>
+              <a:t>l</a:t>
+            </a:r>
+            <a:endParaRPr lang="en-US" sz="900" dirty="0"/>
+          </a:p>
+        </p:txBody>
+      </p:sp>
+      <p:sp>
+        <p:nvSpPr>
+          <p:cNvPr id="38" name="Shape 36"/>
+          <p:cNvSpPr/>
+          <p:nvPr/>
+        </p:nvSpPr>
+        <p:spPr>
+          <a:xfrm>
+            <a:off x="2831592" y="4169664"/>
+            <a:ext cx="685800" cy="384048"/>
+          </a:xfrm>
+          <a:prstGeom prst="rect">
+            <a:avLst>
+              <a:gd name="adj" fmla="val 9524"/>
+            </a:avLst>
+          </a:prstGeom>
+          <a:solidFill>
+            <a:srgbClr val="FFFFFF"/>
+          </a:solidFill>
+          <a:ln w="12700">
+            <a:solidFill>
+              <a:srgbClr val="DB2777"/>
+            </a:solidFill>
+            <a:prstDash val="solid"/>
+          </a:ln>
+        </p:spPr>
+      </p:sp>
+      <p:sp>
+        <p:nvSpPr>
+          <p:cNvPr id="39" name="Text 37"/>
+          <p:cNvSpPr/>
+          <p:nvPr/>
+        </p:nvSpPr>
+        <p:spPr>
+          <a:xfrm>
+            <a:off x="2831592" y="4169664"/>
+            <a:ext cx="685800" cy="384048"/>
+          </a:xfrm>
+          <a:prstGeom prst="rect">
+            <a:avLst/>
+          </a:prstGeom>
+          <a:noFill/>
+          <a:ln/>
+        </p:spPr>
+        <p:txBody>
+          <a:bodyPr wrap="square" lIns="0" tIns="0" rIns="0" bIns="0" rtlCol="0" anchor="ctr"/>
+          <a:lstStyle/>
+          <a:p>
+            <a:pPr algn="ctr" indent="0" marL="0">
+              <a:buNone/>
+            </a:pPr>
+            <a:r>
+              <a:rPr lang="en-US" sz="900" b="1" dirty="0">
+                <a:solidFill>
+                  <a:srgbClr val="9D174D"/>
+                </a:solidFill>
+                <a:latin typeface="Trebuchet MS" pitchFamily="34" charset="0"/>
+                <a:ea typeface="Trebuchet MS" pitchFamily="34" charset="-122"/>
+                <a:cs typeface="Trebuchet MS" pitchFamily="34" charset="-120"/>
+              </a:rPr>
+              <a:t>e</a:t>
+            </a:r>
+            <a:endParaRPr lang="en-US" sz="900" dirty="0"/>
+          </a:p>
+        </p:txBody>
+      </p:sp>
+      <p:sp>
+        <p:nvSpPr>
+          <p:cNvPr id="40" name="Shape 38"/>
+          <p:cNvSpPr/>
+          <p:nvPr/>
+        </p:nvSpPr>
+        <p:spPr>
+          <a:xfrm>
+            <a:off x="3639312" y="4169664"/>
+            <a:ext cx="685800" cy="384048"/>
+          </a:xfrm>
+          <a:prstGeom prst="rect">
+            <a:avLst>
+              <a:gd name="adj" fmla="val 9524"/>
+            </a:avLst>
+          </a:prstGeom>
+          <a:solidFill>
+            <a:srgbClr val="FFFFFF"/>
+          </a:solidFill>
+          <a:ln w="12700">
+            <a:solidFill>
+              <a:srgbClr val="DB2777"/>
+            </a:solidFill>
+            <a:prstDash val="solid"/>
+          </a:ln>
+        </p:spPr>
+      </p:sp>
+      <p:sp>
+        <p:nvSpPr>
+          <p:cNvPr id="41" name="Text 39"/>
+          <p:cNvSpPr/>
+          <p:nvPr/>
+        </p:nvSpPr>
+        <p:spPr>
+          <a:xfrm>
+            <a:off x="3639312" y="4169664"/>
+            <a:ext cx="685800" cy="384048"/>
+          </a:xfrm>
+          <a:prstGeom prst="rect">
+            <a:avLst/>
+          </a:prstGeom>
+          <a:noFill/>
+          <a:ln/>
+        </p:spPr>
+        <p:txBody>
+          <a:bodyPr wrap="square" lIns="0" tIns="0" rIns="0" bIns="0" rtlCol="0" anchor="ctr"/>
+          <a:lstStyle/>
+          <a:p>
+            <a:pPr algn="ctr" indent="0" marL="0">
+              <a:buNone/>
+            </a:pPr>
+            <a:r>
+              <a:rPr lang="en-US" sz="900" b="1" dirty="0">
+                <a:solidFill>
+                  <a:srgbClr val="9D174D"/>
+                </a:solidFill>
+                <a:latin typeface="Trebuchet MS" pitchFamily="34" charset="0"/>
+                <a:ea typeface="Trebuchet MS" pitchFamily="34" charset="-122"/>
+                <a:cs typeface="Trebuchet MS" pitchFamily="34" charset="-120"/>
+              </a:rPr>
+              <a:t>g</a:t>
+            </a:r>
+            <a:endParaRPr lang="en-US" sz="900" dirty="0"/>
+          </a:p>
+        </p:txBody>
+      </p:sp>
+      <p:sp>
+        <p:nvSpPr>
+          <p:cNvPr id="42" name="Shape 40"/>
+          <p:cNvSpPr/>
+          <p:nvPr/>
+        </p:nvSpPr>
+        <p:spPr>
+          <a:xfrm>
+            <a:off x="4447032" y="4169664"/>
+            <a:ext cx="685800" cy="384048"/>
+          </a:xfrm>
+          <a:prstGeom prst="rect">
+            <a:avLst>
+              <a:gd name="adj" fmla="val 9524"/>
+            </a:avLst>
+          </a:prstGeom>
+          <a:solidFill>
+            <a:srgbClr val="FFFFFF"/>
+          </a:solidFill>
+          <a:ln w="12700">
+            <a:solidFill>
+              <a:srgbClr val="DB2777"/>
+            </a:solidFill>
+            <a:prstDash val="solid"/>
+          </a:ln>
+        </p:spPr>
+      </p:sp>
+      <p:sp>
+        <p:nvSpPr>
+          <p:cNvPr id="43" name="Text 41"/>
+          <p:cNvSpPr/>
+          <p:nvPr/>
+        </p:nvSpPr>
+        <p:spPr>
+          <a:xfrm>
+            <a:off x="4447032" y="4169664"/>
+            <a:ext cx="685800" cy="384048"/>
+          </a:xfrm>
+          <a:prstGeom prst="rect">
+            <a:avLst/>
+          </a:prstGeom>
+          <a:noFill/>
+          <a:ln/>
+        </p:spPr>
+        <p:txBody>
+          <a:bodyPr wrap="square" lIns="0" tIns="0" rIns="0" bIns="0" rtlCol="0" anchor="ctr"/>
+          <a:lstStyle/>
+          <a:p>
+            <a:pPr algn="ctr" indent="0" marL="0">
+              <a:buNone/>
+            </a:pPr>
+            <a:r>
+              <a:rPr lang="en-US" sz="900" b="1" dirty="0">
+                <a:solidFill>
+                  <a:srgbClr val="9D174D"/>
+                </a:solidFill>
+                <a:latin typeface="Trebuchet MS" pitchFamily="34" charset="0"/>
+                <a:ea typeface="Trebuchet MS" pitchFamily="34" charset="-122"/>
+                <a:cs typeface="Trebuchet MS" pitchFamily="34" charset="-120"/>
+              </a:rPr>
+              <a:t>a</a:t>
+            </a:r>
+            <a:endParaRPr lang="en-US" sz="900" dirty="0"/>
+          </a:p>
+        </p:txBody>
+      </p:sp>
+      <p:sp>
+        <p:nvSpPr>
+          <p:cNvPr id="44" name="Shape 42"/>
+          <p:cNvSpPr/>
+          <p:nvPr/>
+        </p:nvSpPr>
+        <p:spPr>
+          <a:xfrm>
+            <a:off x="5254752" y="4169664"/>
+            <a:ext cx="685800" cy="384048"/>
+          </a:xfrm>
+          <a:prstGeom prst="rect">
+            <a:avLst>
+              <a:gd name="adj" fmla="val 9524"/>
+            </a:avLst>
+          </a:prstGeom>
+          <a:solidFill>
+            <a:srgbClr val="FFFFFF"/>
+          </a:solidFill>
+          <a:ln w="12700">
+            <a:solidFill>
+              <a:srgbClr val="DB2777"/>
+            </a:solidFill>
+            <a:prstDash val="solid"/>
+          </a:ln>
+        </p:spPr>
+      </p:sp>
+      <p:sp>
+        <p:nvSpPr>
+          <p:cNvPr id="45" name="Text 43"/>
+          <p:cNvSpPr/>
+          <p:nvPr/>
+        </p:nvSpPr>
+        <p:spPr>
+          <a:xfrm>
+            <a:off x="5254752" y="4169664"/>
+            <a:ext cx="685800" cy="384048"/>
+          </a:xfrm>
+          <a:prstGeom prst="rect">
+            <a:avLst/>
+          </a:prstGeom>
+          <a:noFill/>
+          <a:ln/>
+        </p:spPr>
+        <p:txBody>
+          <a:bodyPr wrap="square" lIns="0" tIns="0" rIns="0" bIns="0" rtlCol="0" anchor="ctr"/>
+          <a:lstStyle/>
+          <a:p>
+            <a:pPr algn="ctr" indent="0" marL="0">
+              <a:buNone/>
+            </a:pPr>
+            <a:r>
+              <a:rPr lang="en-US" sz="900" b="1" dirty="0">
+                <a:solidFill>
+                  <a:srgbClr val="9D174D"/>
+                </a:solidFill>
+                <a:latin typeface="Trebuchet MS" pitchFamily="34" charset="0"/>
+                <a:ea typeface="Trebuchet MS" pitchFamily="34" charset="-122"/>
+                <a:cs typeface="Trebuchet MS" pitchFamily="34" charset="-120"/>
+              </a:rPr>
+              <a:t>l</a:t>
+            </a:r>
+            <a:endParaRPr lang="en-US" sz="900" dirty="0"/>
+          </a:p>
+        </p:txBody>
+      </p:sp>
+      <p:sp>
+        <p:nvSpPr>
+          <p:cNvPr id="46" name="Shape 44"/>
+          <p:cNvSpPr/>
+          <p:nvPr/>
+        </p:nvSpPr>
+        <p:spPr>
+          <a:xfrm>
+            <a:off x="6062472" y="4169664"/>
+            <a:ext cx="685800" cy="384048"/>
+          </a:xfrm>
+          <a:prstGeom prst="rect">
+            <a:avLst>
+              <a:gd name="adj" fmla="val 9524"/>
+            </a:avLst>
+          </a:prstGeom>
+          <a:solidFill>
+            <a:srgbClr val="FFFFFF"/>
+          </a:solidFill>
+          <a:ln w="12700">
+            <a:solidFill>
+              <a:srgbClr val="DB2777"/>
+            </a:solidFill>
+            <a:prstDash val="solid"/>
+          </a:ln>
+        </p:spPr>
+      </p:sp>
+      <p:sp>
+        <p:nvSpPr>
+          <p:cNvPr id="47" name="Text 45"/>
+          <p:cNvSpPr/>
+          <p:nvPr/>
+        </p:nvSpPr>
+        <p:spPr>
+          <a:xfrm>
+            <a:off x="6062472" y="4169664"/>
+            <a:ext cx="685800" cy="384048"/>
+          </a:xfrm>
+          <a:prstGeom prst="rect">
+            <a:avLst/>
+          </a:prstGeom>
+          <a:noFill/>
+          <a:ln/>
+        </p:spPr>
+        <p:txBody>
+          <a:bodyPr wrap="square" lIns="0" tIns="0" rIns="0" bIns="0" rtlCol="0" anchor="ctr"/>
+          <a:lstStyle/>
+          <a:p>
+            <a:pPr algn="ctr" indent="0" marL="0">
+              <a:buNone/>
+            </a:pPr>
+            <a:r>
+              <a:rPr lang="en-US" sz="900" b="1" dirty="0">
+                <a:solidFill>
+                  <a:srgbClr val="9D174D"/>
+                </a:solidFill>
+                <a:latin typeface="Trebuchet MS" pitchFamily="34" charset="0"/>
+                <a:ea typeface="Trebuchet MS" pitchFamily="34" charset="-122"/>
+                <a:cs typeface="Trebuchet MS" pitchFamily="34" charset="-120"/>
+              </a:rPr>
+              <a:t>i</a:t>
+            </a:r>
+            <a:endParaRPr lang="en-US" sz="900" dirty="0"/>
+          </a:p>
+        </p:txBody>
+      </p:sp>
+      <p:sp>
+        <p:nvSpPr>
+          <p:cNvPr id="48" name="Shape 46"/>
+          <p:cNvSpPr/>
+          <p:nvPr/>
+        </p:nvSpPr>
+        <p:spPr>
+          <a:xfrm>
+            <a:off x="6870192" y="4169664"/>
+            <a:ext cx="685800" cy="384048"/>
+          </a:xfrm>
+          <a:prstGeom prst="rect">
+            <a:avLst>
+              <a:gd name="adj" fmla="val 9524"/>
+            </a:avLst>
+          </a:prstGeom>
+          <a:solidFill>
+            <a:srgbClr val="FFFFFF"/>
+          </a:solidFill>
+          <a:ln w="12700">
+            <a:solidFill>
+              <a:srgbClr val="DB2777"/>
+            </a:solidFill>
+            <a:prstDash val="solid"/>
+          </a:ln>
+        </p:spPr>
+      </p:sp>
+      <p:sp>
+        <p:nvSpPr>
+          <p:cNvPr id="49" name="Text 47"/>
+          <p:cNvSpPr/>
+          <p:nvPr/>
+        </p:nvSpPr>
+        <p:spPr>
+          <a:xfrm>
+            <a:off x="6870192" y="4169664"/>
+            <a:ext cx="685800" cy="384048"/>
+          </a:xfrm>
+          <a:prstGeom prst="rect">
+            <a:avLst/>
+          </a:prstGeom>
+          <a:noFill/>
+          <a:ln/>
+        </p:spPr>
+        <p:txBody>
+          <a:bodyPr wrap="square" lIns="0" tIns="0" rIns="0" bIns="0" rtlCol="0" anchor="ctr"/>
+          <a:lstStyle/>
+          <a:p>
+            <a:pPr algn="ctr" indent="0" marL="0">
+              <a:buNone/>
+            </a:pPr>
+            <a:r>
+              <a:rPr lang="en-US" sz="900" b="1" dirty="0">
+                <a:solidFill>
+                  <a:srgbClr val="9D174D"/>
+                </a:solidFill>
+                <a:latin typeface="Trebuchet MS" pitchFamily="34" charset="0"/>
+                <a:ea typeface="Trebuchet MS" pitchFamily="34" charset="-122"/>
+                <a:cs typeface="Trebuchet MS" pitchFamily="34" charset="-120"/>
+              </a:rPr>
+              <a:t>s</a:t>
+            </a:r>
+            <a:endParaRPr lang="en-US" sz="900" dirty="0"/>
+          </a:p>
+        </p:txBody>
+      </p:sp>
+      <p:sp>
+        <p:nvSpPr>
+          <p:cNvPr id="50" name="Text 48"/>
+          <p:cNvSpPr/>
+          <p:nvPr/>
+        </p:nvSpPr>
+        <p:spPr>
+          <a:xfrm>
+            <a:off x="6870192" y="4572000"/>
+            <a:ext cx="685800" cy="219456"/>
           </a:xfrm>
           <a:prstGeom prst="rect">
             <a:avLst/>
@@ -32069,7 +33240,7 @@
               <a:buNone/>
             </a:pPr>
             <a:r>
-              <a:rPr lang="en-US" sz="700" i="1" dirty="0">
+              <a:rPr lang="en-US" sz="750" i="1" dirty="0">
                 <a:solidFill>
                   <a:srgbClr val="94A3B8"/>
                 </a:solidFill>
@@ -32077,72 +33248,65 @@
                 <a:ea typeface="Calibri" pitchFamily="34" charset="-122"/>
                 <a:cs typeface="Calibri" pitchFamily="34" charset="-120"/>
               </a:rPr>
-              <a:t>connecting vowel 'a' links base to suffix</a:t>
-            </a:r>
-            <a:endParaRPr lang="en-US" sz="700" dirty="0"/>
-          </a:p>
-        </p:txBody>
-      </p:sp>
-      <p:sp>
-        <p:nvSpPr>
-          <p:cNvPr id="23" name="Shape 21"/>
-          <p:cNvSpPr/>
-          <p:nvPr/>
-        </p:nvSpPr>
-        <p:spPr>
-          <a:xfrm>
-            <a:off x="6519672" y="2258568"/>
-            <a:ext cx="1828800" cy="292608"/>
+              <a:t>/z/</a:t>
+            </a:r>
+            <a:endParaRPr lang="en-US" sz="750" dirty="0"/>
+          </a:p>
+        </p:txBody>
+      </p:sp>
+      <p:sp>
+        <p:nvSpPr>
+          <p:cNvPr id="51" name="Shape 49"/>
+          <p:cNvSpPr/>
+          <p:nvPr/>
+        </p:nvSpPr>
+        <p:spPr>
+          <a:xfrm>
+            <a:off x="7677912" y="4169664"/>
+            <a:ext cx="685800" cy="384048"/>
           </a:xfrm>
           <a:prstGeom prst="rect">
             <a:avLst>
-              <a:gd name="adj" fmla="val 25000"/>
+              <a:gd name="adj" fmla="val 9524"/>
             </a:avLst>
           </a:prstGeom>
           <a:solidFill>
-            <a:srgbClr val="FCE7F3"/>
-          </a:solidFill>
-          <a:ln w="19050">
+            <a:srgbClr val="FFFFFF"/>
+          </a:solidFill>
+          <a:ln w="12700">
             <a:solidFill>
               <a:srgbClr val="DB2777"/>
             </a:solidFill>
             <a:prstDash val="solid"/>
           </a:ln>
-          <a:effectLst>
-            <a:outerShdw sx="100000" sy="100000" kx="0" ky="0" algn="bl" rotWithShape="0" blurRad="101600" dist="38100" dir="8100000">
-              <a:srgbClr val="000000">
-                <a:alpha val="12000"/>
-              </a:srgbClr>
-            </a:outerShdw>
-          </a:effectLst>
-        </p:spPr>
-      </p:sp>
-      <p:sp>
-        <p:nvSpPr>
-          <p:cNvPr id="24" name="Text 22"/>
-          <p:cNvSpPr/>
-          <p:nvPr/>
-        </p:nvSpPr>
-        <p:spPr>
-          <a:xfrm>
-            <a:off x="6519672" y="2258568"/>
-            <a:ext cx="1828800" cy="292608"/>
-          </a:xfrm>
-          <a:prstGeom prst="rect">
-            <a:avLst/>
-          </a:prstGeom>
-          <a:noFill/>
-          <a:ln/>
-        </p:spPr>
-        <p:txBody>
-          <a:bodyPr wrap="square" lIns="0" tIns="0" rIns="0" bIns="0" rtlCol="0" anchor="ctr"/>
-          <a:lstStyle/>
-          <a:p>
-            <a:pPr algn="ctr" indent="0" marL="0">
-              <a:buNone/>
-            </a:pPr>
-            <a:r>
-              <a:rPr lang="en-US" sz="1300" b="1" dirty="0">
+        </p:spPr>
+      </p:sp>
+      <p:sp>
+        <p:nvSpPr>
+          <p:cNvPr id="52" name="Text 50"/>
+          <p:cNvSpPr/>
+          <p:nvPr/>
+        </p:nvSpPr>
+        <p:spPr>
+          <a:xfrm>
+            <a:off x="7677912" y="4169664"/>
+            <a:ext cx="685800" cy="384048"/>
+          </a:xfrm>
+          <a:prstGeom prst="rect">
+            <a:avLst/>
+          </a:prstGeom>
+          <a:noFill/>
+          <a:ln/>
+        </p:spPr>
+        <p:txBody>
+          <a:bodyPr wrap="square" lIns="0" tIns="0" rIns="0" bIns="0" rtlCol="0" anchor="ctr"/>
+          <a:lstStyle/>
+          <a:p>
+            <a:pPr algn="ctr" indent="0" marL="0">
+              <a:buNone/>
+            </a:pPr>
+            <a:r>
+              <a:rPr lang="en-US" sz="900" b="1" dirty="0">
                 <a:solidFill>
                   <a:srgbClr val="9D174D"/>
                 </a:solidFill>
@@ -32150,1522 +33314,7 @@
                 <a:ea typeface="Trebuchet MS" pitchFamily="34" charset="-122"/>
                 <a:cs typeface="Trebuchet MS" pitchFamily="34" charset="-120"/>
               </a:rPr>
-              <a:t>tion</a:t>
-            </a:r>
-            <a:endParaRPr lang="en-US" sz="1300" dirty="0"/>
-          </a:p>
-        </p:txBody>
-      </p:sp>
-      <p:sp>
-        <p:nvSpPr>
-          <p:cNvPr id="25" name="Text 23"/>
-          <p:cNvSpPr/>
-          <p:nvPr/>
-        </p:nvSpPr>
-        <p:spPr>
-          <a:xfrm>
-            <a:off x="6519672" y="2569464"/>
-            <a:ext cx="1828800" cy="201168"/>
-          </a:xfrm>
-          <a:prstGeom prst="rect">
-            <a:avLst/>
-          </a:prstGeom>
-          <a:noFill/>
-          <a:ln/>
-        </p:spPr>
-        <p:txBody>
-          <a:bodyPr wrap="square" lIns="0" tIns="0" rIns="0" bIns="0" rtlCol="0" anchor="t"/>
-          <a:lstStyle/>
-          <a:p>
-            <a:pPr algn="ctr" indent="0" marL="0">
-              <a:buNone/>
-            </a:pPr>
-            <a:r>
-              <a:rPr lang="en-US" sz="850" dirty="0">
-                <a:solidFill>
-                  <a:srgbClr val="475569"/>
-                </a:solidFill>
-                <a:latin typeface="Calibri" pitchFamily="34" charset="0"/>
-                <a:ea typeface="Calibri" pitchFamily="34" charset="-122"/>
-                <a:cs typeface="Calibri" pitchFamily="34" charset="-120"/>
-              </a:rPr>
-              <a:t>process or result</a:t>
-            </a:r>
-            <a:endParaRPr lang="en-US" sz="850" dirty="0"/>
-          </a:p>
-        </p:txBody>
-      </p:sp>
-      <p:sp>
-        <p:nvSpPr>
-          <p:cNvPr id="26" name="Text 24"/>
-          <p:cNvSpPr/>
-          <p:nvPr/>
-        </p:nvSpPr>
-        <p:spPr>
-          <a:xfrm>
-            <a:off x="6519672" y="2752344"/>
-            <a:ext cx="1828800" cy="182880"/>
-          </a:xfrm>
-          <a:prstGeom prst="rect">
-            <a:avLst/>
-          </a:prstGeom>
-          <a:noFill/>
-          <a:ln/>
-        </p:spPr>
-        <p:txBody>
-          <a:bodyPr wrap="square" lIns="0" tIns="0" rIns="0" bIns="0" rtlCol="0" anchor="t"/>
-          <a:lstStyle/>
-          <a:p>
-            <a:pPr algn="ctr" indent="0" marL="0">
-              <a:buNone/>
-            </a:pPr>
-            <a:r>
-              <a:rPr lang="en-US" sz="700" i="1" dirty="0">
-                <a:solidFill>
-                  <a:srgbClr val="94A3B8"/>
-                </a:solidFill>
-                <a:latin typeface="Calibri" pitchFamily="34" charset="0"/>
-                <a:ea typeface="Calibri" pitchFamily="34" charset="-122"/>
-                <a:cs typeface="Calibri" pitchFamily="34" charset="-120"/>
-              </a:rPr>
-              <a:t>ti makes /sh/ sound</a:t>
-            </a:r>
-            <a:endParaRPr lang="en-US" sz="700" dirty="0"/>
-          </a:p>
-        </p:txBody>
-      </p:sp>
-      <p:sp>
-        <p:nvSpPr>
-          <p:cNvPr id="27" name="Shape 25"/>
-          <p:cNvSpPr/>
-          <p:nvPr/>
-        </p:nvSpPr>
-        <p:spPr>
-          <a:xfrm>
-            <a:off x="365760" y="3273552"/>
-            <a:ext cx="1371600" cy="658368"/>
-          </a:xfrm>
-          <a:prstGeom prst="rect">
-            <a:avLst>
-              <a:gd name="adj" fmla="val 8333"/>
-            </a:avLst>
-          </a:prstGeom>
-          <a:solidFill>
-            <a:srgbClr val="E2E8F0"/>
-          </a:solidFill>
-          <a:ln w="12700">
-            <a:solidFill>
-              <a:srgbClr val="E2E8F0"/>
-            </a:solidFill>
-            <a:prstDash val="solid"/>
-          </a:ln>
-        </p:spPr>
-      </p:sp>
-      <p:sp>
-        <p:nvSpPr>
-          <p:cNvPr id="28" name="Text 26"/>
-          <p:cNvSpPr/>
-          <p:nvPr/>
-        </p:nvSpPr>
-        <p:spPr>
-          <a:xfrm>
-            <a:off x="365760" y="3273552"/>
-            <a:ext cx="1371600" cy="658368"/>
-          </a:xfrm>
-          <a:prstGeom prst="rect">
-            <a:avLst/>
-          </a:prstGeom>
-          <a:noFill/>
-          <a:ln/>
-        </p:spPr>
-        <p:txBody>
-          <a:bodyPr wrap="square" lIns="0" tIns="0" rIns="0" bIns="0" rtlCol="0" anchor="ctr"/>
-          <a:lstStyle/>
-          <a:p>
-            <a:pPr algn="ctr" indent="0" marL="0">
-              <a:buNone/>
-            </a:pPr>
-            <a:r>
-              <a:rPr lang="en-US" sz="1100" b="1" dirty="0">
-                <a:solidFill>
-                  <a:srgbClr val="475569"/>
-                </a:solidFill>
-                <a:latin typeface="Trebuchet MS" pitchFamily="34" charset="0"/>
-                <a:ea typeface="Trebuchet MS" pitchFamily="34" charset="-122"/>
-                <a:cs typeface="Trebuchet MS" pitchFamily="34" charset="-120"/>
-              </a:rPr>
-              <a:t>Syllables</a:t>
-            </a:r>
-            <a:endParaRPr lang="en-US" sz="1100" dirty="0"/>
-          </a:p>
-        </p:txBody>
-      </p:sp>
-      <p:sp>
-        <p:nvSpPr>
-          <p:cNvPr id="29" name="Shape 27"/>
-          <p:cNvSpPr/>
-          <p:nvPr/>
-        </p:nvSpPr>
-        <p:spPr>
-          <a:xfrm>
-            <a:off x="1874520" y="3273552"/>
-            <a:ext cx="6903720" cy="658368"/>
-          </a:xfrm>
-          <a:prstGeom prst="rect">
-            <a:avLst>
-              <a:gd name="adj" fmla="val 8333"/>
-            </a:avLst>
-          </a:prstGeom>
-          <a:solidFill>
-            <a:srgbClr val="CCFBF1"/>
-          </a:solidFill>
-          <a:ln w="12700">
-            <a:solidFill>
-              <a:srgbClr val="0D9488"/>
-            </a:solidFill>
-            <a:prstDash val="solid"/>
-          </a:ln>
-        </p:spPr>
-      </p:sp>
-      <p:sp>
-        <p:nvSpPr>
-          <p:cNvPr id="30" name="Shape 28"/>
-          <p:cNvSpPr/>
-          <p:nvPr/>
-        </p:nvSpPr>
-        <p:spPr>
-          <a:xfrm>
-            <a:off x="1978152" y="3364992"/>
-            <a:ext cx="1225296" cy="475488"/>
-          </a:xfrm>
-          <a:prstGeom prst="rect">
-            <a:avLst>
-              <a:gd name="adj" fmla="val 9615"/>
-            </a:avLst>
-          </a:prstGeom>
-          <a:solidFill>
-            <a:srgbClr val="FFFFFF"/>
-          </a:solidFill>
-          <a:ln w="12700">
-            <a:solidFill>
-              <a:srgbClr val="0D9488"/>
-            </a:solidFill>
-            <a:prstDash val="solid"/>
-          </a:ln>
-        </p:spPr>
-      </p:sp>
-      <p:sp>
-        <p:nvSpPr>
-          <p:cNvPr id="31" name="Text 29"/>
-          <p:cNvSpPr/>
-          <p:nvPr/>
-        </p:nvSpPr>
-        <p:spPr>
-          <a:xfrm>
-            <a:off x="1978152" y="3364992"/>
-            <a:ext cx="1225296" cy="475488"/>
-          </a:xfrm>
-          <a:prstGeom prst="rect">
-            <a:avLst/>
-          </a:prstGeom>
-          <a:noFill/>
-          <a:ln/>
-        </p:spPr>
-        <p:txBody>
-          <a:bodyPr wrap="square" lIns="0" tIns="0" rIns="0" bIns="0" rtlCol="0" anchor="ctr"/>
-          <a:lstStyle/>
-          <a:p>
-            <a:pPr algn="ctr" indent="0" marL="0">
-              <a:buNone/>
-            </a:pPr>
-            <a:r>
-              <a:rPr lang="en-US" sz="1400" b="1" dirty="0">
-                <a:solidFill>
-                  <a:srgbClr val="0D9488"/>
-                </a:solidFill>
-                <a:latin typeface="Trebuchet MS" pitchFamily="34" charset="0"/>
-                <a:ea typeface="Trebuchet MS" pitchFamily="34" charset="-122"/>
-                <a:cs typeface="Trebuchet MS" pitchFamily="34" charset="-120"/>
-              </a:rPr>
-              <a:t>le</a:t>
-            </a:r>
-            <a:endParaRPr lang="en-US" sz="1400" dirty="0"/>
-          </a:p>
-        </p:txBody>
-      </p:sp>
-      <p:sp>
-        <p:nvSpPr>
-          <p:cNvPr id="32" name="Text 30"/>
-          <p:cNvSpPr/>
-          <p:nvPr/>
-        </p:nvSpPr>
-        <p:spPr>
-          <a:xfrm>
-            <a:off x="3203448" y="3364992"/>
-            <a:ext cx="76200" cy="475488"/>
-          </a:xfrm>
-          <a:prstGeom prst="rect">
-            <a:avLst/>
-          </a:prstGeom>
-          <a:noFill/>
-          <a:ln/>
-        </p:spPr>
-        <p:txBody>
-          <a:bodyPr wrap="square" lIns="0" tIns="0" rIns="0" bIns="0" rtlCol="0" anchor="ctr"/>
-          <a:lstStyle/>
-          <a:p>
-            <a:pPr algn="ctr" indent="0" marL="0">
-              <a:buNone/>
-            </a:pPr>
-            <a:r>
-              <a:rPr lang="en-US" sz="1600" b="1" dirty="0">
-                <a:solidFill>
-                  <a:srgbClr val="0D9488"/>
-                </a:solidFill>
-                <a:latin typeface="Trebuchet MS" pitchFamily="34" charset="0"/>
-                <a:ea typeface="Trebuchet MS" pitchFamily="34" charset="-122"/>
-                <a:cs typeface="Trebuchet MS" pitchFamily="34" charset="-120"/>
-              </a:rPr>
-              <a:t>·</a:t>
-            </a:r>
-            <a:endParaRPr lang="en-US" sz="1600" dirty="0"/>
-          </a:p>
-        </p:txBody>
-      </p:sp>
-      <p:sp>
-        <p:nvSpPr>
-          <p:cNvPr id="33" name="Shape 31"/>
-          <p:cNvSpPr/>
-          <p:nvPr/>
-        </p:nvSpPr>
-        <p:spPr>
-          <a:xfrm>
-            <a:off x="3279648" y="3364992"/>
-            <a:ext cx="1225296" cy="475488"/>
-          </a:xfrm>
-          <a:prstGeom prst="rect">
-            <a:avLst>
-              <a:gd name="adj" fmla="val 9615"/>
-            </a:avLst>
-          </a:prstGeom>
-          <a:solidFill>
-            <a:srgbClr val="FFFFFF"/>
-          </a:solidFill>
-          <a:ln w="12700">
-            <a:solidFill>
-              <a:srgbClr val="0D9488"/>
-            </a:solidFill>
-            <a:prstDash val="solid"/>
-          </a:ln>
-        </p:spPr>
-      </p:sp>
-      <p:sp>
-        <p:nvSpPr>
-          <p:cNvPr id="34" name="Text 32"/>
-          <p:cNvSpPr/>
-          <p:nvPr/>
-        </p:nvSpPr>
-        <p:spPr>
-          <a:xfrm>
-            <a:off x="3279648" y="3364992"/>
-            <a:ext cx="1225296" cy="475488"/>
-          </a:xfrm>
-          <a:prstGeom prst="rect">
-            <a:avLst/>
-          </a:prstGeom>
-          <a:noFill/>
-          <a:ln/>
-        </p:spPr>
-        <p:txBody>
-          <a:bodyPr wrap="square" lIns="0" tIns="0" rIns="0" bIns="0" rtlCol="0" anchor="ctr"/>
-          <a:lstStyle/>
-          <a:p>
-            <a:pPr algn="ctr" indent="0" marL="0">
-              <a:buNone/>
-            </a:pPr>
-            <a:r>
-              <a:rPr lang="en-US" sz="1400" b="1" dirty="0">
-                <a:solidFill>
-                  <a:srgbClr val="0D9488"/>
-                </a:solidFill>
-                <a:latin typeface="Trebuchet MS" pitchFamily="34" charset="0"/>
-                <a:ea typeface="Trebuchet MS" pitchFamily="34" charset="-122"/>
-                <a:cs typeface="Trebuchet MS" pitchFamily="34" charset="-120"/>
-              </a:rPr>
-              <a:t>gal</a:t>
-            </a:r>
-            <a:endParaRPr lang="en-US" sz="1400" dirty="0"/>
-          </a:p>
-        </p:txBody>
-      </p:sp>
-      <p:sp>
-        <p:nvSpPr>
-          <p:cNvPr id="35" name="Text 33"/>
-          <p:cNvSpPr/>
-          <p:nvPr/>
-        </p:nvSpPr>
-        <p:spPr>
-          <a:xfrm>
-            <a:off x="4504944" y="3364992"/>
-            <a:ext cx="76200" cy="475488"/>
-          </a:xfrm>
-          <a:prstGeom prst="rect">
-            <a:avLst/>
-          </a:prstGeom>
-          <a:noFill/>
-          <a:ln/>
-        </p:spPr>
-        <p:txBody>
-          <a:bodyPr wrap="square" lIns="0" tIns="0" rIns="0" bIns="0" rtlCol="0" anchor="ctr"/>
-          <a:lstStyle/>
-          <a:p>
-            <a:pPr algn="ctr" indent="0" marL="0">
-              <a:buNone/>
-            </a:pPr>
-            <a:r>
-              <a:rPr lang="en-US" sz="1600" b="1" dirty="0">
-                <a:solidFill>
-                  <a:srgbClr val="0D9488"/>
-                </a:solidFill>
-                <a:latin typeface="Trebuchet MS" pitchFamily="34" charset="0"/>
-                <a:ea typeface="Trebuchet MS" pitchFamily="34" charset="-122"/>
-                <a:cs typeface="Trebuchet MS" pitchFamily="34" charset="-120"/>
-              </a:rPr>
-              <a:t>·</a:t>
-            </a:r>
-            <a:endParaRPr lang="en-US" sz="1600" dirty="0"/>
-          </a:p>
-        </p:txBody>
-      </p:sp>
-      <p:sp>
-        <p:nvSpPr>
-          <p:cNvPr id="36" name="Shape 34"/>
-          <p:cNvSpPr/>
-          <p:nvPr/>
-        </p:nvSpPr>
-        <p:spPr>
-          <a:xfrm>
-            <a:off x="4581144" y="3364992"/>
-            <a:ext cx="1225296" cy="475488"/>
-          </a:xfrm>
-          <a:prstGeom prst="rect">
-            <a:avLst>
-              <a:gd name="adj" fmla="val 9615"/>
-            </a:avLst>
-          </a:prstGeom>
-          <a:solidFill>
-            <a:srgbClr val="FFFFFF"/>
-          </a:solidFill>
-          <a:ln w="12700">
-            <a:solidFill>
-              <a:srgbClr val="0D9488"/>
-            </a:solidFill>
-            <a:prstDash val="solid"/>
-          </a:ln>
-        </p:spPr>
-      </p:sp>
-      <p:sp>
-        <p:nvSpPr>
-          <p:cNvPr id="37" name="Text 35"/>
-          <p:cNvSpPr/>
-          <p:nvPr/>
-        </p:nvSpPr>
-        <p:spPr>
-          <a:xfrm>
-            <a:off x="4581144" y="3364992"/>
-            <a:ext cx="1225296" cy="475488"/>
-          </a:xfrm>
-          <a:prstGeom prst="rect">
-            <a:avLst/>
-          </a:prstGeom>
-          <a:noFill/>
-          <a:ln/>
-        </p:spPr>
-        <p:txBody>
-          <a:bodyPr wrap="square" lIns="0" tIns="0" rIns="0" bIns="0" rtlCol="0" anchor="ctr"/>
-          <a:lstStyle/>
-          <a:p>
-            <a:pPr algn="ctr" indent="0" marL="0">
-              <a:buNone/>
-            </a:pPr>
-            <a:r>
-              <a:rPr lang="en-US" sz="1400" b="1" dirty="0">
-                <a:solidFill>
-                  <a:srgbClr val="0D9488"/>
-                </a:solidFill>
-                <a:latin typeface="Trebuchet MS" pitchFamily="34" charset="0"/>
-                <a:ea typeface="Trebuchet MS" pitchFamily="34" charset="-122"/>
-                <a:cs typeface="Trebuchet MS" pitchFamily="34" charset="-120"/>
-              </a:rPr>
-              <a:t>i</a:t>
-            </a:r>
-            <a:endParaRPr lang="en-US" sz="1400" dirty="0"/>
-          </a:p>
-        </p:txBody>
-      </p:sp>
-      <p:sp>
-        <p:nvSpPr>
-          <p:cNvPr id="38" name="Text 36"/>
-          <p:cNvSpPr/>
-          <p:nvPr/>
-        </p:nvSpPr>
-        <p:spPr>
-          <a:xfrm>
-            <a:off x="5806440" y="3364992"/>
-            <a:ext cx="76200" cy="475488"/>
-          </a:xfrm>
-          <a:prstGeom prst="rect">
-            <a:avLst/>
-          </a:prstGeom>
-          <a:noFill/>
-          <a:ln/>
-        </p:spPr>
-        <p:txBody>
-          <a:bodyPr wrap="square" lIns="0" tIns="0" rIns="0" bIns="0" rtlCol="0" anchor="ctr"/>
-          <a:lstStyle/>
-          <a:p>
-            <a:pPr algn="ctr" indent="0" marL="0">
-              <a:buNone/>
-            </a:pPr>
-            <a:r>
-              <a:rPr lang="en-US" sz="1600" b="1" dirty="0">
-                <a:solidFill>
-                  <a:srgbClr val="0D9488"/>
-                </a:solidFill>
-                <a:latin typeface="Trebuchet MS" pitchFamily="34" charset="0"/>
-                <a:ea typeface="Trebuchet MS" pitchFamily="34" charset="-122"/>
-                <a:cs typeface="Trebuchet MS" pitchFamily="34" charset="-120"/>
-              </a:rPr>
-              <a:t>·</a:t>
-            </a:r>
-            <a:endParaRPr lang="en-US" sz="1600" dirty="0"/>
-          </a:p>
-        </p:txBody>
-      </p:sp>
-      <p:sp>
-        <p:nvSpPr>
-          <p:cNvPr id="39" name="Shape 37"/>
-          <p:cNvSpPr/>
-          <p:nvPr/>
-        </p:nvSpPr>
-        <p:spPr>
-          <a:xfrm>
-            <a:off x="5882640" y="3364992"/>
-            <a:ext cx="1225296" cy="475488"/>
-          </a:xfrm>
-          <a:prstGeom prst="rect">
-            <a:avLst>
-              <a:gd name="adj" fmla="val 9615"/>
-            </a:avLst>
-          </a:prstGeom>
-          <a:solidFill>
-            <a:srgbClr val="FFFFFF"/>
-          </a:solidFill>
-          <a:ln w="12700">
-            <a:solidFill>
-              <a:srgbClr val="0D9488"/>
-            </a:solidFill>
-            <a:prstDash val="solid"/>
-          </a:ln>
-        </p:spPr>
-      </p:sp>
-      <p:sp>
-        <p:nvSpPr>
-          <p:cNvPr id="40" name="Text 38"/>
-          <p:cNvSpPr/>
-          <p:nvPr/>
-        </p:nvSpPr>
-        <p:spPr>
-          <a:xfrm>
-            <a:off x="5882640" y="3364992"/>
-            <a:ext cx="1225296" cy="475488"/>
-          </a:xfrm>
-          <a:prstGeom prst="rect">
-            <a:avLst/>
-          </a:prstGeom>
-          <a:noFill/>
-          <a:ln/>
-        </p:spPr>
-        <p:txBody>
-          <a:bodyPr wrap="square" lIns="0" tIns="0" rIns="0" bIns="0" rtlCol="0" anchor="ctr"/>
-          <a:lstStyle/>
-          <a:p>
-            <a:pPr algn="ctr" indent="0" marL="0">
-              <a:buNone/>
-            </a:pPr>
-            <a:r>
-              <a:rPr lang="en-US" sz="1400" b="1" dirty="0">
-                <a:solidFill>
-                  <a:srgbClr val="0D9488"/>
-                </a:solidFill>
-                <a:latin typeface="Trebuchet MS" pitchFamily="34" charset="0"/>
-                <a:ea typeface="Trebuchet MS" pitchFamily="34" charset="-122"/>
-                <a:cs typeface="Trebuchet MS" pitchFamily="34" charset="-120"/>
-              </a:rPr>
-              <a:t>sa</a:t>
-            </a:r>
-            <a:endParaRPr lang="en-US" sz="1400" dirty="0"/>
-          </a:p>
-        </p:txBody>
-      </p:sp>
-      <p:sp>
-        <p:nvSpPr>
-          <p:cNvPr id="41" name="Text 39"/>
-          <p:cNvSpPr/>
-          <p:nvPr/>
-        </p:nvSpPr>
-        <p:spPr>
-          <a:xfrm>
-            <a:off x="7107936" y="3364992"/>
-            <a:ext cx="76200" cy="475488"/>
-          </a:xfrm>
-          <a:prstGeom prst="rect">
-            <a:avLst/>
-          </a:prstGeom>
-          <a:noFill/>
-          <a:ln/>
-        </p:spPr>
-        <p:txBody>
-          <a:bodyPr wrap="square" lIns="0" tIns="0" rIns="0" bIns="0" rtlCol="0" anchor="ctr"/>
-          <a:lstStyle/>
-          <a:p>
-            <a:pPr algn="ctr" indent="0" marL="0">
-              <a:buNone/>
-            </a:pPr>
-            <a:r>
-              <a:rPr lang="en-US" sz="1600" b="1" dirty="0">
-                <a:solidFill>
-                  <a:srgbClr val="0D9488"/>
-                </a:solidFill>
-                <a:latin typeface="Trebuchet MS" pitchFamily="34" charset="0"/>
-                <a:ea typeface="Trebuchet MS" pitchFamily="34" charset="-122"/>
-                <a:cs typeface="Trebuchet MS" pitchFamily="34" charset="-120"/>
-              </a:rPr>
-              <a:t>·</a:t>
-            </a:r>
-            <a:endParaRPr lang="en-US" sz="1600" dirty="0"/>
-          </a:p>
-        </p:txBody>
-      </p:sp>
-      <p:sp>
-        <p:nvSpPr>
-          <p:cNvPr id="42" name="Shape 40"/>
-          <p:cNvSpPr/>
-          <p:nvPr/>
-        </p:nvSpPr>
-        <p:spPr>
-          <a:xfrm>
-            <a:off x="7184136" y="3364992"/>
-            <a:ext cx="1225296" cy="475488"/>
-          </a:xfrm>
-          <a:prstGeom prst="rect">
-            <a:avLst>
-              <a:gd name="adj" fmla="val 9615"/>
-            </a:avLst>
-          </a:prstGeom>
-          <a:solidFill>
-            <a:srgbClr val="FFFFFF"/>
-          </a:solidFill>
-          <a:ln w="12700">
-            <a:solidFill>
-              <a:srgbClr val="0D9488"/>
-            </a:solidFill>
-            <a:prstDash val="solid"/>
-          </a:ln>
-        </p:spPr>
-      </p:sp>
-      <p:sp>
-        <p:nvSpPr>
-          <p:cNvPr id="43" name="Text 41"/>
-          <p:cNvSpPr/>
-          <p:nvPr/>
-        </p:nvSpPr>
-        <p:spPr>
-          <a:xfrm>
-            <a:off x="7184136" y="3364992"/>
-            <a:ext cx="1225296" cy="475488"/>
-          </a:xfrm>
-          <a:prstGeom prst="rect">
-            <a:avLst/>
-          </a:prstGeom>
-          <a:noFill/>
-          <a:ln/>
-        </p:spPr>
-        <p:txBody>
-          <a:bodyPr wrap="square" lIns="0" tIns="0" rIns="0" bIns="0" rtlCol="0" anchor="ctr"/>
-          <a:lstStyle/>
-          <a:p>
-            <a:pPr algn="ctr" indent="0" marL="0">
-              <a:buNone/>
-            </a:pPr>
-            <a:r>
-              <a:rPr lang="en-US" sz="1400" b="1" dirty="0">
-                <a:solidFill>
-                  <a:srgbClr val="0D9488"/>
-                </a:solidFill>
-                <a:latin typeface="Trebuchet MS" pitchFamily="34" charset="0"/>
-                <a:ea typeface="Trebuchet MS" pitchFamily="34" charset="-122"/>
-                <a:cs typeface="Trebuchet MS" pitchFamily="34" charset="-120"/>
-              </a:rPr>
-              <a:t>tion</a:t>
-            </a:r>
-            <a:endParaRPr lang="en-US" sz="1400" dirty="0"/>
-          </a:p>
-        </p:txBody>
-      </p:sp>
-      <p:sp>
-        <p:nvSpPr>
-          <p:cNvPr id="44" name="Shape 42"/>
-          <p:cNvSpPr/>
-          <p:nvPr/>
-        </p:nvSpPr>
-        <p:spPr>
-          <a:xfrm>
-            <a:off x="365760" y="4096512"/>
-            <a:ext cx="1371600" cy="804672"/>
-          </a:xfrm>
-          <a:prstGeom prst="rect">
-            <a:avLst>
-              <a:gd name="adj" fmla="val 6818"/>
-            </a:avLst>
-          </a:prstGeom>
-          <a:solidFill>
-            <a:srgbClr val="E2E8F0"/>
-          </a:solidFill>
-          <a:ln w="12700">
-            <a:solidFill>
-              <a:srgbClr val="E2E8F0"/>
-            </a:solidFill>
-            <a:prstDash val="solid"/>
-          </a:ln>
-        </p:spPr>
-      </p:sp>
-      <p:sp>
-        <p:nvSpPr>
-          <p:cNvPr id="45" name="Text 43"/>
-          <p:cNvSpPr/>
-          <p:nvPr/>
-        </p:nvSpPr>
-        <p:spPr>
-          <a:xfrm>
-            <a:off x="365760" y="4096512"/>
-            <a:ext cx="1371600" cy="804672"/>
-          </a:xfrm>
-          <a:prstGeom prst="rect">
-            <a:avLst/>
-          </a:prstGeom>
-          <a:noFill/>
-          <a:ln/>
-        </p:spPr>
-        <p:txBody>
-          <a:bodyPr wrap="square" lIns="0" tIns="0" rIns="0" bIns="0" rtlCol="0" anchor="ctr"/>
-          <a:lstStyle/>
-          <a:p>
-            <a:pPr algn="ctr" indent="0" marL="0">
-              <a:buNone/>
-            </a:pPr>
-            <a:r>
-              <a:rPr lang="en-US" sz="1100" b="1" dirty="0">
-                <a:solidFill>
-                  <a:srgbClr val="475569"/>
-                </a:solidFill>
-                <a:latin typeface="Trebuchet MS" pitchFamily="34" charset="0"/>
-                <a:ea typeface="Trebuchet MS" pitchFamily="34" charset="-122"/>
-                <a:cs typeface="Trebuchet MS" pitchFamily="34" charset="-120"/>
-              </a:rPr>
-              <a:t>Phonemes</a:t>
-            </a:r>
-            <a:endParaRPr lang="en-US" sz="1100" dirty="0"/>
-          </a:p>
-        </p:txBody>
-      </p:sp>
-      <p:sp>
-        <p:nvSpPr>
-          <p:cNvPr id="46" name="Shape 44"/>
-          <p:cNvSpPr/>
-          <p:nvPr/>
-        </p:nvSpPr>
-        <p:spPr>
-          <a:xfrm>
-            <a:off x="1874520" y="4096512"/>
-            <a:ext cx="6903720" cy="804672"/>
-          </a:xfrm>
-          <a:prstGeom prst="rect">
-            <a:avLst>
-              <a:gd name="adj" fmla="val 6818"/>
-            </a:avLst>
-          </a:prstGeom>
-          <a:solidFill>
-            <a:srgbClr val="FCE7F3"/>
-          </a:solidFill>
-          <a:ln w="12700">
-            <a:solidFill>
-              <a:srgbClr val="DB2777"/>
-            </a:solidFill>
-            <a:prstDash val="solid"/>
-          </a:ln>
-        </p:spPr>
-      </p:sp>
-      <p:sp>
-        <p:nvSpPr>
-          <p:cNvPr id="47" name="Shape 45"/>
-          <p:cNvSpPr/>
-          <p:nvPr/>
-        </p:nvSpPr>
-        <p:spPr>
-          <a:xfrm>
-            <a:off x="1952244" y="4169664"/>
-            <a:ext cx="543652" cy="384048"/>
-          </a:xfrm>
-          <a:prstGeom prst="rect">
-            <a:avLst>
-              <a:gd name="adj" fmla="val 9524"/>
-            </a:avLst>
-          </a:prstGeom>
-          <a:solidFill>
-            <a:srgbClr val="FFFFFF"/>
-          </a:solidFill>
-          <a:ln w="12700">
-            <a:solidFill>
-              <a:srgbClr val="DB2777"/>
-            </a:solidFill>
-            <a:prstDash val="solid"/>
-          </a:ln>
-        </p:spPr>
-      </p:sp>
-      <p:sp>
-        <p:nvSpPr>
-          <p:cNvPr id="48" name="Text 46"/>
-          <p:cNvSpPr/>
-          <p:nvPr/>
-        </p:nvSpPr>
-        <p:spPr>
-          <a:xfrm>
-            <a:off x="1952244" y="4169664"/>
-            <a:ext cx="543652" cy="384048"/>
-          </a:xfrm>
-          <a:prstGeom prst="rect">
-            <a:avLst/>
-          </a:prstGeom>
-          <a:noFill/>
-          <a:ln/>
-        </p:spPr>
-        <p:txBody>
-          <a:bodyPr wrap="square" lIns="0" tIns="0" rIns="0" bIns="0" rtlCol="0" anchor="ctr"/>
-          <a:lstStyle/>
-          <a:p>
-            <a:pPr algn="ctr" indent="0" marL="0">
-              <a:buNone/>
-            </a:pPr>
-            <a:r>
-              <a:rPr lang="en-US" sz="900" b="1" dirty="0">
-                <a:solidFill>
-                  <a:srgbClr val="9D174D"/>
-                </a:solidFill>
-                <a:latin typeface="Trebuchet MS" pitchFamily="34" charset="0"/>
-                <a:ea typeface="Trebuchet MS" pitchFamily="34" charset="-122"/>
-                <a:cs typeface="Trebuchet MS" pitchFamily="34" charset="-120"/>
-              </a:rPr>
-              <a:t>l</a:t>
-            </a:r>
-            <a:endParaRPr lang="en-US" sz="900" dirty="0"/>
-          </a:p>
-        </p:txBody>
-      </p:sp>
-      <p:sp>
-        <p:nvSpPr>
-          <p:cNvPr id="49" name="Shape 47"/>
-          <p:cNvSpPr/>
-          <p:nvPr/>
-        </p:nvSpPr>
-        <p:spPr>
-          <a:xfrm>
-            <a:off x="2546188" y="4169664"/>
-            <a:ext cx="543652" cy="384048"/>
-          </a:xfrm>
-          <a:prstGeom prst="rect">
-            <a:avLst>
-              <a:gd name="adj" fmla="val 9524"/>
-            </a:avLst>
-          </a:prstGeom>
-          <a:solidFill>
-            <a:srgbClr val="FFFFFF"/>
-          </a:solidFill>
-          <a:ln w="12700">
-            <a:solidFill>
-              <a:srgbClr val="DB2777"/>
-            </a:solidFill>
-            <a:prstDash val="solid"/>
-          </a:ln>
-        </p:spPr>
-      </p:sp>
-      <p:sp>
-        <p:nvSpPr>
-          <p:cNvPr id="50" name="Text 48"/>
-          <p:cNvSpPr/>
-          <p:nvPr/>
-        </p:nvSpPr>
-        <p:spPr>
-          <a:xfrm>
-            <a:off x="2546188" y="4169664"/>
-            <a:ext cx="543652" cy="384048"/>
-          </a:xfrm>
-          <a:prstGeom prst="rect">
-            <a:avLst/>
-          </a:prstGeom>
-          <a:noFill/>
-          <a:ln/>
-        </p:spPr>
-        <p:txBody>
-          <a:bodyPr wrap="square" lIns="0" tIns="0" rIns="0" bIns="0" rtlCol="0" anchor="ctr"/>
-          <a:lstStyle/>
-          <a:p>
-            <a:pPr algn="ctr" indent="0" marL="0">
-              <a:buNone/>
-            </a:pPr>
-            <a:r>
-              <a:rPr lang="en-US" sz="900" b="1" dirty="0">
-                <a:solidFill>
-                  <a:srgbClr val="9D174D"/>
-                </a:solidFill>
-                <a:latin typeface="Trebuchet MS" pitchFamily="34" charset="0"/>
-                <a:ea typeface="Trebuchet MS" pitchFamily="34" charset="-122"/>
-                <a:cs typeface="Trebuchet MS" pitchFamily="34" charset="-120"/>
-              </a:rPr>
               <a:t>e</a:t>
-            </a:r>
-            <a:endParaRPr lang="en-US" sz="900" dirty="0"/>
-          </a:p>
-        </p:txBody>
-      </p:sp>
-      <p:sp>
-        <p:nvSpPr>
-          <p:cNvPr id="51" name="Shape 49"/>
-          <p:cNvSpPr/>
-          <p:nvPr/>
-        </p:nvSpPr>
-        <p:spPr>
-          <a:xfrm>
-            <a:off x="3140133" y="4169664"/>
-            <a:ext cx="543652" cy="384048"/>
-          </a:xfrm>
-          <a:prstGeom prst="rect">
-            <a:avLst>
-              <a:gd name="adj" fmla="val 9524"/>
-            </a:avLst>
-          </a:prstGeom>
-          <a:solidFill>
-            <a:srgbClr val="FFFFFF"/>
-          </a:solidFill>
-          <a:ln w="12700">
-            <a:solidFill>
-              <a:srgbClr val="DB2777"/>
-            </a:solidFill>
-            <a:prstDash val="solid"/>
-          </a:ln>
-        </p:spPr>
-      </p:sp>
-      <p:sp>
-        <p:nvSpPr>
-          <p:cNvPr id="52" name="Text 50"/>
-          <p:cNvSpPr/>
-          <p:nvPr/>
-        </p:nvSpPr>
-        <p:spPr>
-          <a:xfrm>
-            <a:off x="3140133" y="4169664"/>
-            <a:ext cx="543652" cy="384048"/>
-          </a:xfrm>
-          <a:prstGeom prst="rect">
-            <a:avLst/>
-          </a:prstGeom>
-          <a:noFill/>
-          <a:ln/>
-        </p:spPr>
-        <p:txBody>
-          <a:bodyPr wrap="square" lIns="0" tIns="0" rIns="0" bIns="0" rtlCol="0" anchor="ctr"/>
-          <a:lstStyle/>
-          <a:p>
-            <a:pPr algn="ctr" indent="0" marL="0">
-              <a:buNone/>
-            </a:pPr>
-            <a:r>
-              <a:rPr lang="en-US" sz="900" b="1" dirty="0">
-                <a:solidFill>
-                  <a:srgbClr val="9D174D"/>
-                </a:solidFill>
-                <a:latin typeface="Trebuchet MS" pitchFamily="34" charset="0"/>
-                <a:ea typeface="Trebuchet MS" pitchFamily="34" charset="-122"/>
-                <a:cs typeface="Trebuchet MS" pitchFamily="34" charset="-120"/>
-              </a:rPr>
-              <a:t>g</a:t>
-            </a:r>
-            <a:endParaRPr lang="en-US" sz="900" dirty="0"/>
-          </a:p>
-        </p:txBody>
-      </p:sp>
-      <p:sp>
-        <p:nvSpPr>
-          <p:cNvPr id="53" name="Shape 51"/>
-          <p:cNvSpPr/>
-          <p:nvPr/>
-        </p:nvSpPr>
-        <p:spPr>
-          <a:xfrm>
-            <a:off x="3734077" y="4169664"/>
-            <a:ext cx="543652" cy="384048"/>
-          </a:xfrm>
-          <a:prstGeom prst="rect">
-            <a:avLst>
-              <a:gd name="adj" fmla="val 9524"/>
-            </a:avLst>
-          </a:prstGeom>
-          <a:solidFill>
-            <a:srgbClr val="FFFFFF"/>
-          </a:solidFill>
-          <a:ln w="12700">
-            <a:solidFill>
-              <a:srgbClr val="DB2777"/>
-            </a:solidFill>
-            <a:prstDash val="solid"/>
-          </a:ln>
-        </p:spPr>
-      </p:sp>
-      <p:sp>
-        <p:nvSpPr>
-          <p:cNvPr id="54" name="Text 52"/>
-          <p:cNvSpPr/>
-          <p:nvPr/>
-        </p:nvSpPr>
-        <p:spPr>
-          <a:xfrm>
-            <a:off x="3734077" y="4169664"/>
-            <a:ext cx="543652" cy="384048"/>
-          </a:xfrm>
-          <a:prstGeom prst="rect">
-            <a:avLst/>
-          </a:prstGeom>
-          <a:noFill/>
-          <a:ln/>
-        </p:spPr>
-        <p:txBody>
-          <a:bodyPr wrap="square" lIns="0" tIns="0" rIns="0" bIns="0" rtlCol="0" anchor="ctr"/>
-          <a:lstStyle/>
-          <a:p>
-            <a:pPr algn="ctr" indent="0" marL="0">
-              <a:buNone/>
-            </a:pPr>
-            <a:r>
-              <a:rPr lang="en-US" sz="900" b="1" dirty="0">
-                <a:solidFill>
-                  <a:srgbClr val="9D174D"/>
-                </a:solidFill>
-                <a:latin typeface="Trebuchet MS" pitchFamily="34" charset="0"/>
-                <a:ea typeface="Trebuchet MS" pitchFamily="34" charset="-122"/>
-                <a:cs typeface="Trebuchet MS" pitchFamily="34" charset="-120"/>
-              </a:rPr>
-              <a:t>a</a:t>
-            </a:r>
-            <a:endParaRPr lang="en-US" sz="900" dirty="0"/>
-          </a:p>
-        </p:txBody>
-      </p:sp>
-      <p:sp>
-        <p:nvSpPr>
-          <p:cNvPr id="55" name="Shape 53"/>
-          <p:cNvSpPr/>
-          <p:nvPr/>
-        </p:nvSpPr>
-        <p:spPr>
-          <a:xfrm>
-            <a:off x="4328021" y="4169664"/>
-            <a:ext cx="543652" cy="384048"/>
-          </a:xfrm>
-          <a:prstGeom prst="rect">
-            <a:avLst>
-              <a:gd name="adj" fmla="val 9524"/>
-            </a:avLst>
-          </a:prstGeom>
-          <a:solidFill>
-            <a:srgbClr val="FFFFFF"/>
-          </a:solidFill>
-          <a:ln w="12700">
-            <a:solidFill>
-              <a:srgbClr val="DB2777"/>
-            </a:solidFill>
-            <a:prstDash val="solid"/>
-          </a:ln>
-        </p:spPr>
-      </p:sp>
-      <p:sp>
-        <p:nvSpPr>
-          <p:cNvPr id="56" name="Text 54"/>
-          <p:cNvSpPr/>
-          <p:nvPr/>
-        </p:nvSpPr>
-        <p:spPr>
-          <a:xfrm>
-            <a:off x="4328021" y="4169664"/>
-            <a:ext cx="543652" cy="384048"/>
-          </a:xfrm>
-          <a:prstGeom prst="rect">
-            <a:avLst/>
-          </a:prstGeom>
-          <a:noFill/>
-          <a:ln/>
-        </p:spPr>
-        <p:txBody>
-          <a:bodyPr wrap="square" lIns="0" tIns="0" rIns="0" bIns="0" rtlCol="0" anchor="ctr"/>
-          <a:lstStyle/>
-          <a:p>
-            <a:pPr algn="ctr" indent="0" marL="0">
-              <a:buNone/>
-            </a:pPr>
-            <a:r>
-              <a:rPr lang="en-US" sz="900" b="1" dirty="0">
-                <a:solidFill>
-                  <a:srgbClr val="9D174D"/>
-                </a:solidFill>
-                <a:latin typeface="Trebuchet MS" pitchFamily="34" charset="0"/>
-                <a:ea typeface="Trebuchet MS" pitchFamily="34" charset="-122"/>
-                <a:cs typeface="Trebuchet MS" pitchFamily="34" charset="-120"/>
-              </a:rPr>
-              <a:t>l</a:t>
-            </a:r>
-            <a:endParaRPr lang="en-US" sz="900" dirty="0"/>
-          </a:p>
-        </p:txBody>
-      </p:sp>
-      <p:sp>
-        <p:nvSpPr>
-          <p:cNvPr id="57" name="Shape 55"/>
-          <p:cNvSpPr/>
-          <p:nvPr/>
-        </p:nvSpPr>
-        <p:spPr>
-          <a:xfrm>
-            <a:off x="4921966" y="4169664"/>
-            <a:ext cx="543652" cy="384048"/>
-          </a:xfrm>
-          <a:prstGeom prst="rect">
-            <a:avLst>
-              <a:gd name="adj" fmla="val 9524"/>
-            </a:avLst>
-          </a:prstGeom>
-          <a:solidFill>
-            <a:srgbClr val="FFFFFF"/>
-          </a:solidFill>
-          <a:ln w="12700">
-            <a:solidFill>
-              <a:srgbClr val="DB2777"/>
-            </a:solidFill>
-            <a:prstDash val="solid"/>
-          </a:ln>
-        </p:spPr>
-      </p:sp>
-      <p:sp>
-        <p:nvSpPr>
-          <p:cNvPr id="58" name="Text 56"/>
-          <p:cNvSpPr/>
-          <p:nvPr/>
-        </p:nvSpPr>
-        <p:spPr>
-          <a:xfrm>
-            <a:off x="4921966" y="4169664"/>
-            <a:ext cx="543652" cy="384048"/>
-          </a:xfrm>
-          <a:prstGeom prst="rect">
-            <a:avLst/>
-          </a:prstGeom>
-          <a:noFill/>
-          <a:ln/>
-        </p:spPr>
-        <p:txBody>
-          <a:bodyPr wrap="square" lIns="0" tIns="0" rIns="0" bIns="0" rtlCol="0" anchor="ctr"/>
-          <a:lstStyle/>
-          <a:p>
-            <a:pPr algn="ctr" indent="0" marL="0">
-              <a:buNone/>
-            </a:pPr>
-            <a:r>
-              <a:rPr lang="en-US" sz="900" b="1" dirty="0">
-                <a:solidFill>
-                  <a:srgbClr val="9D174D"/>
-                </a:solidFill>
-                <a:latin typeface="Trebuchet MS" pitchFamily="34" charset="0"/>
-                <a:ea typeface="Trebuchet MS" pitchFamily="34" charset="-122"/>
-                <a:cs typeface="Trebuchet MS" pitchFamily="34" charset="-120"/>
-              </a:rPr>
-              <a:t>i</a:t>
-            </a:r>
-            <a:endParaRPr lang="en-US" sz="900" dirty="0"/>
-          </a:p>
-        </p:txBody>
-      </p:sp>
-      <p:sp>
-        <p:nvSpPr>
-          <p:cNvPr id="59" name="Shape 57"/>
-          <p:cNvSpPr/>
-          <p:nvPr/>
-        </p:nvSpPr>
-        <p:spPr>
-          <a:xfrm>
-            <a:off x="5515910" y="4169664"/>
-            <a:ext cx="543652" cy="384048"/>
-          </a:xfrm>
-          <a:prstGeom prst="rect">
-            <a:avLst>
-              <a:gd name="adj" fmla="val 9524"/>
-            </a:avLst>
-          </a:prstGeom>
-          <a:solidFill>
-            <a:srgbClr val="FFFFFF"/>
-          </a:solidFill>
-          <a:ln w="12700">
-            <a:solidFill>
-              <a:srgbClr val="DB2777"/>
-            </a:solidFill>
-            <a:prstDash val="solid"/>
-          </a:ln>
-        </p:spPr>
-      </p:sp>
-      <p:sp>
-        <p:nvSpPr>
-          <p:cNvPr id="60" name="Text 58"/>
-          <p:cNvSpPr/>
-          <p:nvPr/>
-        </p:nvSpPr>
-        <p:spPr>
-          <a:xfrm>
-            <a:off x="5515910" y="4169664"/>
-            <a:ext cx="543652" cy="384048"/>
-          </a:xfrm>
-          <a:prstGeom prst="rect">
-            <a:avLst/>
-          </a:prstGeom>
-          <a:noFill/>
-          <a:ln/>
-        </p:spPr>
-        <p:txBody>
-          <a:bodyPr wrap="square" lIns="0" tIns="0" rIns="0" bIns="0" rtlCol="0" anchor="ctr"/>
-          <a:lstStyle/>
-          <a:p>
-            <a:pPr algn="ctr" indent="0" marL="0">
-              <a:buNone/>
-            </a:pPr>
-            <a:r>
-              <a:rPr lang="en-US" sz="900" b="1" dirty="0">
-                <a:solidFill>
-                  <a:srgbClr val="9D174D"/>
-                </a:solidFill>
-                <a:latin typeface="Trebuchet MS" pitchFamily="34" charset="0"/>
-                <a:ea typeface="Trebuchet MS" pitchFamily="34" charset="-122"/>
-                <a:cs typeface="Trebuchet MS" pitchFamily="34" charset="-120"/>
-              </a:rPr>
-              <a:t>s</a:t>
-            </a:r>
-            <a:endParaRPr lang="en-US" sz="900" dirty="0"/>
-          </a:p>
-        </p:txBody>
-      </p:sp>
-      <p:sp>
-        <p:nvSpPr>
-          <p:cNvPr id="61" name="Shape 59"/>
-          <p:cNvSpPr/>
-          <p:nvPr/>
-        </p:nvSpPr>
-        <p:spPr>
-          <a:xfrm>
-            <a:off x="6109855" y="4169664"/>
-            <a:ext cx="543652" cy="384048"/>
-          </a:xfrm>
-          <a:prstGeom prst="rect">
-            <a:avLst>
-              <a:gd name="adj" fmla="val 9524"/>
-            </a:avLst>
-          </a:prstGeom>
-          <a:solidFill>
-            <a:srgbClr val="FFFFFF"/>
-          </a:solidFill>
-          <a:ln w="12700">
-            <a:solidFill>
-              <a:srgbClr val="DB2777"/>
-            </a:solidFill>
-            <a:prstDash val="solid"/>
-          </a:ln>
-        </p:spPr>
-      </p:sp>
-      <p:sp>
-        <p:nvSpPr>
-          <p:cNvPr id="62" name="Text 60"/>
-          <p:cNvSpPr/>
-          <p:nvPr/>
-        </p:nvSpPr>
-        <p:spPr>
-          <a:xfrm>
-            <a:off x="6109855" y="4169664"/>
-            <a:ext cx="543652" cy="384048"/>
-          </a:xfrm>
-          <a:prstGeom prst="rect">
-            <a:avLst/>
-          </a:prstGeom>
-          <a:noFill/>
-          <a:ln/>
-        </p:spPr>
-        <p:txBody>
-          <a:bodyPr wrap="square" lIns="0" tIns="0" rIns="0" bIns="0" rtlCol="0" anchor="ctr"/>
-          <a:lstStyle/>
-          <a:p>
-            <a:pPr algn="ctr" indent="0" marL="0">
-              <a:buNone/>
-            </a:pPr>
-            <a:r>
-              <a:rPr lang="en-US" sz="900" b="1" dirty="0">
-                <a:solidFill>
-                  <a:srgbClr val="9D174D"/>
-                </a:solidFill>
-                <a:latin typeface="Trebuchet MS" pitchFamily="34" charset="0"/>
-                <a:ea typeface="Trebuchet MS" pitchFamily="34" charset="-122"/>
-                <a:cs typeface="Trebuchet MS" pitchFamily="34" charset="-120"/>
-              </a:rPr>
-              <a:t>a</a:t>
-            </a:r>
-            <a:endParaRPr lang="en-US" sz="900" dirty="0"/>
-          </a:p>
-        </p:txBody>
-      </p:sp>
-      <p:sp>
-        <p:nvSpPr>
-          <p:cNvPr id="63" name="Shape 61"/>
-          <p:cNvSpPr/>
-          <p:nvPr/>
-        </p:nvSpPr>
-        <p:spPr>
-          <a:xfrm>
-            <a:off x="6703799" y="4169664"/>
-            <a:ext cx="543652" cy="384048"/>
-          </a:xfrm>
-          <a:prstGeom prst="rect">
-            <a:avLst>
-              <a:gd name="adj" fmla="val 9524"/>
-            </a:avLst>
-          </a:prstGeom>
-          <a:solidFill>
-            <a:srgbClr val="FFFFFF"/>
-          </a:solidFill>
-          <a:ln w="12700">
-            <a:solidFill>
-              <a:srgbClr val="DB2777"/>
-            </a:solidFill>
-            <a:prstDash val="solid"/>
-          </a:ln>
-        </p:spPr>
-      </p:sp>
-      <p:sp>
-        <p:nvSpPr>
-          <p:cNvPr id="64" name="Text 62"/>
-          <p:cNvSpPr/>
-          <p:nvPr/>
-        </p:nvSpPr>
-        <p:spPr>
-          <a:xfrm>
-            <a:off x="6703799" y="4169664"/>
-            <a:ext cx="543652" cy="384048"/>
-          </a:xfrm>
-          <a:prstGeom prst="rect">
-            <a:avLst/>
-          </a:prstGeom>
-          <a:noFill/>
-          <a:ln/>
-        </p:spPr>
-        <p:txBody>
-          <a:bodyPr wrap="square" lIns="0" tIns="0" rIns="0" bIns="0" rtlCol="0" anchor="ctr"/>
-          <a:lstStyle/>
-          <a:p>
-            <a:pPr algn="ctr" indent="0" marL="0">
-              <a:buNone/>
-            </a:pPr>
-            <a:r>
-              <a:rPr lang="en-US" sz="900" b="1" dirty="0">
-                <a:solidFill>
-                  <a:srgbClr val="9D174D"/>
-                </a:solidFill>
-                <a:latin typeface="Trebuchet MS" pitchFamily="34" charset="0"/>
-                <a:ea typeface="Trebuchet MS" pitchFamily="34" charset="-122"/>
-                <a:cs typeface="Trebuchet MS" pitchFamily="34" charset="-120"/>
-              </a:rPr>
-              <a:t>t</a:t>
-            </a:r>
-            <a:endParaRPr lang="en-US" sz="900" dirty="0"/>
-          </a:p>
-        </p:txBody>
-      </p:sp>
-      <p:sp>
-        <p:nvSpPr>
-          <p:cNvPr id="65" name="Text 63"/>
-          <p:cNvSpPr/>
-          <p:nvPr/>
-        </p:nvSpPr>
-        <p:spPr>
-          <a:xfrm>
-            <a:off x="6703799" y="4572000"/>
-            <a:ext cx="543652" cy="219456"/>
-          </a:xfrm>
-          <a:prstGeom prst="rect">
-            <a:avLst/>
-          </a:prstGeom>
-          <a:noFill/>
-          <a:ln/>
-        </p:spPr>
-        <p:txBody>
-          <a:bodyPr wrap="square" lIns="0" tIns="0" rIns="0" bIns="0" rtlCol="0" anchor="t"/>
-          <a:lstStyle/>
-          <a:p>
-            <a:pPr algn="ctr" indent="0" marL="0">
-              <a:buNone/>
-            </a:pPr>
-            <a:r>
-              <a:rPr lang="en-US" sz="750" i="1" dirty="0">
-                <a:solidFill>
-                  <a:srgbClr val="94A3B8"/>
-                </a:solidFill>
-                <a:latin typeface="Calibri" pitchFamily="34" charset="0"/>
-                <a:ea typeface="Calibri" pitchFamily="34" charset="-122"/>
-                <a:cs typeface="Calibri" pitchFamily="34" charset="-120"/>
-              </a:rPr>
-              <a:t>/sh/</a:t>
-            </a:r>
-            <a:endParaRPr lang="en-US" sz="750" dirty="0"/>
-          </a:p>
-        </p:txBody>
-      </p:sp>
-      <p:sp>
-        <p:nvSpPr>
-          <p:cNvPr id="66" name="Shape 64"/>
-          <p:cNvSpPr/>
-          <p:nvPr/>
-        </p:nvSpPr>
-        <p:spPr>
-          <a:xfrm>
-            <a:off x="7297743" y="4169664"/>
-            <a:ext cx="543652" cy="384048"/>
-          </a:xfrm>
-          <a:prstGeom prst="rect">
-            <a:avLst>
-              <a:gd name="adj" fmla="val 9524"/>
-            </a:avLst>
-          </a:prstGeom>
-          <a:solidFill>
-            <a:srgbClr val="FFFFFF"/>
-          </a:solidFill>
-          <a:ln w="12700">
-            <a:solidFill>
-              <a:srgbClr val="DB2777"/>
-            </a:solidFill>
-            <a:prstDash val="solid"/>
-          </a:ln>
-        </p:spPr>
-      </p:sp>
-      <p:sp>
-        <p:nvSpPr>
-          <p:cNvPr id="67" name="Text 65"/>
-          <p:cNvSpPr/>
-          <p:nvPr/>
-        </p:nvSpPr>
-        <p:spPr>
-          <a:xfrm>
-            <a:off x="7297743" y="4169664"/>
-            <a:ext cx="543652" cy="384048"/>
-          </a:xfrm>
-          <a:prstGeom prst="rect">
-            <a:avLst/>
-          </a:prstGeom>
-          <a:noFill/>
-          <a:ln/>
-        </p:spPr>
-        <p:txBody>
-          <a:bodyPr wrap="square" lIns="0" tIns="0" rIns="0" bIns="0" rtlCol="0" anchor="ctr"/>
-          <a:lstStyle/>
-          <a:p>
-            <a:pPr algn="ctr" indent="0" marL="0">
-              <a:buNone/>
-            </a:pPr>
-            <a:r>
-              <a:rPr lang="en-US" sz="900" b="1" dirty="0">
-                <a:solidFill>
-                  <a:srgbClr val="9D174D"/>
-                </a:solidFill>
-                <a:latin typeface="Trebuchet MS" pitchFamily="34" charset="0"/>
-                <a:ea typeface="Trebuchet MS" pitchFamily="34" charset="-122"/>
-                <a:cs typeface="Trebuchet MS" pitchFamily="34" charset="-120"/>
-              </a:rPr>
-              <a:t>io</a:t>
-            </a:r>
-            <a:endParaRPr lang="en-US" sz="900" dirty="0"/>
-          </a:p>
-        </p:txBody>
-      </p:sp>
-      <p:sp>
-        <p:nvSpPr>
-          <p:cNvPr id="68" name="Shape 66"/>
-          <p:cNvSpPr/>
-          <p:nvPr/>
-        </p:nvSpPr>
-        <p:spPr>
-          <a:xfrm>
-            <a:off x="7891688" y="4169664"/>
-            <a:ext cx="543652" cy="384048"/>
-          </a:xfrm>
-          <a:prstGeom prst="rect">
-            <a:avLst>
-              <a:gd name="adj" fmla="val 9524"/>
-            </a:avLst>
-          </a:prstGeom>
-          <a:solidFill>
-            <a:srgbClr val="FFFFFF"/>
-          </a:solidFill>
-          <a:ln w="12700">
-            <a:solidFill>
-              <a:srgbClr val="DB2777"/>
-            </a:solidFill>
-            <a:prstDash val="solid"/>
-          </a:ln>
-        </p:spPr>
-      </p:sp>
-      <p:sp>
-        <p:nvSpPr>
-          <p:cNvPr id="69" name="Text 67"/>
-          <p:cNvSpPr/>
-          <p:nvPr/>
-        </p:nvSpPr>
-        <p:spPr>
-          <a:xfrm>
-            <a:off x="7891688" y="4169664"/>
-            <a:ext cx="543652" cy="384048"/>
-          </a:xfrm>
-          <a:prstGeom prst="rect">
-            <a:avLst/>
-          </a:prstGeom>
-          <a:noFill/>
-          <a:ln/>
-        </p:spPr>
-        <p:txBody>
-          <a:bodyPr wrap="square" lIns="0" tIns="0" rIns="0" bIns="0" rtlCol="0" anchor="ctr"/>
-          <a:lstStyle/>
-          <a:p>
-            <a:pPr algn="ctr" indent="0" marL="0">
-              <a:buNone/>
-            </a:pPr>
-            <a:r>
-              <a:rPr lang="en-US" sz="900" b="1" dirty="0">
-                <a:solidFill>
-                  <a:srgbClr val="9D174D"/>
-                </a:solidFill>
-                <a:latin typeface="Trebuchet MS" pitchFamily="34" charset="0"/>
-                <a:ea typeface="Trebuchet MS" pitchFamily="34" charset="-122"/>
-                <a:cs typeface="Trebuchet MS" pitchFamily="34" charset="-120"/>
-              </a:rPr>
-              <a:t>n</a:t>
             </a:r>
             <a:endParaRPr lang="en-US" sz="900" dirty="0"/>
           </a:p>
@@ -35708,7 +35357,7 @@
                 <a:ea typeface="Trebuchet MS" pitchFamily="34" charset="-122"/>
                 <a:cs typeface="Trebuchet MS" pitchFamily="34" charset="-120"/>
               </a:rPr>
-              <a:t>-ity</a:t>
+              <a:t>-ise</a:t>
             </a:r>
             <a:endParaRPr lang="en-US" sz="1300" dirty="0"/>
           </a:p>
@@ -35861,7 +35510,7 @@
                 <a:ea typeface="Trebuchet MS" pitchFamily="34" charset="-122"/>
                 <a:cs typeface="Trebuchet MS" pitchFamily="34" charset="-120"/>
               </a:rPr>
-              <a:t>-ise</a:t>
+              <a:t>-ity</a:t>
             </a:r>
             <a:endParaRPr lang="en-US" sz="1300" dirty="0"/>
           </a:p>
@@ -36014,7 +35663,7 @@
                 <a:ea typeface="Trebuchet MS" pitchFamily="34" charset="-122"/>
                 <a:cs typeface="Trebuchet MS" pitchFamily="34" charset="-120"/>
               </a:rPr>
-              <a:t>-isation</a:t>
+              <a:t>-ise</a:t>
             </a:r>
             <a:endParaRPr lang="en-US" sz="1300" dirty="0"/>
           </a:p>
@@ -36167,7 +35816,7 @@
                 <a:ea typeface="Trebuchet MS" pitchFamily="34" charset="-122"/>
                 <a:cs typeface="Trebuchet MS" pitchFamily="34" charset="-120"/>
               </a:rPr>
-              <a:t>-istic</a:t>
+              <a:t>-isation</a:t>
             </a:r>
             <a:endParaRPr lang="en-US" sz="1300" dirty="0"/>
           </a:p>
@@ -36470,7 +36119,7 @@
                 <a:ea typeface="Trebuchet MS" pitchFamily="34" charset="-122"/>
                 <a:cs typeface="Trebuchet MS" pitchFamily="34" charset="-120"/>
               </a:rPr>
-              <a:t>legality</a:t>
+              <a:t>legalise</a:t>
             </a:r>
             <a:endParaRPr lang="en-US" sz="1200" dirty="0"/>
           </a:p>
@@ -36536,7 +36185,7 @@
                 <a:ea typeface="Trebuchet MS" pitchFamily="34" charset="-122"/>
                 <a:cs typeface="Trebuchet MS" pitchFamily="34" charset="-120"/>
               </a:rPr>
-              <a:t>legalise</a:t>
+              <a:t>legality</a:t>
             </a:r>
             <a:endParaRPr lang="en-US" sz="1200" dirty="0"/>
           </a:p>
@@ -36668,7 +36317,7 @@
                 <a:ea typeface="Trebuchet MS" pitchFamily="34" charset="-122"/>
                 <a:cs typeface="Trebuchet MS" pitchFamily="34" charset="-120"/>
               </a:rPr>
-              <a:t>paralegal</a:t>
+              <a:t>legalisation</a:t>
             </a:r>
             <a:endParaRPr lang="en-US" sz="1200" dirty="0"/>
           </a:p>
@@ -36734,7 +36383,7 @@
                 <a:ea typeface="Trebuchet MS" pitchFamily="34" charset="-122"/>
                 <a:cs typeface="Trebuchet MS" pitchFamily="34" charset="-120"/>
               </a:rPr>
-              <a:t>legalisation</a:t>
+              <a:t>paralegal</a:t>
             </a:r>
             <a:endParaRPr lang="en-US" sz="1200" dirty="0"/>
           </a:p>
@@ -37922,7 +37571,7 @@
                 <a:ea typeface="Calibri" pitchFamily="34" charset="-122"/>
                 <a:cs typeface="Calibri" pitchFamily="34" charset="-120"/>
               </a:rPr>
-              <a:t>1.  The root 'legal' comes from Latin and means relating to law.</a:t>
+              <a:t>1.  The suffix '-ly' changes the word 'legal' into a noun.</a:t>
             </a:r>
             <a:endParaRPr lang="en-US" sz="1300" dirty="0"/>
           </a:p>
@@ -37945,11 +37594,11 @@
             </a:avLst>
           </a:prstGeom>
           <a:solidFill>
-            <a:srgbClr val="DCFCE7"/>
-          </a:solidFill>
-          <a:ln w="12700">
-            <a:solidFill>
-              <a:srgbClr val="16A34A"/>
+            <a:srgbClr val="FEE2E2"/>
+          </a:solidFill>
+          <a:ln w="12700">
+            <a:solidFill>
+              <a:srgbClr val="DC2626"/>
             </a:solidFill>
             <a:prstDash val="solid"/>
           </a:ln>
@@ -37982,13 +37631,13 @@
             <a:r>
               <a:rPr lang="en-US" sz="1100" b="1" dirty="0">
                 <a:solidFill>
-                  <a:srgbClr val="16A34A"/>
+                  <a:srgbClr val="DC2626"/>
                 </a:solidFill>
                 <a:latin typeface="Trebuchet MS" pitchFamily="34" charset="0"/>
                 <a:ea typeface="Trebuchet MS" pitchFamily="34" charset="-122"/>
                 <a:cs typeface="Trebuchet MS" pitchFamily="34" charset="-120"/>
               </a:rPr>
-              <a:t>TRUE</a:t>
+              <a:t>FALSE</a:t>
             </a:r>
             <a:endParaRPr lang="en-US" sz="1100" dirty="0"/>
           </a:p>
@@ -38061,7 +37710,7 @@
                 <a:ea typeface="Calibri" pitchFamily="34" charset="-122"/>
                 <a:cs typeface="Calibri" pitchFamily="34" charset="-120"/>
               </a:rPr>
-              <a:t>2.  The prefix 'il' in 'illegal' means the same as 'extra'.</a:t>
+              <a:t>2.  The root 'legal' comes from Latin and relates to law.</a:t>
             </a:r>
             <a:endParaRPr lang="en-US" sz="1300" dirty="0"/>
           </a:p>
@@ -38084,11 +37733,11 @@
             </a:avLst>
           </a:prstGeom>
           <a:solidFill>
-            <a:srgbClr val="FEE2E2"/>
-          </a:solidFill>
-          <a:ln w="12700">
-            <a:solidFill>
-              <a:srgbClr val="DC2626"/>
+            <a:srgbClr val="DCFCE7"/>
+          </a:solidFill>
+          <a:ln w="12700">
+            <a:solidFill>
+              <a:srgbClr val="16A34A"/>
             </a:solidFill>
             <a:prstDash val="solid"/>
           </a:ln>
@@ -38121,13 +37770,13 @@
             <a:r>
               <a:rPr lang="en-US" sz="1100" b="1" dirty="0">
                 <a:solidFill>
-                  <a:srgbClr val="DC2626"/>
+                  <a:srgbClr val="16A34A"/>
                 </a:solidFill>
                 <a:latin typeface="Trebuchet MS" pitchFamily="34" charset="0"/>
                 <a:ea typeface="Trebuchet MS" pitchFamily="34" charset="-122"/>
                 <a:cs typeface="Trebuchet MS" pitchFamily="34" charset="-120"/>
               </a:rPr>
-              <a:t>FALSE</a:t>
+              <a:t>TRUE</a:t>
             </a:r>
             <a:endParaRPr lang="en-US" sz="1100" dirty="0"/>
           </a:p>
@@ -38200,7 +37849,7 @@
                 <a:ea typeface="Calibri" pitchFamily="34" charset="-122"/>
                 <a:cs typeface="Calibri" pitchFamily="34" charset="-120"/>
               </a:rPr>
-              <a:t>3.  The word 'illegal' means something that is not allowed by the law.</a:t>
+              <a:t>3.  Adding the prefix 'il' to 'legal' creates a word meaning not legal.</a:t>
             </a:r>
             <a:endParaRPr lang="en-US" sz="1300" dirty="0"/>
           </a:p>
@@ -38478,7 +38127,7 @@
                 <a:ea typeface="Calibri" pitchFamily="34" charset="-122"/>
                 <a:cs typeface="Calibri" pitchFamily="34" charset="-120"/>
               </a:rPr>
-              <a:t>5.  The suffix '-ly' in 'legally' changes the word into a noun.</a:t>
+              <a:t>5.  The word 'illegal' means something is fully supported by the law.</a:t>
             </a:r>
             <a:endParaRPr lang="en-US" sz="1300" dirty="0"/>
           </a:p>
@@ -39315,7 +38964,7 @@
                 <a:ea typeface="Trebuchet MS" pitchFamily="34" charset="-122"/>
                 <a:cs typeface="Trebuchet MS" pitchFamily="34" charset="-120"/>
               </a:rPr>
-              <a:t>legality</a:t>
+              <a:t>legalise</a:t>
             </a:r>
             <a:endParaRPr lang="en-US" sz="1300" dirty="0"/>
           </a:p>
@@ -39381,7 +39030,7 @@
                 <a:ea typeface="Trebuchet MS" pitchFamily="34" charset="-122"/>
                 <a:cs typeface="Trebuchet MS" pitchFamily="34" charset="-120"/>
               </a:rPr>
-              <a:t>legalise</a:t>
+              <a:t>legality</a:t>
             </a:r>
             <a:endParaRPr lang="en-US" sz="1300" dirty="0"/>
           </a:p>
@@ -39513,7 +39162,7 @@
                 <a:ea typeface="Trebuchet MS" pitchFamily="34" charset="-122"/>
                 <a:cs typeface="Trebuchet MS" pitchFamily="34" charset="-120"/>
               </a:rPr>
-              <a:t>paralegal</a:t>
+              <a:t>legalisation</a:t>
             </a:r>
             <a:endParaRPr lang="en-US" sz="1300" dirty="0"/>
           </a:p>
@@ -40387,7 +40036,7 @@
                 <a:ea typeface="Trebuchet MS" pitchFamily="34" charset="-122"/>
                 <a:cs typeface="Trebuchet MS" pitchFamily="34" charset="-120"/>
               </a:rPr>
-              <a:t>-ity</a:t>
+              <a:t>-ise</a:t>
             </a:r>
             <a:endParaRPr lang="en-US" sz="1300" dirty="0"/>
           </a:p>
@@ -40540,7 +40189,7 @@
                 <a:ea typeface="Trebuchet MS" pitchFamily="34" charset="-122"/>
                 <a:cs typeface="Trebuchet MS" pitchFamily="34" charset="-120"/>
               </a:rPr>
-              <a:t>-ise</a:t>
+              <a:t>-ity</a:t>
             </a:r>
             <a:endParaRPr lang="en-US" sz="1300" dirty="0"/>
           </a:p>
@@ -40693,7 +40342,7 @@
                 <a:ea typeface="Trebuchet MS" pitchFamily="34" charset="-122"/>
                 <a:cs typeface="Trebuchet MS" pitchFamily="34" charset="-120"/>
               </a:rPr>
-              <a:t>-isation</a:t>
+              <a:t>-ise</a:t>
             </a:r>
             <a:endParaRPr lang="en-US" sz="1300" dirty="0"/>
           </a:p>
@@ -40846,7 +40495,7 @@
                 <a:ea typeface="Trebuchet MS" pitchFamily="34" charset="-122"/>
                 <a:cs typeface="Trebuchet MS" pitchFamily="34" charset="-120"/>
               </a:rPr>
-              <a:t>-istic</a:t>
+              <a:t>-isation</a:t>
             </a:r>
             <a:endParaRPr lang="en-US" sz="1300" dirty="0"/>
           </a:p>
@@ -41896,7 +41545,7 @@
                 <a:ea typeface="Calibri" pitchFamily="34" charset="-122"/>
                 <a:cs typeface="Calibri" pitchFamily="34" charset="-120"/>
               </a:rPr>
-              <a:t>A person who helps lawyers with their work but is not a fully qualified lawyer.</a:t>
+              <a:t>The process of making something legal.</a:t>
             </a:r>
             <a:endParaRPr lang="en-US" sz="1200" dirty="0"/>
           </a:p>
@@ -42108,7 +41757,7 @@
                 <a:ea typeface="Trebuchet MS" pitchFamily="34" charset="-122"/>
                 <a:cs typeface="Trebuchet MS" pitchFamily="34" charset="-120"/>
               </a:rPr>
-              <a:t>legality</a:t>
+              <a:t>legalise</a:t>
             </a:r>
             <a:endParaRPr lang="en-US" sz="1200" dirty="0"/>
           </a:p>
@@ -42174,7 +41823,7 @@
                 <a:ea typeface="Calibri" pitchFamily="34" charset="-122"/>
                 <a:cs typeface="Calibri" pitchFamily="34" charset="-120"/>
               </a:rPr>
-              <a:t>To make something allowed by the law.</a:t>
+              <a:t>Whether something is allowed under the law.</a:t>
             </a:r>
             <a:endParaRPr lang="en-US" sz="1200" dirty="0"/>
           </a:p>
@@ -42247,7 +41896,7 @@
                 <a:ea typeface="Trebuchet MS" pitchFamily="34" charset="-122"/>
                 <a:cs typeface="Trebuchet MS" pitchFamily="34" charset="-120"/>
               </a:rPr>
-              <a:t>legalise</a:t>
+              <a:t>legality</a:t>
             </a:r>
             <a:endParaRPr lang="en-US" sz="1200" dirty="0"/>
           </a:p>
@@ -42313,7 +41962,7 @@
                 <a:ea typeface="Calibri" pitchFamily="34" charset="-122"/>
                 <a:cs typeface="Calibri" pitchFamily="34" charset="-120"/>
               </a:rPr>
-              <a:t>Whether something is allowed under the law.</a:t>
+              <a:t>To make something allowed by the law.</a:t>
             </a:r>
             <a:endParaRPr lang="en-US" sz="1200" dirty="0"/>
           </a:p>
@@ -42525,7 +42174,7 @@
                 <a:ea typeface="Trebuchet MS" pitchFamily="34" charset="-122"/>
                 <a:cs typeface="Trebuchet MS" pitchFamily="34" charset="-120"/>
               </a:rPr>
-              <a:t>paralegal</a:t>
+              <a:t>legalisation</a:t>
             </a:r>
             <a:endParaRPr lang="en-US" sz="1200" dirty="0"/>
           </a:p>
@@ -43250,7 +42899,7 @@
                 <a:ea typeface="Calibri" pitchFamily="34" charset="-122"/>
                 <a:cs typeface="Calibri" pitchFamily="34" charset="-120"/>
               </a:rPr>
-              <a:t>The lawyer checked that everything was done legally before signing the papers.</a:t>
+              <a:t>The lawyer checked that the contract was completely legal before anyone signed it.</a:t>
             </a:r>
             <a:endParaRPr lang="en-US" sz="1500" dirty="0"/>
           </a:p>
@@ -43414,7 +43063,7 @@
                 <a:ea typeface="Calibri" pitchFamily="34" charset="-122"/>
                 <a:cs typeface="Calibri" pitchFamily="34" charset="-120"/>
               </a:rPr>
-              <a:t>The paralegal helped the solicitor prepare documents for the court case.</a:t>
+              <a:t>The judge explained the legality of the new rule to everyone in the courtroom.</a:t>
             </a:r>
             <a:endParaRPr lang="en-US" sz="1500" dirty="0"/>
           </a:p>
